--- a/docs/slides/mcp-vlei.pptx
+++ b/docs/slides/mcp-vlei.pptx
@@ -5249,8 +5249,8 @@
         </p:nvSpPr>
         <p:spPr>
           <a:xfrm>
-            <a:off x="868680" y="2048256"/>
-            <a:ext cx="10454335" cy="3566160"/>
+            <a:off x="868680" y="2450592"/>
+            <a:ext cx="10454335" cy="2871216"/>
           </a:xfrm>
           <a:prstGeom prst="rect">
             <a:avLst/>
@@ -5293,8 +5293,8 @@
         </p:nvSpPr>
         <p:spPr>
           <a:xfrm>
-            <a:off x="1179576" y="2304288"/>
-            <a:ext cx="9832543" cy="3108960"/>
+            <a:off x="1161288" y="2743200"/>
+            <a:ext cx="9869119" cy="2286000"/>
           </a:xfrm>
           <a:prstGeom prst="rect">
             <a:avLst/>
@@ -5444,8 +5444,8 @@
         </p:nvSpPr>
         <p:spPr>
           <a:xfrm>
-            <a:off x="868680" y="6053328"/>
-            <a:ext cx="10454335" cy="365760"/>
+            <a:off x="868680" y="5943600"/>
+            <a:ext cx="9082735" cy="457200"/>
           </a:xfrm>
           <a:prstGeom prst="rect">
             <a:avLst/>
@@ -5479,7 +5479,7 @@
         </p:nvSpPr>
         <p:spPr>
           <a:xfrm>
-            <a:off x="10225735" y="6089904"/>
+            <a:off x="10225735" y="5980176"/>
             <a:ext cx="1097280" cy="274320"/>
           </a:xfrm>
           <a:prstGeom prst="rect">
@@ -5654,8 +5654,8 @@
         </p:nvSpPr>
         <p:spPr>
           <a:xfrm>
-            <a:off x="868680" y="2048256"/>
-            <a:ext cx="10454335" cy="3749039"/>
+            <a:off x="868680" y="1975104"/>
+            <a:ext cx="10454335" cy="3822192"/>
           </a:xfrm>
           <a:prstGeom prst="rect">
             <a:avLst/>
@@ -5663,7 +5663,7 @@
           <a:noFill/>
         </p:spPr>
         <p:txBody>
-          <a:bodyPr wrap="square" anchor="t" lIns="0" rIns="0" tIns="0" bIns="0">
+          <a:bodyPr wrap="square" anchor="ctr" lIns="0" rIns="0" tIns="0" bIns="0">
             <a:spAutoFit/>
           </a:bodyPr>
           <a:lstStyle/>
@@ -5752,8 +5752,8 @@
         </p:nvSpPr>
         <p:spPr>
           <a:xfrm>
-            <a:off x="868680" y="6053328"/>
-            <a:ext cx="10454335" cy="365760"/>
+            <a:off x="868680" y="5943600"/>
+            <a:ext cx="9082735" cy="457200"/>
           </a:xfrm>
           <a:prstGeom prst="rect">
             <a:avLst/>
@@ -5787,7 +5787,7 @@
         </p:nvSpPr>
         <p:spPr>
           <a:xfrm>
-            <a:off x="10225735" y="6089904"/>
+            <a:off x="10225735" y="5980176"/>
             <a:ext cx="1097280" cy="274320"/>
           </a:xfrm>
           <a:prstGeom prst="rect">
@@ -5962,8 +5962,8 @@
         </p:nvSpPr>
         <p:spPr>
           <a:xfrm>
-            <a:off x="868680" y="2048256"/>
-            <a:ext cx="10454335" cy="3749039"/>
+            <a:off x="868680" y="1975104"/>
+            <a:ext cx="10454335" cy="3822192"/>
           </a:xfrm>
           <a:prstGeom prst="rect">
             <a:avLst/>
@@ -5971,7 +5971,7 @@
           <a:noFill/>
         </p:spPr>
         <p:txBody>
-          <a:bodyPr wrap="square" anchor="t" lIns="0" rIns="0" tIns="0" bIns="0">
+          <a:bodyPr wrap="square" anchor="ctr" lIns="0" rIns="0" tIns="0" bIns="0">
             <a:spAutoFit/>
           </a:bodyPr>
           <a:lstStyle/>
@@ -6033,8 +6033,8 @@
         </p:nvSpPr>
         <p:spPr>
           <a:xfrm>
-            <a:off x="868680" y="6053328"/>
-            <a:ext cx="10454335" cy="365760"/>
+            <a:off x="868680" y="5943600"/>
+            <a:ext cx="9082735" cy="457200"/>
           </a:xfrm>
           <a:prstGeom prst="rect">
             <a:avLst/>
@@ -6068,7 +6068,7 @@
         </p:nvSpPr>
         <p:spPr>
           <a:xfrm>
-            <a:off x="10225735" y="6089904"/>
+            <a:off x="10225735" y="5980176"/>
             <a:ext cx="1097280" cy="274320"/>
           </a:xfrm>
           <a:prstGeom prst="rect">
@@ -6129,7 +6129,7 @@
         </p:nvSpPr>
         <p:spPr>
           <a:xfrm>
-            <a:off x="868680" y="1828800"/>
+            <a:off x="868680" y="2377440"/>
             <a:ext cx="10454335" cy="365760"/>
           </a:xfrm>
           <a:prstGeom prst="rect">
@@ -6164,8 +6164,8 @@
         </p:nvSpPr>
         <p:spPr>
           <a:xfrm>
-            <a:off x="868680" y="2468880"/>
-            <a:ext cx="10454335" cy="2377440"/>
+            <a:off x="868680" y="2926080"/>
+            <a:ext cx="10454335" cy="2011680"/>
           </a:xfrm>
           <a:prstGeom prst="rect">
             <a:avLst/>
@@ -6219,8 +6219,8 @@
         </p:nvSpPr>
         <p:spPr>
           <a:xfrm>
-            <a:off x="868680" y="6053328"/>
-            <a:ext cx="10454335" cy="365760"/>
+            <a:off x="868680" y="5943600"/>
+            <a:ext cx="9082735" cy="457200"/>
           </a:xfrm>
           <a:prstGeom prst="rect">
             <a:avLst/>
@@ -6254,7 +6254,7 @@
         </p:nvSpPr>
         <p:spPr>
           <a:xfrm>
-            <a:off x="10225735" y="6089904"/>
+            <a:off x="10225735" y="5980176"/>
             <a:ext cx="1097280" cy="274320"/>
           </a:xfrm>
           <a:prstGeom prst="rect">
@@ -6429,8 +6429,8 @@
         </p:nvSpPr>
         <p:spPr>
           <a:xfrm>
-            <a:off x="868680" y="2048256"/>
-            <a:ext cx="10454335" cy="3749039"/>
+            <a:off x="868680" y="1975104"/>
+            <a:ext cx="10454335" cy="3822192"/>
           </a:xfrm>
           <a:prstGeom prst="rect">
             <a:avLst/>
@@ -6438,7 +6438,7 @@
           <a:noFill/>
         </p:spPr>
         <p:txBody>
-          <a:bodyPr wrap="square" anchor="t" lIns="0" rIns="0" tIns="0" bIns="0">
+          <a:bodyPr wrap="square" anchor="ctr" lIns="0" rIns="0" tIns="0" bIns="0">
             <a:spAutoFit/>
           </a:bodyPr>
           <a:lstStyle/>
@@ -6527,8 +6527,8 @@
         </p:nvSpPr>
         <p:spPr>
           <a:xfrm>
-            <a:off x="868680" y="6053328"/>
-            <a:ext cx="10454335" cy="365760"/>
+            <a:off x="868680" y="5943600"/>
+            <a:ext cx="9082735" cy="457200"/>
           </a:xfrm>
           <a:prstGeom prst="rect">
             <a:avLst/>
@@ -6549,7 +6549,7 @@
                 </a:solidFill>
                 <a:latin typeface="Georgia"/>
               </a:rPr>
-              <a:t>What the system enforces is that the attesting institution was itself verified first, and that every decision records whose attestation it rested on.</a:t>
+              <a:t>The attesting institution must itself have been verified first.</a:t>
             </a:r>
           </a:p>
         </p:txBody>
@@ -6562,7 +6562,7 @@
         </p:nvSpPr>
         <p:spPr>
           <a:xfrm>
-            <a:off x="10225735" y="6089904"/>
+            <a:off x="10225735" y="5980176"/>
             <a:ext cx="1097280" cy="274320"/>
           </a:xfrm>
           <a:prstGeom prst="rect">
@@ -6737,8 +6737,8 @@
         </p:nvSpPr>
         <p:spPr>
           <a:xfrm>
-            <a:off x="868680" y="2048256"/>
-            <a:ext cx="10454335" cy="3749039"/>
+            <a:off x="868680" y="1975104"/>
+            <a:ext cx="10454335" cy="3822192"/>
           </a:xfrm>
           <a:prstGeom prst="rect">
             <a:avLst/>
@@ -6746,7 +6746,7 @@
           <a:noFill/>
         </p:spPr>
         <p:txBody>
-          <a:bodyPr wrap="square" anchor="t" lIns="0" rIns="0" tIns="0" bIns="0">
+          <a:bodyPr wrap="square" anchor="ctr" lIns="0" rIns="0" tIns="0" bIns="0">
             <a:spAutoFit/>
           </a:bodyPr>
           <a:lstStyle/>
@@ -6910,8 +6910,8 @@
         </p:nvSpPr>
         <p:spPr>
           <a:xfrm>
-            <a:off x="868680" y="6053328"/>
-            <a:ext cx="10454335" cy="365760"/>
+            <a:off x="868680" y="5943600"/>
+            <a:ext cx="9082735" cy="457200"/>
           </a:xfrm>
           <a:prstGeom prst="rect">
             <a:avLst/>
@@ -6945,7 +6945,7 @@
         </p:nvSpPr>
         <p:spPr>
           <a:xfrm>
-            <a:off x="10225735" y="6089904"/>
+            <a:off x="10225735" y="5980176"/>
             <a:ext cx="1097280" cy="274320"/>
           </a:xfrm>
           <a:prstGeom prst="rect">
@@ -7121,7 +7121,7 @@
           <p:nvPr/>
         </p:nvGraphicFramePr>
         <p:xfrm>
-          <a:off x="868680" y="2066543"/>
+          <a:off x="868680" y="2624328"/>
           <a:ext cx="10454334" cy="2523744"/>
         </p:xfrm>
         <a:graphic>
@@ -7370,7 +7370,7 @@
                       <a:r>
                         <a:rPr sz="1400" b="0" i="0">
                           <a:solidFill>
-                            <a:srgbClr val="C0392B"/>
+                            <a:srgbClr val="1E1B16"/>
                           </a:solidFill>
                           <a:latin typeface="Segoe UI"/>
                         </a:rPr>
@@ -7555,8 +7555,8 @@
         </p:nvSpPr>
         <p:spPr>
           <a:xfrm>
-            <a:off x="868680" y="6053328"/>
-            <a:ext cx="10454335" cy="365760"/>
+            <a:off x="868680" y="5943600"/>
+            <a:ext cx="9082735" cy="457200"/>
           </a:xfrm>
           <a:prstGeom prst="rect">
             <a:avLst/>
@@ -7590,7 +7590,7 @@
         </p:nvSpPr>
         <p:spPr>
           <a:xfrm>
-            <a:off x="10225735" y="6089904"/>
+            <a:off x="10225735" y="5980176"/>
             <a:ext cx="1097280" cy="274320"/>
           </a:xfrm>
           <a:prstGeom prst="rect">
@@ -7765,8 +7765,8 @@
         </p:nvSpPr>
         <p:spPr>
           <a:xfrm>
-            <a:off x="868680" y="2048256"/>
-            <a:ext cx="10454335" cy="3749039"/>
+            <a:off x="868680" y="1975104"/>
+            <a:ext cx="10454335" cy="3822192"/>
           </a:xfrm>
           <a:prstGeom prst="rect">
             <a:avLst/>
@@ -7774,7 +7774,7 @@
           <a:noFill/>
         </p:spPr>
         <p:txBody>
-          <a:bodyPr wrap="square" anchor="t" lIns="0" rIns="0" tIns="0" bIns="0">
+          <a:bodyPr wrap="square" anchor="ctr" lIns="0" rIns="0" tIns="0" bIns="0">
             <a:spAutoFit/>
           </a:bodyPr>
           <a:lstStyle/>
@@ -7868,8 +7868,8 @@
         </p:nvSpPr>
         <p:spPr>
           <a:xfrm>
-            <a:off x="868680" y="6053328"/>
-            <a:ext cx="10454335" cy="365760"/>
+            <a:off x="868680" y="5943600"/>
+            <a:ext cx="9082735" cy="457200"/>
           </a:xfrm>
           <a:prstGeom prst="rect">
             <a:avLst/>
@@ -7903,7 +7903,7 @@
         </p:nvSpPr>
         <p:spPr>
           <a:xfrm>
-            <a:off x="10225735" y="6089904"/>
+            <a:off x="10225735" y="5980176"/>
             <a:ext cx="1097280" cy="274320"/>
           </a:xfrm>
           <a:prstGeom prst="rect">
@@ -8078,8 +8078,8 @@
         </p:nvSpPr>
         <p:spPr>
           <a:xfrm>
-            <a:off x="868680" y="2048256"/>
-            <a:ext cx="10454335" cy="3749039"/>
+            <a:off x="868680" y="1975104"/>
+            <a:ext cx="10454335" cy="3822192"/>
           </a:xfrm>
           <a:prstGeom prst="rect">
             <a:avLst/>
@@ -8087,7 +8087,7 @@
           <a:noFill/>
         </p:spPr>
         <p:txBody>
-          <a:bodyPr wrap="square" anchor="t" lIns="0" rIns="0" tIns="0" bIns="0">
+          <a:bodyPr wrap="square" anchor="ctr" lIns="0" rIns="0" tIns="0" bIns="0">
             <a:spAutoFit/>
           </a:bodyPr>
           <a:lstStyle/>
@@ -8176,8 +8176,8 @@
         </p:nvSpPr>
         <p:spPr>
           <a:xfrm>
-            <a:off x="868680" y="6053328"/>
-            <a:ext cx="10454335" cy="365760"/>
+            <a:off x="868680" y="5943600"/>
+            <a:ext cx="9082735" cy="457200"/>
           </a:xfrm>
           <a:prstGeom prst="rect">
             <a:avLst/>
@@ -8211,7 +8211,7 @@
         </p:nvSpPr>
         <p:spPr>
           <a:xfrm>
-            <a:off x="10225735" y="6089904"/>
+            <a:off x="10225735" y="5980176"/>
             <a:ext cx="1097280" cy="274320"/>
           </a:xfrm>
           <a:prstGeom prst="rect">
@@ -8386,8 +8386,8 @@
         </p:nvSpPr>
         <p:spPr>
           <a:xfrm>
-            <a:off x="868680" y="2048256"/>
-            <a:ext cx="10454335" cy="3566160"/>
+            <a:off x="868680" y="2516632"/>
+            <a:ext cx="10454335" cy="2739136"/>
           </a:xfrm>
           <a:prstGeom prst="rect">
             <a:avLst/>
@@ -8430,8 +8430,8 @@
         </p:nvSpPr>
         <p:spPr>
           <a:xfrm>
-            <a:off x="1179576" y="2304288"/>
-            <a:ext cx="9832543" cy="3108960"/>
+            <a:off x="1161288" y="2809240"/>
+            <a:ext cx="9869119" cy="2153920"/>
           </a:xfrm>
           <a:prstGeom prst="rect">
             <a:avLst/>
@@ -8581,8 +8581,8 @@
         </p:nvSpPr>
         <p:spPr>
           <a:xfrm>
-            <a:off x="868680" y="6053328"/>
-            <a:ext cx="10454335" cy="365760"/>
+            <a:off x="868680" y="5943600"/>
+            <a:ext cx="9082735" cy="457200"/>
           </a:xfrm>
           <a:prstGeom prst="rect">
             <a:avLst/>
@@ -8616,7 +8616,7 @@
         </p:nvSpPr>
         <p:spPr>
           <a:xfrm>
-            <a:off x="10225735" y="6089904"/>
+            <a:off x="10225735" y="5980176"/>
             <a:ext cx="1097280" cy="274320"/>
           </a:xfrm>
           <a:prstGeom prst="rect">
@@ -8792,7 +8792,7 @@
           <p:nvPr/>
         </p:nvGraphicFramePr>
         <p:xfrm>
-          <a:off x="868680" y="2066543"/>
+          <a:off x="868680" y="2624328"/>
           <a:ext cx="10454333" cy="2523744"/>
         </p:xfrm>
         <a:graphic>
@@ -8955,7 +8955,7 @@
                           </a:solidFill>
                           <a:latin typeface="Segoe UI"/>
                         </a:rPr>
-                        <a:t>OAuth `iss</a:t>
+                        <a:t>OAuth iss</a:t>
                       </a:r>
                     </a:p>
                   </a:txBody>
@@ -9023,7 +9023,7 @@
                           </a:solidFill>
                           <a:latin typeface="Segoe UI"/>
                         </a:rPr>
-                        <a:t>OAuth `client_id</a:t>
+                        <a:t>OAuth client_id</a:t>
                       </a:r>
                     </a:p>
                   </a:txBody>
@@ -9091,7 +9091,7 @@
                           </a:solidFill>
                           <a:latin typeface="Segoe UI"/>
                         </a:rPr>
-                        <a:t>OAuth `sub</a:t>
+                        <a:t>OAuth sub</a:t>
                       </a:r>
                     </a:p>
                   </a:txBody>
@@ -9226,8 +9226,8 @@
         </p:nvSpPr>
         <p:spPr>
           <a:xfrm>
-            <a:off x="868680" y="6053328"/>
-            <a:ext cx="10454335" cy="365760"/>
+            <a:off x="868680" y="5943600"/>
+            <a:ext cx="9082735" cy="457200"/>
           </a:xfrm>
           <a:prstGeom prst="rect">
             <a:avLst/>
@@ -9261,7 +9261,7 @@
         </p:nvSpPr>
         <p:spPr>
           <a:xfrm>
-            <a:off x="10225735" y="6089904"/>
+            <a:off x="10225735" y="5980176"/>
             <a:ext cx="1097280" cy="274320"/>
           </a:xfrm>
           <a:prstGeom prst="rect">
@@ -9437,7 +9437,7 @@
           <p:nvPr/>
         </p:nvGraphicFramePr>
         <p:xfrm>
-          <a:off x="868680" y="2066543"/>
+          <a:off x="868680" y="3044952"/>
           <a:ext cx="10454333" cy="1682496"/>
         </p:xfrm>
         <a:graphic>
@@ -9735,8 +9735,8 @@
         </p:nvSpPr>
         <p:spPr>
           <a:xfrm>
-            <a:off x="868680" y="6053328"/>
-            <a:ext cx="10454335" cy="365760"/>
+            <a:off x="868680" y="5943600"/>
+            <a:ext cx="9082735" cy="457200"/>
           </a:xfrm>
           <a:prstGeom prst="rect">
             <a:avLst/>
@@ -9770,7 +9770,7 @@
         </p:nvSpPr>
         <p:spPr>
           <a:xfrm>
-            <a:off x="10225735" y="6089904"/>
+            <a:off x="10225735" y="5980176"/>
             <a:ext cx="1097280" cy="274320"/>
           </a:xfrm>
           <a:prstGeom prst="rect">
@@ -9945,8 +9945,8 @@
         </p:nvSpPr>
         <p:spPr>
           <a:xfrm>
-            <a:off x="868680" y="2048256"/>
-            <a:ext cx="10454335" cy="3566160"/>
+            <a:off x="868680" y="2164842"/>
+            <a:ext cx="10454335" cy="3442716"/>
           </a:xfrm>
           <a:prstGeom prst="rect">
             <a:avLst/>
@@ -9989,8 +9989,8 @@
         </p:nvSpPr>
         <p:spPr>
           <a:xfrm>
-            <a:off x="1179576" y="2304288"/>
-            <a:ext cx="9832543" cy="3108960"/>
+            <a:off x="1161288" y="2457450"/>
+            <a:ext cx="9869119" cy="2857500"/>
           </a:xfrm>
           <a:prstGeom prst="rect">
             <a:avLst/>
@@ -10172,8 +10172,8 @@
         </p:nvSpPr>
         <p:spPr>
           <a:xfrm>
-            <a:off x="868680" y="6053328"/>
-            <a:ext cx="10454335" cy="365760"/>
+            <a:off x="868680" y="5943600"/>
+            <a:ext cx="9082735" cy="457200"/>
           </a:xfrm>
           <a:prstGeom prst="rect">
             <a:avLst/>
@@ -10207,7 +10207,7 @@
         </p:nvSpPr>
         <p:spPr>
           <a:xfrm>
-            <a:off x="10225735" y="6089904"/>
+            <a:off x="10225735" y="5980176"/>
             <a:ext cx="1097280" cy="274320"/>
           </a:xfrm>
           <a:prstGeom prst="rect">
@@ -10382,8 +10382,8 @@
         </p:nvSpPr>
         <p:spPr>
           <a:xfrm>
-            <a:off x="868680" y="2048256"/>
-            <a:ext cx="10454335" cy="3749039"/>
+            <a:off x="868680" y="1975104"/>
+            <a:ext cx="10454335" cy="3822192"/>
           </a:xfrm>
           <a:prstGeom prst="rect">
             <a:avLst/>
@@ -10391,7 +10391,7 @@
           <a:noFill/>
         </p:spPr>
         <p:txBody>
-          <a:bodyPr wrap="square" anchor="t" lIns="0" rIns="0" tIns="0" bIns="0">
+          <a:bodyPr wrap="square" anchor="ctr" lIns="0" rIns="0" tIns="0" bIns="0">
             <a:spAutoFit/>
           </a:bodyPr>
           <a:lstStyle/>
@@ -10505,7 +10505,7 @@
         </p:nvSpPr>
         <p:spPr>
           <a:xfrm>
-            <a:off x="10225735" y="6089904"/>
+            <a:off x="10225735" y="5980176"/>
             <a:ext cx="1097280" cy="274320"/>
           </a:xfrm>
           <a:prstGeom prst="rect">
@@ -10680,8 +10680,8 @@
         </p:nvSpPr>
         <p:spPr>
           <a:xfrm>
-            <a:off x="868680" y="2048256"/>
-            <a:ext cx="10454335" cy="3749039"/>
+            <a:off x="868680" y="1975104"/>
+            <a:ext cx="10454335" cy="3822192"/>
           </a:xfrm>
           <a:prstGeom prst="rect">
             <a:avLst/>
@@ -10689,7 +10689,7 @@
           <a:noFill/>
         </p:spPr>
         <p:txBody>
-          <a:bodyPr wrap="square" anchor="t" lIns="0" rIns="0" tIns="0" bIns="0">
+          <a:bodyPr wrap="square" anchor="ctr" lIns="0" rIns="0" tIns="0" bIns="0">
             <a:spAutoFit/>
           </a:bodyPr>
           <a:lstStyle/>
@@ -10751,8 +10751,8 @@
         </p:nvSpPr>
         <p:spPr>
           <a:xfrm>
-            <a:off x="868680" y="6053328"/>
-            <a:ext cx="10454335" cy="365760"/>
+            <a:off x="868680" y="5943600"/>
+            <a:ext cx="9082735" cy="457200"/>
           </a:xfrm>
           <a:prstGeom prst="rect">
             <a:avLst/>
@@ -10786,7 +10786,7 @@
         </p:nvSpPr>
         <p:spPr>
           <a:xfrm>
-            <a:off x="10225735" y="6089904"/>
+            <a:off x="10225735" y="5980176"/>
             <a:ext cx="1097280" cy="274320"/>
           </a:xfrm>
           <a:prstGeom prst="rect">
@@ -10961,8 +10961,8 @@
         </p:nvSpPr>
         <p:spPr>
           <a:xfrm>
-            <a:off x="868680" y="2048256"/>
-            <a:ext cx="10454335" cy="3749039"/>
+            <a:off x="868680" y="1975104"/>
+            <a:ext cx="10454335" cy="3822192"/>
           </a:xfrm>
           <a:prstGeom prst="rect">
             <a:avLst/>
@@ -10970,7 +10970,7 @@
           <a:noFill/>
         </p:spPr>
         <p:txBody>
-          <a:bodyPr wrap="square" anchor="t" lIns="0" rIns="0" tIns="0" bIns="0">
+          <a:bodyPr wrap="square" anchor="ctr" lIns="0" rIns="0" tIns="0" bIns="0">
             <a:spAutoFit/>
           </a:bodyPr>
           <a:lstStyle/>
@@ -11084,7 +11084,7 @@
         </p:nvSpPr>
         <p:spPr>
           <a:xfrm>
-            <a:off x="10225735" y="6089904"/>
+            <a:off x="10225735" y="5980176"/>
             <a:ext cx="1097280" cy="274320"/>
           </a:xfrm>
           <a:prstGeom prst="rect">
@@ -11260,7 +11260,7 @@
           <p:nvPr/>
         </p:nvGraphicFramePr>
         <p:xfrm>
-          <a:off x="868680" y="2066543"/>
+          <a:off x="868680" y="3044952"/>
           <a:ext cx="10454334" cy="1682496"/>
         </p:xfrm>
         <a:graphic>
@@ -11558,8 +11558,8 @@
         </p:nvSpPr>
         <p:spPr>
           <a:xfrm>
-            <a:off x="868680" y="6053328"/>
-            <a:ext cx="10454335" cy="365760"/>
+            <a:off x="868680" y="5943600"/>
+            <a:ext cx="9082735" cy="457200"/>
           </a:xfrm>
           <a:prstGeom prst="rect">
             <a:avLst/>
@@ -11593,7 +11593,7 @@
         </p:nvSpPr>
         <p:spPr>
           <a:xfrm>
-            <a:off x="10225735" y="6089904"/>
+            <a:off x="10225735" y="5980176"/>
             <a:ext cx="1097280" cy="274320"/>
           </a:xfrm>
           <a:prstGeom prst="rect">
@@ -11768,8 +11768,8 @@
         </p:nvSpPr>
         <p:spPr>
           <a:xfrm>
-            <a:off x="868680" y="2048256"/>
-            <a:ext cx="10454335" cy="3566160"/>
+            <a:off x="868680" y="2112772"/>
+            <a:ext cx="10454335" cy="3546856"/>
           </a:xfrm>
           <a:prstGeom prst="rect">
             <a:avLst/>
@@ -11812,8 +11812,8 @@
         </p:nvSpPr>
         <p:spPr>
           <a:xfrm>
-            <a:off x="1179576" y="2304288"/>
-            <a:ext cx="9832543" cy="3108960"/>
+            <a:off x="1161288" y="2405380"/>
+            <a:ext cx="9869119" cy="2961640"/>
           </a:xfrm>
           <a:prstGeom prst="rect">
             <a:avLst/>
@@ -12011,8 +12011,8 @@
         </p:nvSpPr>
         <p:spPr>
           <a:xfrm>
-            <a:off x="868680" y="6053328"/>
-            <a:ext cx="10454335" cy="365760"/>
+            <a:off x="868680" y="5943600"/>
+            <a:ext cx="9082735" cy="457200"/>
           </a:xfrm>
           <a:prstGeom prst="rect">
             <a:avLst/>
@@ -12046,7 +12046,7 @@
         </p:nvSpPr>
         <p:spPr>
           <a:xfrm>
-            <a:off x="10225735" y="6089904"/>
+            <a:off x="10225735" y="5980176"/>
             <a:ext cx="1097280" cy="274320"/>
           </a:xfrm>
           <a:prstGeom prst="rect">

--- a/docs/slides/mcp-vlei.pptx
+++ b/docs/slides/mcp-vlei.pptx
@@ -24,6 +24,7 @@
     <p:sldId id="272" r:id="rId24"/>
     <p:sldId id="273" r:id="rId25"/>
     <p:sldId id="274" r:id="rId26"/>
+    <p:sldId id="275" r:id="rId27"/>
   </p:sldIdLst>
   <p:sldSz cx="12191695" cy="6858000" type="screen4x3"/>
   <p:notesSz cx="6858000" cy="9144000"/>
@@ -590,13 +591,13 @@
           <a:lstStyle/>
           <a:p>
             <a:r>
-              <a:t>Eight checks, and the order is the design. Seven are decided from the request itself; one leaves the machine. A verification service that is slow or down then costs you one check instead of all of them.</a:t>
+              <a:t>Eight checks, and the order is the design. The first three are decided from the request itself, before anything is fetched. Two read from a witness: the signer's current key, and the issuers' logs for revocation. A witness that is slow or down then costs you those checks, never the ones before them — a tampered request is refused as tampered, not as a timeout.</a:t>
             </a:r>
           </a:p>
           <a:p/>
           <a:p>
             <a:r>
-              <a:t>Nine failure layers, and the correct response differs for each. A stale signature is retried once. 'revoked' means stop and tell the user a new credential is needed. 'unknown_root' means two organizations disagree about whom they trust and only they can fix it. An agent that receives 'access denied' can do none of that.</a:t>
+              <a:t>Nine failure layers, and the correct response differs for each. A stale signature is retried once. revoked means stop and tell the user a new credential is needed. unknown_root means two organizations disagree about whom they trust and only they can fix it. An agent that receives 'access denied' can do none of that.</a:t>
             </a:r>
           </a:p>
         </p:txBody>
@@ -760,7 +761,13 @@
           <a:p/>
           <a:p>
             <a:r>
-              <a:t>Writing that table found three requirements with nothing behind them. It also has a section on what we deliberately do not claim. A conformance document that lists only successes is not evidence of anything.</a:t>
+              <a:t>Writing that table found three requirements with nothing behind them. A review found something worse, and I would rather tell you than have you find it: our verifier checked the request signature under a key the request itself carried. Every test passed, because every test signed with the right key. Anyone who had seen a credential could have presented it as theirs. It now reads the key from the signer's own log; the tests that would have caught it are in the table, each written to fail against the old code first.</a:t>
+            </a:r>
+          </a:p>
+          <a:p/>
+          <a:p>
+            <a:r>
+              <a:t>The table also has a section on what we deliberately do not claim. A conformance document that lists only successes is not evidence of anything.</a:t>
             </a:r>
           </a:p>
         </p:txBody>
@@ -842,7 +849,7 @@
           <a:p/>
           <a:p>
             <a:r>
-              <a:t>[Play demo-full.mp4, 3:35.]</a:t>
+              <a:t>[Play demo-full.mp4, 4:05.]</a:t>
             </a:r>
           </a:p>
         </p:txBody>
@@ -912,25 +919,25 @@
           <a:lstStyle/>
           <a:p>
             <a:r>
-              <a:t>Institutions already have both. The first is a public key directory: publish once, and anyone verifies independently, including before making contact.</a:t>
+              <a:t>Taiwan already runs this model. The Ministry of Digital Affairs has piloted the Digital Identity Wallet since last December: a person carries a credential and shows only what the counter needs to see. It collects parcels at convenience stores, it rents cars in a pilot, it carries degree certificates — and since May, a company's business certificate, held by the person authorized to act for it.</a:t>
             </a:r>
           </a:p>
           <a:p/>
           <a:p>
             <a:r>
-              <a:t>The second is the letter of confirmation. District office A writes to office B to confirm a record; B replies; A relies on B's reply. As an agent call, B returns a signed attestation and A verifies B's signature.</a:t>
+              <a:t>So the idea is not new here. What the wallet does not have is the holder on the right of this table: the agent acting for the entity. The Deputy Minister made the same point this month — if agents take part in transactions, they may need an ID, to establish who the agent is and whom it represents.</a:t>
             </a:r>
           </a:p>
           <a:p/>
           <a:p>
             <a:r>
-              <a:t>The correspondence procedure is not replaced by something unfamiliar. It becomes a verifiable call that completes in a second and leaves a signature rather than a letterhead.</a:t>
+              <a:t>One thing to be precise about. The wallet is built on OpenID4VC and SD-JWT; this is built on GLEIF's vLEI, on KERI and ACDC. So this is not an extension of the wallet. It is the same way of thinking, applied to the holder that is missing — and to an identity a counterparty in another country can also verify.</a:t>
             </a:r>
           </a:p>
           <a:p/>
           <a:p>
             <a:r>
-              <a:t>The honest limit: relying on an attestation means relying on that institution's judgment, exactly as relying on a letter does today. What the system enforces is that the attesting institution must itself have been verified first, and that every decision records whose attestation it rested on. It cannot make that institution careful.</a:t>
+              <a:t>[Say "same idea, different holder" — not "we extend the wallet". The stacks are different, and a room that built the wallet will know. The Deputy Minister's words are as reported by the press, not a ministry statement; say "made the point", not "said".]</a:t>
             </a:r>
           </a:p>
         </p:txBody>
@@ -1000,19 +1007,31 @@
           <a:lstStyle/>
           <a:p>
             <a:r>
-              <a:t>Each stage is independently useful. An institution that stops after stage two has gained something real.</a:t>
+              <a:t>Institutions already have both. The first is a public key directory: publish once, and anyone verifies independently, including before making contact.</a:t>
             </a:r>
           </a:p>
           <a:p/>
           <a:p>
             <a:r>
-              <a:t>Stage zero is the substantive one and it is not technical: the business unit defines its role vocabulary. Those names appear in every authorization decision and every audit record afterwards.</a:t>
+              <a:t>The second is the letter of confirmation. District office A writes to office B to confirm a record; B replies; A relies on B's reply. As an agent call, B returns a signed attestation and A verifies B's signature.</a:t>
             </a:r>
           </a:p>
           <a:p/>
           <a:p>
             <a:r>
-              <a:t>Only stage three touches IT, and it is the one that decides whether this is a configuration change or a project. Verification goes at the gateway; the systems behind it read headers, as they already do.</a:t>
+              <a:t>The correspondence procedure is not replaced by something unfamiliar. It becomes a verifiable call that completes in a second and leaves a signature rather than a letterhead.</a:t>
+            </a:r>
+          </a:p>
+          <a:p/>
+          <a:p>
+            <a:r>
+              <a:t>The honest limit: relying on an attestation means relying on that institution's judgment, exactly as relying on a letter does today. What the system enforces is that the attesting institution must itself have been verified first, and that every decision records whose attestation it rested on. It cannot make that institution careful.</a:t>
+            </a:r>
+          </a:p>
+          <a:p/>
+          <a:p>
+            <a:r>
+              <a:t>[來函確認 stays in Chinese on the slide on purpose: it is the name this room uses for the procedure, and recognising it is the point of the slide. Say it in English; let the slide say it in Chinese.]</a:t>
             </a:r>
           </a:p>
         </p:txBody>
@@ -1082,7 +1101,19 @@
           <a:lstStyle/>
           <a:p>
             <a:r>
-              <a:t>One row deserves emphasis, because it is the one most likely to be misread. This does not replace existing user authentication. vLEI answers which organization; your existing sign-on still answers which user. A high-value action should require both. An institution that drops one because it gained the other has weakened itself.</a:t>
+              <a:t>Each stage is independently useful. An institution that stops after stage two has gained something real.</a:t>
+            </a:r>
+          </a:p>
+          <a:p/>
+          <a:p>
+            <a:r>
+              <a:t>Stage zero is the substantive one and it is not technical: the business unit defines its role vocabulary. Those names appear in every authorization decision and every audit record afterwards.</a:t>
+            </a:r>
+          </a:p>
+          <a:p/>
+          <a:p>
+            <a:r>
+              <a:t>Only stage three touches IT, and it is the one that decides whether this is a configuration change or a project. Verification goes at the gateway; the systems behind it read headers, as they already do.</a:t>
             </a:r>
           </a:p>
         </p:txBody>
@@ -1152,13 +1183,7 @@
           <a:lstStyle/>
           <a:p>
             <a:r>
-              <a:t>I would rather state these than be asked. A valid credential proves an organization asserted a role. It does not prove the request is legitimate — authorization policy stays yours, and this makes it enforceable rather than writing it for you.</a:t>
-            </a:r>
-          </a:p>
-          <a:p/>
-          <a:p>
-            <a:r>
-              <a:t>The last one is a genuine open question, which brings me to what I am asking for.</a:t>
+              <a:t>One row deserves emphasis, because it is the one most likely to be misread. This does not replace existing user authentication. vLEI answers which organization; your existing sign-on still answers which user. A high-value action should require both. An institution that drops one because it gained the other has weakened itself.</a:t>
             </a:r>
           </a:p>
         </p:txBody>
@@ -1228,19 +1253,19 @@
           <a:lstStyle/>
           <a:p>
             <a:r>
-              <a:t>To the institutions here, first, because you are the ones who would carry the risk: one procedure, one counterpart, stages zero through three. Not a programme. One correspondence procedure that currently takes days, and no change to the system behind your gateway.</a:t>
+              <a:t>I would rather state these than be asked. A valid credential proves an organization asserted a role. It does not prove the request is legitimate — authorization policy stays yours, and this makes it enforceable rather than writing it for you.</a:t>
             </a:r>
           </a:p>
           <a:p/>
           <a:p>
             <a:r>
-              <a:t>To GLEIF: an ECR role vocabulary for agent engagement contexts. A confirmation of, or correction to, the delegated-AID model, including whether it is compatible with the Ecosystem Governance Framework — we chose a reading of the existing mechanisms and would rather be corrected now than at deployment. And test credentials against a real root, so the honesty statement can be retired.</a:t>
+              <a:t>Two are ours to fix. We ask one witness for a key log, so two conflicting logs for the same identifier — what watchers exist to catch — would not be noticed. And the specification describes withdrawing one agent without touching the person's credential; we have not built that switch. Withdrawing the credential works, and stops every agent under it.</a:t>
             </a:r>
           </a:p>
           <a:p/>
           <a:p>
             <a:r>
-              <a:t>To AAIF: this belongs in the Security Interest Group and in the ext-auth discussion. I would like it discussed, and I would like to be told where it is wrong.</a:t>
+              <a:t>The last one is a genuine open question, which brings me to what I am asking for.</a:t>
             </a:r>
           </a:p>
         </p:txBody>
@@ -1310,13 +1335,19 @@
           <a:lstStyle/>
           <a:p>
             <a:r>
-              <a:t>Everything is in one repository, Apache licensed. The specification, the package, both skills, the reference implementations, the gateway configuration, the conformance table — and the defect report, because we used your verifier and we owe you that.</a:t>
+              <a:t>To the institutions here, first, because you are the ones who would carry the risk: one procedure, one counterpart, stages zero through three. Not a programme. One correspondence procedure that currently takes days, and no change to the system behind your gateway.</a:t>
             </a:r>
           </a:p>
           <a:p/>
           <a:p>
             <a:r>
-              <a:t>Thank you. I have time for questions.</a:t>
+              <a:t>To GLEIF: an ECR role vocabulary for agent engagement contexts. A confirmation of, or correction to, the delegated-AID model, including whether it is compatible with the Ecosystem Governance Framework — we chose a reading of the existing mechanisms and would rather be corrected now than at deployment. And test credentials against a real root, so the honesty statement can be retired.</a:t>
+            </a:r>
+          </a:p>
+          <a:p/>
+          <a:p>
+            <a:r>
+              <a:t>To AAIF: this belongs in the Security Interest Group and in the ext-auth discussion. I would like it discussed, and I would like to be told where it is wrong.</a:t>
             </a:r>
           </a:p>
         </p:txBody>
@@ -1393,6 +1424,82 @@
           <a:p>
             <a:r>
               <a:t>Read the right-hand column. Domain control, domain control, domain control, human user. No layer expresses a legal entity, and the specification is explicit that clientInfo must not be used for security decisions — correctly, because nothing backs it.</a:t>
+            </a:r>
+          </a:p>
+        </p:txBody>
+      </p:sp>
+      <p:sp>
+        <p:nvSpPr>
+          <p:cNvPr id="4" name="Slide Number Placeholder 3"/>
+          <p:cNvSpPr>
+            <a:spLocks noGrp="1"/>
+          </p:cNvSpPr>
+          <p:nvPr>
+            <p:ph type="sldNum" idx="5" sz="quarter"/>
+          </p:nvPr>
+        </p:nvSpPr>
+        <p:spPr/>
+      </p:sp>
+    </p:spTree>
+  </p:cSld>
+  <p:clrMapOvr>
+    <a:masterClrMapping/>
+  </p:clrMapOvr>
+</p:notes>
+</file>
+
+<file path=ppt/notesSlides/notesSlide20.xml><?xml version="1.0" encoding="utf-8"?>
+<p:notes xmlns:a="http://schemas.openxmlformats.org/drawingml/2006/main" xmlns:p="http://schemas.openxmlformats.org/presentationml/2006/main" xmlns:r="http://schemas.openxmlformats.org/officeDocument/2006/relationships">
+  <p:cSld>
+    <p:spTree>
+      <p:nvGrpSpPr>
+        <p:cNvPr id="1" name=""/>
+        <p:cNvGrpSpPr/>
+        <p:nvPr/>
+      </p:nvGrpSpPr>
+      <p:grpSpPr>
+        <a:xfrm>
+          <a:off x="0" y="0"/>
+          <a:ext cx="0" cy="0"/>
+          <a:chOff x="0" y="0"/>
+          <a:chExt cx="0" cy="0"/>
+        </a:xfrm>
+      </p:grpSpPr>
+      <p:sp>
+        <p:nvSpPr>
+          <p:cNvPr id="2" name="Slide Image Placeholder 1"/>
+          <p:cNvSpPr>
+            <a:spLocks noGrp="1"/>
+          </p:cNvSpPr>
+          <p:nvPr>
+            <p:ph type="sldImg" idx="2"/>
+          </p:nvPr>
+        </p:nvSpPr>
+        <p:spPr/>
+      </p:sp>
+      <p:sp>
+        <p:nvSpPr>
+          <p:cNvPr id="3" name="Notes Placeholder 2"/>
+          <p:cNvSpPr>
+            <a:spLocks noGrp="1"/>
+          </p:cNvSpPr>
+          <p:nvPr>
+            <p:ph type="body" idx="3" sz="quarter"/>
+          </p:nvPr>
+        </p:nvSpPr>
+        <p:spPr/>
+        <p:txBody>
+          <a:bodyPr/>
+          <a:lstStyle/>
+          <a:p>
+            <a:r>
+              <a:t>Everything is in one repository, Apache licensed. The specification, the package, both skills, the reference implementations, the gateway configuration, the conformance table — and the defect report, because we used your verifier and we owe you that.</a:t>
+            </a:r>
+          </a:p>
+          <a:p/>
+          <a:p>
+            <a:r>
+              <a:t>Thank you. I have time for questions.</a:t>
             </a:r>
           </a:p>
         </p:txBody>
@@ -4940,8 +5047,8 @@
         </p:nvSpPr>
         <p:spPr>
           <a:xfrm>
-            <a:off x="868680" y="2286000"/>
-            <a:ext cx="10454335" cy="1097280"/>
+            <a:off x="868680" y="1737360"/>
+            <a:ext cx="10454335" cy="1320800"/>
           </a:xfrm>
           <a:prstGeom prst="rect">
             <a:avLst/>
@@ -4954,15 +5061,35 @@
           </a:bodyPr>
           <a:lstStyle/>
           <a:p>
-            <a:pPr algn="l"/>
-            <a:r>
-              <a:rPr sz="4600" b="0" i="0">
+            <a:pPr algn="l">
+              <a:lnSpc>
+                <a:spcPts val="5200"/>
+              </a:lnSpc>
+            </a:pPr>
+            <a:r>
+              <a:rPr sz="4400" b="0" i="0">
                 <a:solidFill>
                   <a:srgbClr val="1E1B16"/>
                 </a:solidFill>
                 <a:latin typeface="Georgia"/>
               </a:rPr>
-              <a:t>Organizational Identity for MCP Agents</a:t>
+              <a:t>Organizational Identity</a:t>
+            </a:r>
+          </a:p>
+          <a:p>
+            <a:pPr>
+              <a:lnSpc>
+                <a:spcPts val="5200"/>
+              </a:lnSpc>
+            </a:pPr>
+            <a:r>
+              <a:rPr sz="4400" b="0" i="0">
+                <a:solidFill>
+                  <a:srgbClr val="1E1B16"/>
+                </a:solidFill>
+                <a:latin typeface="Georgia"/>
+              </a:rPr>
+              <a:t>for MCP Agents</a:t>
             </a:r>
           </a:p>
         </p:txBody>
@@ -4975,7 +5102,7 @@
         </p:nvSpPr>
         <p:spPr>
           <a:xfrm>
-            <a:off x="868680" y="3401568"/>
+            <a:off x="868680" y="3332480"/>
             <a:ext cx="10454335" cy="457200"/>
           </a:xfrm>
           <a:prstGeom prst="rect">
@@ -5010,7 +5137,7 @@
         </p:nvSpPr>
         <p:spPr>
           <a:xfrm>
-            <a:off x="868680" y="4114800"/>
+            <a:off x="868680" y="4045712"/>
             <a:ext cx="2011680" cy="27432"/>
           </a:xfrm>
           <a:prstGeom prst="rect">
@@ -5054,8 +5181,8 @@
         </p:nvSpPr>
         <p:spPr>
           <a:xfrm>
-            <a:off x="868680" y="4498848"/>
-            <a:ext cx="10454335" cy="914400"/>
+            <a:off x="868680" y="4429760"/>
+            <a:ext cx="8991295" cy="914400"/>
           </a:xfrm>
           <a:prstGeom prst="rect">
             <a:avLst/>
@@ -5101,6 +5228,30 @@
           </a:p>
         </p:txBody>
       </p:sp>
+      <p:pic>
+        <p:nvPicPr>
+          <p:cNvPr id="6" name="Picture 5" descr="image.png"/>
+          <p:cNvPicPr>
+            <a:picLocks noChangeAspect="1"/>
+          </p:cNvPicPr>
+          <p:nvPr/>
+        </p:nvPicPr>
+        <p:blipFill>
+          <a:blip r:embed="rId3"/>
+          <a:stretch>
+            <a:fillRect/>
+          </a:stretch>
+        </p:blipFill>
+        <p:spPr>
+          <a:xfrm>
+            <a:off x="10271455" y="4429760"/>
+            <a:ext cx="1051560" cy="1051560"/>
+          </a:xfrm>
+          <a:prstGeom prst="rect">
+            <a:avLst/>
+          </a:prstGeom>
+        </p:spPr>
+      </p:pic>
     </p:spTree>
   </p:cSld>
   <p:clrMapOvr>
@@ -5249,8 +5400,8 @@
         </p:nvSpPr>
         <p:spPr>
           <a:xfrm>
-            <a:off x="868680" y="2450592"/>
-            <a:ext cx="10454335" cy="2871216"/>
+            <a:off x="868680" y="2582672"/>
+            <a:ext cx="6248095" cy="2607056"/>
           </a:xfrm>
           <a:prstGeom prst="rect">
             <a:avLst/>
@@ -5293,8 +5444,8 @@
         </p:nvSpPr>
         <p:spPr>
           <a:xfrm>
-            <a:off x="1161288" y="2743200"/>
-            <a:ext cx="9869119" cy="2286000"/>
+            <a:off x="1161288" y="2875280"/>
+            <a:ext cx="5662879" cy="2021840"/>
           </a:xfrm>
           <a:prstGeom prst="rect">
             <a:avLst/>
@@ -5313,13 +5464,13 @@
               </a:spcAft>
             </a:pPr>
             <a:r>
-              <a:rPr sz="1500" b="0" i="0">
+              <a:rPr sz="1300" b="0" i="0">
                 <a:solidFill>
                   <a:srgbClr val="1E1B16"/>
                 </a:solidFill>
                 <a:latin typeface="Consolas"/>
               </a:rPr>
-              <a:t>   1  credential_present      local</a:t>
+              <a:t>   1  credential_present   request</a:t>
             </a:r>
           </a:p>
           <a:p>
@@ -5329,13 +5480,13 @@
               </a:spcAft>
             </a:pPr>
             <a:r>
-              <a:rPr sz="1500" b="0" i="0">
+              <a:rPr sz="1300" b="0" i="0">
                 <a:solidFill>
                   <a:srgbClr val="1E1B16"/>
                 </a:solidFill>
                 <a:latin typeface="Consolas"/>
               </a:rPr>
-              <a:t>   2  freshness               local</a:t>
+              <a:t>   2  freshness            request</a:t>
             </a:r>
           </a:p>
           <a:p>
@@ -5345,13 +5496,13 @@
               </a:spcAft>
             </a:pPr>
             <a:r>
-              <a:rPr sz="1500" b="0" i="0">
+              <a:rPr sz="1300" b="0" i="0">
                 <a:solidFill>
                   <a:srgbClr val="1E1B16"/>
                 </a:solidFill>
                 <a:latin typeface="Consolas"/>
               </a:rPr>
-              <a:t>   3  digest                  local</a:t>
+              <a:t>   3  digest               request</a:t>
             </a:r>
           </a:p>
           <a:p>
@@ -5361,13 +5512,13 @@
               </a:spcAft>
             </a:pPr>
             <a:r>
-              <a:rPr sz="1500" b="0" i="0">
-                <a:solidFill>
-                  <a:srgbClr val="1E1B16"/>
+              <a:rPr sz="1300" b="1" i="0">
+                <a:solidFill>
+                  <a:srgbClr val="2E5D89"/>
                 </a:solidFill>
                 <a:latin typeface="Consolas"/>
               </a:rPr>
-              <a:t>   4  signature               local</a:t>
+              <a:t>   4  signature            signer's key log · witness</a:t>
             </a:r>
           </a:p>
           <a:p>
@@ -5377,13 +5528,13 @@
               </a:spcAft>
             </a:pPr>
             <a:r>
-              <a:rPr sz="1500" b="0" i="0">
-                <a:solidFill>
-                  <a:srgbClr val="1E1B16"/>
+              <a:rPr sz="1300" b="1" i="0">
+                <a:solidFill>
+                  <a:srgbClr val="2E5D89"/>
                 </a:solidFill>
                 <a:latin typeface="Consolas"/>
               </a:rPr>
-              <a:t>   5  delegation              local</a:t>
+              <a:t>   5  delegation           holder's key log</a:t>
             </a:r>
           </a:p>
           <a:p>
@@ -5393,13 +5544,13 @@
               </a:spcAft>
             </a:pPr>
             <a:r>
-              <a:rPr sz="1500" b="0" i="0">
+              <a:rPr sz="1300" b="0" i="0">
                 <a:solidFill>
                   <a:srgbClr val="1E1B16"/>
                 </a:solidFill>
                 <a:latin typeface="Consolas"/>
               </a:rPr>
-              <a:t>   6  chain                   local</a:t>
+              <a:t>   6  chain                stream · issuers' logs</a:t>
             </a:r>
           </a:p>
           <a:p>
@@ -5409,13 +5560,13 @@
               </a:spcAft>
             </a:pPr>
             <a:r>
-              <a:rPr sz="1500" b="1" i="0">
-                <a:solidFill>
-                  <a:srgbClr val="2E5D89"/>
+              <a:rPr sz="1300" b="0" i="0">
+                <a:solidFill>
+                  <a:srgbClr val="1E1B16"/>
                 </a:solidFill>
                 <a:latin typeface="Consolas"/>
               </a:rPr>
-              <a:t>  7  revocation              the one remote check — deliberately last</a:t>
+              <a:t>   7  revocation           issuers' live logs</a:t>
             </a:r>
           </a:p>
           <a:p>
@@ -5425,27 +5576,56 @@
               </a:spcAft>
             </a:pPr>
             <a:r>
-              <a:rPr sz="1500" b="0" i="0">
+              <a:rPr sz="1300" b="0" i="0">
                 <a:solidFill>
                   <a:srgbClr val="1E1B16"/>
                 </a:solidFill>
                 <a:latin typeface="Consolas"/>
               </a:rPr>
-              <a:t>   8  authority               local</a:t>
-            </a:r>
-          </a:p>
-        </p:txBody>
-      </p:sp>
-      <p:sp>
-        <p:nvSpPr>
-          <p:cNvPr id="7" name="TextBox 6"/>
+              <a:t>   8  authority            credential</a:t>
+            </a:r>
+          </a:p>
+        </p:txBody>
+      </p:sp>
+      <p:pic>
+        <p:nvPicPr>
+          <p:cNvPr id="7" name="Picture 6" descr="scene-1-verification.png"/>
+          <p:cNvPicPr>
+            <a:picLocks noChangeAspect="1"/>
+          </p:cNvPicPr>
+          <p:nvPr/>
+        </p:nvPicPr>
+        <p:blipFill>
+          <a:blip r:embed="rId3"/>
+          <a:stretch>
+            <a:fillRect/>
+          </a:stretch>
+        </p:blipFill>
+        <p:spPr>
+          <a:xfrm>
+            <a:off x="7555748" y="1975104"/>
+            <a:ext cx="3694053" cy="3474720"/>
+          </a:xfrm>
+          <a:prstGeom prst="rect">
+            <a:avLst/>
+          </a:prstGeom>
+          <a:ln w="9525">
+            <a:solidFill>
+              <a:srgbClr val="DCD6C8"/>
+            </a:solidFill>
+          </a:ln>
+        </p:spPr>
+      </p:pic>
+      <p:sp>
+        <p:nvSpPr>
+          <p:cNvPr id="8" name="TextBox 7"/>
           <p:cNvSpPr txBox="1"/>
           <p:nvPr/>
         </p:nvSpPr>
         <p:spPr>
           <a:xfrm>
-            <a:off x="868680" y="5943600"/>
-            <a:ext cx="9082735" cy="457200"/>
+            <a:off x="7555748" y="5541264"/>
+            <a:ext cx="3694053" cy="274320"/>
           </a:xfrm>
           <a:prstGeom prst="rect">
             <a:avLst/>
@@ -5460,27 +5640,27 @@
           <a:p>
             <a:pPr algn="l"/>
             <a:r>
-              <a:rPr sz="1300" b="0" i="1">
-                <a:solidFill>
-                  <a:srgbClr val="1E1B16"/>
-                </a:solidFill>
-                <a:latin typeface="Georgia"/>
-              </a:rPr>
-              <a:t>Eight checks. Nine failure layers. The verifier decides; nothing else does.</a:t>
-            </a:r>
-          </a:p>
-        </p:txBody>
-      </p:sp>
-      <p:sp>
-        <p:nvSpPr>
-          <p:cNvPr id="8" name="TextBox 7"/>
+              <a:rPr sz="1000" b="0" i="0">
+                <a:solidFill>
+                  <a:srgbClr val="6E6658"/>
+                </a:solidFill>
+                <a:latin typeface="Segoe UI"/>
+              </a:rPr>
+              <a:t>Scene 1 · the same checks, run on a live call</a:t>
+            </a:r>
+          </a:p>
+        </p:txBody>
+      </p:sp>
+      <p:sp>
+        <p:nvSpPr>
+          <p:cNvPr id="9" name="TextBox 8"/>
           <p:cNvSpPr txBox="1"/>
           <p:nvPr/>
         </p:nvSpPr>
         <p:spPr>
           <a:xfrm>
-            <a:off x="10225735" y="5980176"/>
-            <a:ext cx="1097280" cy="274320"/>
+            <a:off x="868680" y="5943600"/>
+            <a:ext cx="9082735" cy="457200"/>
           </a:xfrm>
           <a:prstGeom prst="rect">
             <a:avLst/>
@@ -5493,6 +5673,41 @@
           </a:bodyPr>
           <a:lstStyle/>
           <a:p>
+            <a:pPr algn="l"/>
+            <a:r>
+              <a:rPr sz="1300" b="0" i="1">
+                <a:solidFill>
+                  <a:srgbClr val="1E1B16"/>
+                </a:solidFill>
+                <a:latin typeface="Georgia"/>
+              </a:rPr>
+              <a:t>The key a request is checked against comes from the signer's own log — never from the request.</a:t>
+            </a:r>
+          </a:p>
+        </p:txBody>
+      </p:sp>
+      <p:sp>
+        <p:nvSpPr>
+          <p:cNvPr id="10" name="TextBox 9"/>
+          <p:cNvSpPr txBox="1"/>
+          <p:nvPr/>
+        </p:nvSpPr>
+        <p:spPr>
+          <a:xfrm>
+            <a:off x="10225735" y="5980176"/>
+            <a:ext cx="1097280" cy="274320"/>
+          </a:xfrm>
+          <a:prstGeom prst="rect">
+            <a:avLst/>
+          </a:prstGeom>
+          <a:noFill/>
+        </p:spPr>
+        <p:txBody>
+          <a:bodyPr wrap="square" anchor="t" lIns="0" rIns="0" tIns="0" bIns="0">
+            <a:spAutoFit/>
+          </a:bodyPr>
+          <a:lstStyle/>
+          <a:p>
             <a:pPr algn="r"/>
             <a:r>
               <a:rPr sz="1000" b="0" i="0" spc="80">
@@ -5501,7 +5716,7 @@
                 </a:solidFill>
                 <a:latin typeface="Segoe UI"/>
               </a:rPr>
-              <a:t>10 / 19</a:t>
+              <a:t>10 / 20</a:t>
             </a:r>
           </a:p>
         </p:txBody>
@@ -5809,7 +6024,7 @@
                 </a:solidFill>
                 <a:latin typeface="Segoe UI"/>
               </a:rPr>
-              <a:t>11 / 19</a:t>
+              <a:t>11 / 20</a:t>
             </a:r>
           </a:p>
         </p:txBody>
@@ -5978,27 +6193,27 @@
           <a:p>
             <a:pPr algn="l">
               <a:spcAft>
-                <a:spcPts val="2200"/>
+                <a:spcPts val="1800"/>
               </a:spcAft>
             </a:pPr>
             <a:r>
-              <a:rPr sz="2100" b="0" i="0">
+              <a:rPr sz="2000" b="0" i="0">
                 <a:solidFill>
                   <a:srgbClr val="1E1B16"/>
                 </a:solidFill>
                 <a:latin typeface="Segoe UI"/>
               </a:rPr>
-              <a:t>docs/CONFORMANCE.md — one row per normative statement, with its implementation and its test</a:t>
+              <a:t>docs/CONFORMANCE.md — every normative statement, its code, its test</a:t>
             </a:r>
           </a:p>
           <a:p>
             <a:pPr>
               <a:spcAft>
-                <a:spcPts val="2200"/>
+                <a:spcPts val="1800"/>
               </a:spcAft>
             </a:pPr>
             <a:r>
-              <a:rPr sz="2100" b="0" i="0">
+              <a:rPr sz="2000" b="0" i="0">
                 <a:solidFill>
                   <a:srgbClr val="1E1B16"/>
                 </a:solidFill>
@@ -6010,11 +6225,36 @@
           <a:p>
             <a:pPr>
               <a:spcAft>
-                <a:spcPts val="2200"/>
+                <a:spcPts val="1800"/>
               </a:spcAft>
             </a:pPr>
             <a:r>
-              <a:rPr sz="2100" b="0" i="0">
+              <a:rPr sz="2000" b="1" i="0">
+                <a:solidFill>
+                  <a:srgbClr val="2E5D89"/>
+                </a:solidFill>
+                <a:latin typeface="Segoe UI"/>
+              </a:rPr>
+              <a:t>One defect every green test missed: </a:t>
+            </a:r>
+            <a:r>
+              <a:rPr sz="2000" b="0" i="0">
+                <a:solidFill>
+                  <a:srgbClr val="1E1B16"/>
+                </a:solidFill>
+                <a:latin typeface="Segoe UI"/>
+              </a:rPr>
+              <a:t>the signature was checked under a key the request carried. Found, fixed, recorded.</a:t>
+            </a:r>
+          </a:p>
+          <a:p>
+            <a:pPr>
+              <a:spcAft>
+                <a:spcPts val="1800"/>
+              </a:spcAft>
+            </a:pPr>
+            <a:r>
+              <a:rPr sz="2000" b="0" i="0">
                 <a:solidFill>
                   <a:srgbClr val="1E1B16"/>
                 </a:solidFill>
@@ -6090,7 +6330,7 @@
                 </a:solidFill>
                 <a:latin typeface="Segoe UI"/>
               </a:rPr>
-              <a:t>12 / 19</a:t>
+              <a:t>12 / 20</a:t>
             </a:r>
           </a:p>
         </p:txBody>
@@ -6121,16 +6361,45 @@
         <p:nvPr/>
       </p:nvGrpSpPr>
       <p:grpSpPr/>
-      <p:sp>
-        <p:nvSpPr>
-          <p:cNvPr id="2" name="TextBox 1"/>
+      <p:pic>
+        <p:nvPicPr>
+          <p:cNvPr id="2" name="Picture 1" descr="scene-3.png"/>
+          <p:cNvPicPr>
+            <a:picLocks noChangeAspect="1"/>
+          </p:cNvPicPr>
+          <p:nvPr/>
+        </p:nvPicPr>
+        <p:blipFill>
+          <a:blip r:embed="rId3"/>
+          <a:stretch>
+            <a:fillRect/>
+          </a:stretch>
+        </p:blipFill>
+        <p:spPr>
+          <a:xfrm>
+            <a:off x="1889607" y="502920"/>
+            <a:ext cx="8412480" cy="4732020"/>
+          </a:xfrm>
+          <a:prstGeom prst="rect">
+            <a:avLst/>
+          </a:prstGeom>
+          <a:ln w="9525">
+            <a:solidFill>
+              <a:srgbClr val="DCD6C8"/>
+            </a:solidFill>
+          </a:ln>
+        </p:spPr>
+      </p:pic>
+      <p:sp>
+        <p:nvSpPr>
+          <p:cNvPr id="3" name="TextBox 2"/>
           <p:cNvSpPr txBox="1"/>
           <p:nvPr/>
         </p:nvSpPr>
         <p:spPr>
           <a:xfrm>
-            <a:off x="868680" y="2377440"/>
-            <a:ext cx="10454335" cy="365760"/>
+            <a:off x="1889607" y="5564124"/>
+            <a:ext cx="7223760" cy="640080"/>
           </a:xfrm>
           <a:prstGeom prst="rect">
             <a:avLst/>
@@ -6143,29 +6412,49 @@
           </a:bodyPr>
           <a:lstStyle/>
           <a:p>
-            <a:pPr algn="l"/>
-            <a:r>
-              <a:rPr sz="1100" b="1" i="0" spc="160">
-                <a:solidFill>
-                  <a:srgbClr val="2E5D89"/>
-                </a:solidFill>
-                <a:latin typeface="Segoe UI"/>
-              </a:rPr>
-              <a:t>DEMO</a:t>
-            </a:r>
-          </a:p>
-        </p:txBody>
-      </p:sp>
-      <p:sp>
-        <p:nvSpPr>
-          <p:cNvPr id="3" name="TextBox 2"/>
+            <a:pPr algn="l">
+              <a:spcAft>
+                <a:spcPts val="200"/>
+              </a:spcAft>
+            </a:pPr>
+            <a:r>
+              <a:rPr sz="1500" b="0" i="0">
+                <a:solidFill>
+                  <a:srgbClr val="1E1B16"/>
+                </a:solidFill>
+                <a:latin typeface="Georgia"/>
+              </a:rPr>
+              <a:t>Real KERI, real ACDC, real revocation.</a:t>
+            </a:r>
+          </a:p>
+          <a:p>
+            <a:pPr>
+              <a:spcAft>
+                <a:spcPts val="200"/>
+              </a:spcAft>
+            </a:pPr>
+            <a:r>
+              <a:rPr sz="1500" b="0" i="0">
+                <a:solidFill>
+                  <a:srgbClr val="C0392B"/>
+                </a:solidFill>
+                <a:latin typeface="Georgia"/>
+              </a:rPr>
+              <a:t>The root of trust is self-configured; in production it would be GLEIF's.</a:t>
+            </a:r>
+          </a:p>
+        </p:txBody>
+      </p:sp>
+      <p:sp>
+        <p:nvSpPr>
+          <p:cNvPr id="4" name="TextBox 3"/>
           <p:cNvSpPr txBox="1"/>
           <p:nvPr/>
         </p:nvSpPr>
         <p:spPr>
           <a:xfrm>
-            <a:off x="868680" y="2926080"/>
-            <a:ext cx="10454335" cy="2011680"/>
+            <a:off x="10225735" y="5980176"/>
+            <a:ext cx="1097280" cy="274320"/>
           </a:xfrm>
           <a:prstGeom prst="rect">
             <a:avLst/>
@@ -6178,105 +6467,15 @@
           </a:bodyPr>
           <a:lstStyle/>
           <a:p>
-            <a:pPr algn="l">
-              <a:spcAft>
-                <a:spcPts val="1400"/>
-              </a:spcAft>
-            </a:pPr>
-            <a:r>
-              <a:rPr sz="3000" b="0" i="0">
-                <a:solidFill>
-                  <a:srgbClr val="1E1B16"/>
-                </a:solidFill>
-                <a:latin typeface="Georgia"/>
-              </a:rPr>
-              <a:t>Real KERI, real ACDC, real revocation.</a:t>
-            </a:r>
-          </a:p>
-          <a:p>
-            <a:pPr>
-              <a:spcAft>
-                <a:spcPts val="1400"/>
-              </a:spcAft>
-            </a:pPr>
-            <a:r>
-              <a:rPr sz="3000" b="0" i="0">
-                <a:solidFill>
-                  <a:srgbClr val="C0392B"/>
-                </a:solidFill>
-                <a:latin typeface="Georgia"/>
-              </a:rPr>
-              <a:t>The root of trust is self-configured; in production it would be GLEIF's.</a:t>
-            </a:r>
-          </a:p>
-        </p:txBody>
-      </p:sp>
-      <p:sp>
-        <p:nvSpPr>
-          <p:cNvPr id="4" name="TextBox 3"/>
-          <p:cNvSpPr txBox="1"/>
-          <p:nvPr/>
-        </p:nvSpPr>
-        <p:spPr>
-          <a:xfrm>
-            <a:off x="868680" y="5943600"/>
-            <a:ext cx="9082735" cy="457200"/>
-          </a:xfrm>
-          <a:prstGeom prst="rect">
-            <a:avLst/>
-          </a:prstGeom>
-          <a:noFill/>
-        </p:spPr>
-        <p:txBody>
-          <a:bodyPr wrap="square" anchor="t" lIns="0" rIns="0" tIns="0" bIns="0">
-            <a:spAutoFit/>
-          </a:bodyPr>
-          <a:lstStyle/>
-          <a:p>
-            <a:pPr algn="l"/>
-            <a:r>
-              <a:rPr sz="1300" b="0" i="1">
+            <a:pPr algn="r"/>
+            <a:r>
+              <a:rPr sz="1000" b="0" i="0" spc="80">
                 <a:solidFill>
                   <a:srgbClr val="6E6658"/>
                 </a:solidFill>
-                <a:latin typeface="Georgia"/>
-              </a:rPr>
-              <a:t>We used GLEIF's verifier, found a defect in its revocation path, and wrote it up.</a:t>
-            </a:r>
-          </a:p>
-        </p:txBody>
-      </p:sp>
-      <p:sp>
-        <p:nvSpPr>
-          <p:cNvPr id="5" name="TextBox 4"/>
-          <p:cNvSpPr txBox="1"/>
-          <p:nvPr/>
-        </p:nvSpPr>
-        <p:spPr>
-          <a:xfrm>
-            <a:off x="10225735" y="5980176"/>
-            <a:ext cx="1097280" cy="274320"/>
-          </a:xfrm>
-          <a:prstGeom prst="rect">
-            <a:avLst/>
-          </a:prstGeom>
-          <a:noFill/>
-        </p:spPr>
-        <p:txBody>
-          <a:bodyPr wrap="square" anchor="t" lIns="0" rIns="0" tIns="0" bIns="0">
-            <a:spAutoFit/>
-          </a:bodyPr>
-          <a:lstStyle/>
-          <a:p>
-            <a:pPr algn="r"/>
-            <a:r>
-              <a:rPr sz="1000" b="0" i="0" spc="80">
-                <a:solidFill>
-                  <a:srgbClr val="6E6658"/>
-                </a:solidFill>
                 <a:latin typeface="Segoe UI"/>
               </a:rPr>
-              <a:t>13 / 19</a:t>
+              <a:t>13 / 20</a:t>
             </a:r>
           </a:p>
         </p:txBody>
@@ -6337,7 +6536,7 @@
                 </a:solidFill>
                 <a:latin typeface="Segoe UI"/>
               </a:rPr>
-              <a:t>BOTH ALREADY EXIST IN INSTITUTIONS</a:t>
+              <a:t>CLOSE TO HOME</a:t>
             </a:r>
           </a:p>
         </p:txBody>
@@ -6372,7 +6571,7 @@
                 </a:solidFill>
                 <a:latin typeface="Georgia"/>
               </a:rPr>
-              <a:t>Two ways to check an identity</a:t>
+              <a:t>Taiwan already runs this model</a:t>
             </a:r>
           </a:p>
         </p:txBody>
@@ -6421,16 +6620,603 @@
           </a:p>
         </p:txBody>
       </p:sp>
-      <p:sp>
-        <p:nvSpPr>
-          <p:cNvPr id="5" name="TextBox 4"/>
+      <p:graphicFrame>
+        <p:nvGraphicFramePr>
+          <p:cNvPr id="5" name="Table 4"/>
+          <p:cNvGraphicFramePr>
+            <a:graphicFrameLocks noGrp="1"/>
+          </p:cNvGraphicFramePr>
+          <p:nvPr/>
+        </p:nvGraphicFramePr>
+        <p:xfrm>
+          <a:off x="868680" y="2468880"/>
+          <a:ext cx="10454334" cy="2688336"/>
+        </p:xfrm>
+        <a:graphic>
+          <a:graphicData uri="http://schemas.openxmlformats.org/drawingml/2006/table">
+            <a:tbl>
+              <a:tblPr firstRow="1" bandRow="1">
+                <a:tableStyleId>{2D5ABB26-0587-4C30-8999-92F81FD0307C}</a:tableStyleId>
+              </a:tblPr>
+              <a:tblGrid>
+                <a:gridCol w="1777236"/>
+                <a:gridCol w="4495364"/>
+                <a:gridCol w="4181734"/>
+              </a:tblGrid>
+              <a:tr h="420624">
+                <a:tc>
+                  <a:txBody>
+                    <a:bodyPr wrap="square"/>
+                    <a:lstStyle/>
+                    <a:p>
+                      <a:r>
+                        <a:rPr sz="1100" b="1" i="0" spc="120">
+                          <a:solidFill>
+                            <a:srgbClr val="2E5D89"/>
+                          </a:solidFill>
+                          <a:latin typeface="Segoe UI"/>
+                        </a:rPr>
+                        <a:t/>
+                      </a:r>
+                    </a:p>
+                  </a:txBody>
+                  <a:tcPr>
+                    <a:lnL w="0">
+                      <a:noFill/>
+                    </a:lnL>
+                    <a:lnR w="0">
+                      <a:noFill/>
+                    </a:lnR>
+                    <a:lnT w="0">
+                      <a:noFill/>
+                    </a:lnT>
+                    <a:lnB w="9525">
+                      <a:solidFill>
+                        <a:srgbClr val="DCD6C8"/>
+                      </a:solidFill>
+                    </a:lnB>
+                    <a:solidFill>
+                      <a:srgbClr val="F7F5EF"/>
+                    </a:solidFill>
+                  </a:tcPr>
+                </a:tc>
+                <a:tc>
+                  <a:txBody>
+                    <a:bodyPr wrap="square"/>
+                    <a:lstStyle/>
+                    <a:p>
+                      <a:r>
+                        <a:rPr sz="1100" b="1" i="0" spc="120">
+                          <a:solidFill>
+                            <a:srgbClr val="2E5D89"/>
+                          </a:solidFill>
+                          <a:latin typeface="Segoe UI"/>
+                        </a:rPr>
+                        <a:t>DIGITAL IDENTITY WALLET</a:t>
+                      </a:r>
+                      <a:r>
+                        <a:rPr sz="1100" b="1" i="0">
+                          <a:solidFill>
+                            <a:srgbClr val="2E5D89"/>
+                          </a:solidFill>
+                          <a:latin typeface="Segoe UI"/>
+                          <a:ea typeface="Microsoft JhengHei"/>
+                        </a:rPr>
+                        <a:t>  數位憑證皮夾</a:t>
+                      </a:r>
+                    </a:p>
+                  </a:txBody>
+                  <a:tcPr>
+                    <a:lnL w="0">
+                      <a:noFill/>
+                    </a:lnL>
+                    <a:lnR w="0">
+                      <a:noFill/>
+                    </a:lnR>
+                    <a:lnT w="0">
+                      <a:noFill/>
+                    </a:lnT>
+                    <a:lnB w="9525">
+                      <a:solidFill>
+                        <a:srgbClr val="DCD6C8"/>
+                      </a:solidFill>
+                    </a:lnB>
+                    <a:solidFill>
+                      <a:srgbClr val="F7F5EF"/>
+                    </a:solidFill>
+                  </a:tcPr>
+                </a:tc>
+                <a:tc>
+                  <a:txBody>
+                    <a:bodyPr wrap="square"/>
+                    <a:lstStyle/>
+                    <a:p>
+                      <a:r>
+                        <a:rPr sz="1100" b="1" i="0" spc="120">
+                          <a:solidFill>
+                            <a:srgbClr val="2E5D89"/>
+                          </a:solidFill>
+                          <a:latin typeface="Segoe UI"/>
+                        </a:rPr>
+                        <a:t>THIS PROPOSAL</a:t>
+                      </a:r>
+                    </a:p>
+                  </a:txBody>
+                  <a:tcPr>
+                    <a:lnL w="0">
+                      <a:noFill/>
+                    </a:lnL>
+                    <a:lnR w="0">
+                      <a:noFill/>
+                    </a:lnR>
+                    <a:lnT w="0">
+                      <a:noFill/>
+                    </a:lnT>
+                    <a:lnB w="9525">
+                      <a:solidFill>
+                        <a:srgbClr val="DCD6C8"/>
+                      </a:solidFill>
+                    </a:lnB>
+                    <a:solidFill>
+                      <a:srgbClr val="F7F5EF"/>
+                    </a:solidFill>
+                  </a:tcPr>
+                </a:tc>
+              </a:tr>
+              <a:tr h="566928">
+                <a:tc>
+                  <a:txBody>
+                    <a:bodyPr wrap="square"/>
+                    <a:lstStyle/>
+                    <a:p>
+                      <a:r>
+                        <a:rPr sz="1400" b="0" i="0">
+                          <a:solidFill>
+                            <a:srgbClr val="1E1B16"/>
+                          </a:solidFill>
+                          <a:latin typeface="Segoe UI"/>
+                        </a:rPr>
+                        <a:t>Holder</a:t>
+                      </a:r>
+                    </a:p>
+                  </a:txBody>
+                  <a:tcPr anchor="ctr">
+                    <a:lnL w="0">
+                      <a:noFill/>
+                    </a:lnL>
+                    <a:lnR w="0">
+                      <a:noFill/>
+                    </a:lnR>
+                    <a:lnT w="0">
+                      <a:noFill/>
+                    </a:lnT>
+                    <a:lnB w="9525">
+                      <a:solidFill>
+                        <a:srgbClr val="DCD6C8"/>
+                      </a:solidFill>
+                    </a:lnB>
+                    <a:solidFill>
+                      <a:srgbClr val="F7F5EF"/>
+                    </a:solidFill>
+                  </a:tcPr>
+                </a:tc>
+                <a:tc>
+                  <a:txBody>
+                    <a:bodyPr wrap="square"/>
+                    <a:lstStyle/>
+                    <a:p>
+                      <a:r>
+                        <a:rPr sz="1400" b="0" i="0">
+                          <a:solidFill>
+                            <a:srgbClr val="1E1B16"/>
+                          </a:solidFill>
+                          <a:latin typeface="Segoe UI"/>
+                        </a:rPr>
+                        <a:t>People — and, since May 2026, a company's authorized representative</a:t>
+                      </a:r>
+                    </a:p>
+                  </a:txBody>
+                  <a:tcPr anchor="ctr">
+                    <a:lnL w="0">
+                      <a:noFill/>
+                    </a:lnL>
+                    <a:lnR w="0">
+                      <a:noFill/>
+                    </a:lnR>
+                    <a:lnT w="0">
+                      <a:noFill/>
+                    </a:lnT>
+                    <a:lnB w="9525">
+                      <a:solidFill>
+                        <a:srgbClr val="DCD6C8"/>
+                      </a:solidFill>
+                    </a:lnB>
+                    <a:solidFill>
+                      <a:srgbClr val="F7F5EF"/>
+                    </a:solidFill>
+                  </a:tcPr>
+                </a:tc>
+                <a:tc>
+                  <a:txBody>
+                    <a:bodyPr wrap="square"/>
+                    <a:lstStyle/>
+                    <a:p>
+                      <a:r>
+                        <a:rPr sz="1400" b="0" i="0">
+                          <a:solidFill>
+                            <a:srgbClr val="1E1B16"/>
+                          </a:solidFill>
+                          <a:latin typeface="Segoe UI"/>
+                        </a:rPr>
+                        <a:t>Legal entities, and the agents acting for them</a:t>
+                      </a:r>
+                    </a:p>
+                  </a:txBody>
+                  <a:tcPr anchor="ctr">
+                    <a:lnL w="0">
+                      <a:noFill/>
+                    </a:lnL>
+                    <a:lnR w="0">
+                      <a:noFill/>
+                    </a:lnR>
+                    <a:lnT w="0">
+                      <a:noFill/>
+                    </a:lnT>
+                    <a:lnB w="9525">
+                      <a:solidFill>
+                        <a:srgbClr val="DCD6C8"/>
+                      </a:solidFill>
+                    </a:lnB>
+                    <a:solidFill>
+                      <a:srgbClr val="F7F5EF"/>
+                    </a:solidFill>
+                  </a:tcPr>
+                </a:tc>
+              </a:tr>
+              <a:tr h="566928">
+                <a:tc>
+                  <a:txBody>
+                    <a:bodyPr wrap="square"/>
+                    <a:lstStyle/>
+                    <a:p>
+                      <a:r>
+                        <a:rPr sz="1400" b="0" i="0">
+                          <a:solidFill>
+                            <a:srgbClr val="1E1B16"/>
+                          </a:solidFill>
+                          <a:latin typeface="Segoe UI"/>
+                        </a:rPr>
+                        <a:t>Credentials</a:t>
+                      </a:r>
+                    </a:p>
+                  </a:txBody>
+                  <a:tcPr anchor="ctr">
+                    <a:lnL w="0">
+                      <a:noFill/>
+                    </a:lnL>
+                    <a:lnR w="0">
+                      <a:noFill/>
+                    </a:lnR>
+                    <a:lnT w="0">
+                      <a:noFill/>
+                    </a:lnT>
+                    <a:lnB w="9525">
+                      <a:solidFill>
+                        <a:srgbClr val="DCD6C8"/>
+                      </a:solidFill>
+                    </a:lnB>
+                    <a:solidFill>
+                      <a:srgbClr val="F7F5EF"/>
+                    </a:solidFill>
+                  </a:tcPr>
+                </a:tc>
+                <a:tc>
+                  <a:txBody>
+                    <a:bodyPr wrap="square"/>
+                    <a:lstStyle/>
+                    <a:p>
+                      <a:r>
+                        <a:rPr sz="1400" b="0" i="0">
+                          <a:solidFill>
+                            <a:srgbClr val="1E1B16"/>
+                          </a:solidFill>
+                          <a:latin typeface="Segoe UI"/>
+                        </a:rPr>
+                        <a:t>Driving-licence verification card, degree certificates, MOEA business certificate</a:t>
+                      </a:r>
+                    </a:p>
+                  </a:txBody>
+                  <a:tcPr anchor="ctr">
+                    <a:lnL w="0">
+                      <a:noFill/>
+                    </a:lnL>
+                    <a:lnR w="0">
+                      <a:noFill/>
+                    </a:lnR>
+                    <a:lnT w="0">
+                      <a:noFill/>
+                    </a:lnT>
+                    <a:lnB w="9525">
+                      <a:solidFill>
+                        <a:srgbClr val="DCD6C8"/>
+                      </a:solidFill>
+                    </a:lnB>
+                    <a:solidFill>
+                      <a:srgbClr val="F7F5EF"/>
+                    </a:solidFill>
+                  </a:tcPr>
+                </a:tc>
+                <a:tc>
+                  <a:txBody>
+                    <a:bodyPr wrap="square"/>
+                    <a:lstStyle/>
+                    <a:p>
+                      <a:r>
+                        <a:rPr sz="1400" b="0" i="0">
+                          <a:solidFill>
+                            <a:srgbClr val="1E1B16"/>
+                          </a:solidFill>
+                          <a:latin typeface="Segoe UI"/>
+                        </a:rPr>
+                        <a:t>LE and ECR credentials</a:t>
+                      </a:r>
+                    </a:p>
+                  </a:txBody>
+                  <a:tcPr anchor="ctr">
+                    <a:lnL w="0">
+                      <a:noFill/>
+                    </a:lnL>
+                    <a:lnR w="0">
+                      <a:noFill/>
+                    </a:lnR>
+                    <a:lnT w="0">
+                      <a:noFill/>
+                    </a:lnT>
+                    <a:lnB w="9525">
+                      <a:solidFill>
+                        <a:srgbClr val="DCD6C8"/>
+                      </a:solidFill>
+                    </a:lnB>
+                    <a:solidFill>
+                      <a:srgbClr val="F7F5EF"/>
+                    </a:solidFill>
+                  </a:tcPr>
+                </a:tc>
+              </a:tr>
+              <a:tr h="566928">
+                <a:tc>
+                  <a:txBody>
+                    <a:bodyPr wrap="square"/>
+                    <a:lstStyle/>
+                    <a:p>
+                      <a:r>
+                        <a:rPr sz="1400" b="0" i="0">
+                          <a:solidFill>
+                            <a:srgbClr val="1E1B16"/>
+                          </a:solidFill>
+                          <a:latin typeface="Segoe UI"/>
+                        </a:rPr>
+                        <a:t>Used for</a:t>
+                      </a:r>
+                    </a:p>
+                  </a:txBody>
+                  <a:tcPr anchor="ctr">
+                    <a:lnL w="0">
+                      <a:noFill/>
+                    </a:lnL>
+                    <a:lnR w="0">
+                      <a:noFill/>
+                    </a:lnR>
+                    <a:lnT w="0">
+                      <a:noFill/>
+                    </a:lnT>
+                    <a:lnB w="9525">
+                      <a:solidFill>
+                        <a:srgbClr val="DCD6C8"/>
+                      </a:solidFill>
+                    </a:lnB>
+                    <a:solidFill>
+                      <a:srgbClr val="F7F5EF"/>
+                    </a:solidFill>
+                  </a:tcPr>
+                </a:tc>
+                <a:tc>
+                  <a:txBody>
+                    <a:bodyPr wrap="square"/>
+                    <a:lstStyle/>
+                    <a:p>
+                      <a:r>
+                        <a:rPr sz="1400" b="0" i="0">
+                          <a:solidFill>
+                            <a:srgbClr val="1E1B16"/>
+                          </a:solidFill>
+                          <a:latin typeface="Segoe UI"/>
+                        </a:rPr>
+                        <a:t>Parcel pickup at convenience stores, car-rental pilots</a:t>
+                      </a:r>
+                    </a:p>
+                  </a:txBody>
+                  <a:tcPr anchor="ctr">
+                    <a:lnL w="0">
+                      <a:noFill/>
+                    </a:lnL>
+                    <a:lnR w="0">
+                      <a:noFill/>
+                    </a:lnR>
+                    <a:lnT w="0">
+                      <a:noFill/>
+                    </a:lnT>
+                    <a:lnB w="9525">
+                      <a:solidFill>
+                        <a:srgbClr val="DCD6C8"/>
+                      </a:solidFill>
+                    </a:lnB>
+                    <a:solidFill>
+                      <a:srgbClr val="F7F5EF"/>
+                    </a:solidFill>
+                  </a:tcPr>
+                </a:tc>
+                <a:tc>
+                  <a:txBody>
+                    <a:bodyPr wrap="square"/>
+                    <a:lstStyle/>
+                    <a:p>
+                      <a:r>
+                        <a:rPr sz="1400" b="0" i="0">
+                          <a:solidFill>
+                            <a:srgbClr val="1E1B16"/>
+                          </a:solidFill>
+                          <a:latin typeface="Segoe UI"/>
+                        </a:rPr>
+                        <a:t>Filing, verification, enquiry between agencies</a:t>
+                      </a:r>
+                    </a:p>
+                  </a:txBody>
+                  <a:tcPr anchor="ctr">
+                    <a:lnL w="0">
+                      <a:noFill/>
+                    </a:lnL>
+                    <a:lnR w="0">
+                      <a:noFill/>
+                    </a:lnR>
+                    <a:lnT w="0">
+                      <a:noFill/>
+                    </a:lnT>
+                    <a:lnB w="9525">
+                      <a:solidFill>
+                        <a:srgbClr val="DCD6C8"/>
+                      </a:solidFill>
+                    </a:lnB>
+                    <a:solidFill>
+                      <a:srgbClr val="F7F5EF"/>
+                    </a:solidFill>
+                  </a:tcPr>
+                </a:tc>
+              </a:tr>
+              <a:tr h="566928">
+                <a:tc>
+                  <a:txBody>
+                    <a:bodyPr wrap="square"/>
+                    <a:lstStyle/>
+                    <a:p>
+                      <a:r>
+                        <a:rPr sz="1400" b="0" i="0">
+                          <a:solidFill>
+                            <a:srgbClr val="1E1B16"/>
+                          </a:solidFill>
+                          <a:latin typeface="Segoe UI"/>
+                        </a:rPr>
+                        <a:t>Built on</a:t>
+                      </a:r>
+                    </a:p>
+                  </a:txBody>
+                  <a:tcPr anchor="ctr">
+                    <a:lnL w="0">
+                      <a:noFill/>
+                    </a:lnL>
+                    <a:lnR w="0">
+                      <a:noFill/>
+                    </a:lnR>
+                    <a:lnT w="0">
+                      <a:noFill/>
+                    </a:lnT>
+                    <a:lnB w="9525">
+                      <a:solidFill>
+                        <a:srgbClr val="DCD6C8"/>
+                      </a:solidFill>
+                    </a:lnB>
+                    <a:solidFill>
+                      <a:srgbClr val="F7F5EF"/>
+                    </a:solidFill>
+                  </a:tcPr>
+                </a:tc>
+                <a:tc>
+                  <a:txBody>
+                    <a:bodyPr wrap="square"/>
+                    <a:lstStyle/>
+                    <a:p>
+                      <a:r>
+                        <a:rPr sz="1400" b="0" i="0">
+                          <a:solidFill>
+                            <a:srgbClr val="1E1B16"/>
+                          </a:solidFill>
+                          <a:latin typeface="Segoe UI"/>
+                        </a:rPr>
+                        <a:t>Selective disclosure · OpenID4VC, SD-JWT VC, W3C VC</a:t>
+                      </a:r>
+                    </a:p>
+                  </a:txBody>
+                  <a:tcPr anchor="ctr">
+                    <a:lnL w="0">
+                      <a:noFill/>
+                    </a:lnL>
+                    <a:lnR w="0">
+                      <a:noFill/>
+                    </a:lnR>
+                    <a:lnT w="0">
+                      <a:noFill/>
+                    </a:lnT>
+                    <a:lnB w="9525">
+                      <a:solidFill>
+                        <a:srgbClr val="DCD6C8"/>
+                      </a:solidFill>
+                    </a:lnB>
+                    <a:solidFill>
+                      <a:srgbClr val="F7F5EF"/>
+                    </a:solidFill>
+                  </a:tcPr>
+                </a:tc>
+                <a:tc>
+                  <a:txBody>
+                    <a:bodyPr wrap="square"/>
+                    <a:lstStyle/>
+                    <a:p>
+                      <a:r>
+                        <a:rPr sz="1400" b="0" i="0">
+                          <a:solidFill>
+                            <a:srgbClr val="1E1B16"/>
+                          </a:solidFill>
+                          <a:latin typeface="Segoe UI"/>
+                        </a:rPr>
+                        <a:t>Selective disclosure · KERI, ACDC — GLEIF's vLEI</a:t>
+                      </a:r>
+                    </a:p>
+                  </a:txBody>
+                  <a:tcPr anchor="ctr">
+                    <a:lnL w="0">
+                      <a:noFill/>
+                    </a:lnL>
+                    <a:lnR w="0">
+                      <a:noFill/>
+                    </a:lnR>
+                    <a:lnT w="0">
+                      <a:noFill/>
+                    </a:lnT>
+                    <a:lnB w="9525">
+                      <a:solidFill>
+                        <a:srgbClr val="DCD6C8"/>
+                      </a:solidFill>
+                    </a:lnB>
+                    <a:solidFill>
+                      <a:srgbClr val="F7F5EF"/>
+                    </a:solidFill>
+                  </a:tcPr>
+                </a:tc>
+              </a:tr>
+            </a:tbl>
+          </a:graphicData>
+        </a:graphic>
+      </p:graphicFrame>
+      <p:sp>
+        <p:nvSpPr>
+          <p:cNvPr id="6" name="TextBox 5"/>
           <p:cNvSpPr txBox="1"/>
           <p:nvPr/>
         </p:nvSpPr>
         <p:spPr>
           <a:xfrm>
-            <a:off x="868680" y="1975104"/>
-            <a:ext cx="10454335" cy="3822192"/>
+            <a:off x="868680" y="5943600"/>
+            <a:ext cx="9082735" cy="457200"/>
           </a:xfrm>
           <a:prstGeom prst="rect">
             <a:avLst/>
@@ -6438,97 +7224,34 @@
           <a:noFill/>
         </p:spPr>
         <p:txBody>
-          <a:bodyPr wrap="square" anchor="ctr" lIns="0" rIns="0" tIns="0" bIns="0">
+          <a:bodyPr wrap="square" anchor="t" lIns="0" rIns="0" tIns="0" bIns="0">
             <a:spAutoFit/>
           </a:bodyPr>
           <a:lstStyle/>
           <a:p>
-            <a:pPr algn="l">
-              <a:spcAft>
-                <a:spcPts val="2200"/>
-              </a:spcAft>
-            </a:pPr>
-            <a:r>
-              <a:rPr sz="1900" b="1" i="0">
-                <a:solidFill>
-                  <a:srgbClr val="2E5D89"/>
-                </a:solidFill>
-                <a:latin typeface="Segoe UI"/>
-              </a:rPr>
-              <a:t>(a) Passive, from a public location</a:t>
-            </a:r>
-            <a:r>
-              <a:rPr sz="1900" b="0" i="0">
-                <a:solidFill>
-                  <a:srgbClr val="1E1B16"/>
-                </a:solidFill>
-                <a:latin typeface="Segoe UI"/>
-              </a:rPr>
-              <a:t> — publish once, verify anywhere, no per-check cost</a:t>
-            </a:r>
-          </a:p>
-          <a:p>
-            <a:pPr>
-              <a:spcAft>
-                <a:spcPts val="2200"/>
-              </a:spcAft>
-            </a:pPr>
-            <a:r>
-              <a:rPr sz="1900" b="1" i="0">
-                <a:solidFill>
-                  <a:srgbClr val="2E5D89"/>
-                </a:solidFill>
-                <a:latin typeface="Segoe UI"/>
-              </a:rPr>
-              <a:t>(b) Attested confirmation (來函確認)</a:t>
-            </a:r>
-            <a:r>
-              <a:rPr sz="1900" b="0" i="0">
-                <a:solidFill>
-                  <a:srgbClr val="1E1B16"/>
-                </a:solidFill>
-                <a:latin typeface="Segoe UI"/>
-              </a:rPr>
-              <a:t> — one institution confirms to another, signed</a:t>
-            </a:r>
-          </a:p>
-          <a:p>
-            <a:pPr>
-              <a:spcAft>
-                <a:spcPts val="2200"/>
-              </a:spcAft>
-            </a:pPr>
-            <a:r>
-              <a:rPr sz="1900" b="1" i="0">
-                <a:solidFill>
-                  <a:srgbClr val="2E5D89"/>
-                </a:solidFill>
-                <a:latin typeface="Segoe UI"/>
-              </a:rPr>
-              <a:t>The limit, stated: </a:t>
-            </a:r>
-            <a:r>
-              <a:rPr sz="1900" b="0" i="0">
-                <a:solidFill>
-                  <a:srgbClr val="1E1B16"/>
-                </a:solidFill>
-                <a:latin typeface="Segoe UI"/>
-              </a:rPr>
-              <a:t>relying on an attestation means relying on that institution's judgment — exactly as relying on a letter does today.</a:t>
-            </a:r>
-          </a:p>
-        </p:txBody>
-      </p:sp>
-      <p:sp>
-        <p:nvSpPr>
-          <p:cNvPr id="6" name="TextBox 5"/>
+            <a:pPr algn="l"/>
+            <a:r>
+              <a:rPr sz="1300" b="0" i="1">
+                <a:solidFill>
+                  <a:srgbClr val="6E6658"/>
+                </a:solidFill>
+                <a:latin typeface="Georgia"/>
+              </a:rPr>
+              <a:t>The trust model is already in use here. The holder it does not have yet is the agent acting for the entity.</a:t>
+            </a:r>
+          </a:p>
+        </p:txBody>
+      </p:sp>
+      <p:sp>
+        <p:nvSpPr>
+          <p:cNvPr id="7" name="TextBox 6"/>
           <p:cNvSpPr txBox="1"/>
           <p:nvPr/>
         </p:nvSpPr>
         <p:spPr>
           <a:xfrm>
-            <a:off x="868680" y="5943600"/>
-            <a:ext cx="9082735" cy="457200"/>
+            <a:off x="10225735" y="5980176"/>
+            <a:ext cx="1097280" cy="274320"/>
           </a:xfrm>
           <a:prstGeom prst="rect">
             <a:avLst/>
@@ -6541,50 +7264,15 @@
           </a:bodyPr>
           <a:lstStyle/>
           <a:p>
-            <a:pPr algn="l"/>
-            <a:r>
-              <a:rPr sz="1300" b="0" i="1">
+            <a:pPr algn="r"/>
+            <a:r>
+              <a:rPr sz="1000" b="0" i="0" spc="80">
                 <a:solidFill>
                   <a:srgbClr val="6E6658"/>
                 </a:solidFill>
-                <a:latin typeface="Georgia"/>
-              </a:rPr>
-              <a:t>The attesting institution must itself have been verified first.</a:t>
-            </a:r>
-          </a:p>
-        </p:txBody>
-      </p:sp>
-      <p:sp>
-        <p:nvSpPr>
-          <p:cNvPr id="7" name="TextBox 6"/>
-          <p:cNvSpPr txBox="1"/>
-          <p:nvPr/>
-        </p:nvSpPr>
-        <p:spPr>
-          <a:xfrm>
-            <a:off x="10225735" y="5980176"/>
-            <a:ext cx="1097280" cy="274320"/>
-          </a:xfrm>
-          <a:prstGeom prst="rect">
-            <a:avLst/>
-          </a:prstGeom>
-          <a:noFill/>
-        </p:spPr>
-        <p:txBody>
-          <a:bodyPr wrap="square" anchor="t" lIns="0" rIns="0" tIns="0" bIns="0">
-            <a:spAutoFit/>
-          </a:bodyPr>
-          <a:lstStyle/>
-          <a:p>
-            <a:pPr algn="r"/>
-            <a:r>
-              <a:rPr sz="1000" b="0" i="0" spc="80">
-                <a:solidFill>
-                  <a:srgbClr val="6E6658"/>
-                </a:solidFill>
                 <a:latin typeface="Segoe UI"/>
               </a:rPr>
-              <a:t>14 / 19</a:t>
+              <a:t>14 / 20</a:t>
             </a:r>
           </a:p>
         </p:txBody>
@@ -6645,7 +7333,7 @@
                 </a:solidFill>
                 <a:latin typeface="Segoe UI"/>
               </a:rPr>
-              <a:t>ADOPTION</a:t>
+              <a:t>BOTH ALREADY EXIST IN INSTITUTIONS</a:t>
             </a:r>
           </a:p>
         </p:txBody>
@@ -6680,7 +7368,7 @@
                 </a:solidFill>
                 <a:latin typeface="Georgia"/>
               </a:rPr>
-              <a:t>Six stages, one of which touches IT</a:t>
+              <a:t>Two ways to check an identity</a:t>
             </a:r>
           </a:p>
         </p:txBody>
@@ -6753,7 +7441,7 @@
           <a:p>
             <a:pPr algn="l">
               <a:spcAft>
-                <a:spcPts val="1200"/>
+                <a:spcPts val="2200"/>
               </a:spcAft>
             </a:pPr>
             <a:r>
@@ -6763,7 +7451,7 @@
                 </a:solidFill>
                 <a:latin typeface="Segoe UI"/>
               </a:rPr>
-              <a:t>0  </a:t>
+              <a:t>(a) Passive, from a public location</a:t>
             </a:r>
             <a:r>
               <a:rPr sz="1900" b="0" i="0">
@@ -6772,13 +7460,13 @@
                 </a:solidFill>
                 <a:latin typeface="Segoe UI"/>
               </a:rPr>
-              <a:t>Credential and role vocabulary — the business unit, not IT</a:t>
+              <a:t> — publish once, verify anywhere, no per-check cost</a:t>
             </a:r>
           </a:p>
           <a:p>
             <a:pPr>
               <a:spcAft>
-                <a:spcPts val="1200"/>
+                <a:spcPts val="2200"/>
               </a:spcAft>
             </a:pPr>
             <a:r>
@@ -6787,8 +7475,9 @@
                   <a:srgbClr val="2E5D89"/>
                 </a:solidFill>
                 <a:latin typeface="Segoe UI"/>
-              </a:rPr>
-              <a:t>1  </a:t>
+                <a:ea typeface="Microsoft JhengHei"/>
+              </a:rPr>
+              <a:t>(b) Attested confirmation (來函確認)</a:t>
             </a:r>
             <a:r>
               <a:rPr sz="1900" b="0" i="0">
@@ -6797,13 +7486,13 @@
                 </a:solidFill>
                 <a:latin typeface="Segoe UI"/>
               </a:rPr>
-              <a:t>Publish at a well-known location</a:t>
+              <a:t> — one institution confirms to another, signed</a:t>
             </a:r>
           </a:p>
           <a:p>
             <a:pPr>
               <a:spcAft>
-                <a:spcPts val="1200"/>
+                <a:spcPts val="2200"/>
               </a:spcAft>
             </a:pPr>
             <a:r>
@@ -6813,7 +7502,7 @@
                 </a:solidFill>
                 <a:latin typeface="Segoe UI"/>
               </a:rPr>
-              <a:t>2  </a:t>
+              <a:t>The limit, stated: </a:t>
             </a:r>
             <a:r>
               <a:rPr sz="1900" b="0" i="0">
@@ -6822,82 +7511,7 @@
                 </a:solidFill>
                 <a:latin typeface="Segoe UI"/>
               </a:rPr>
-              <a:t>Declare the requirement per tool</a:t>
-            </a:r>
-          </a:p>
-          <a:p>
-            <a:pPr>
-              <a:spcAft>
-                <a:spcPts val="1200"/>
-              </a:spcAft>
-            </a:pPr>
-            <a:r>
-              <a:rPr sz="1900" b="1" i="0">
-                <a:solidFill>
-                  <a:srgbClr val="2E5D89"/>
-                </a:solidFill>
-                <a:latin typeface="Segoe UI"/>
-              </a:rPr>
-              <a:t>3  </a:t>
-            </a:r>
-            <a:r>
-              <a:rPr sz="1900" b="0" i="0">
-                <a:solidFill>
-                  <a:srgbClr val="1E1B16"/>
-                </a:solidFill>
-                <a:latin typeface="Segoe UI"/>
-              </a:rPr>
-              <a:t>Verify at the gateway ← the only IT change</a:t>
-            </a:r>
-          </a:p>
-          <a:p>
-            <a:pPr>
-              <a:spcAft>
-                <a:spcPts val="1200"/>
-              </a:spcAft>
-            </a:pPr>
-            <a:r>
-              <a:rPr sz="1900" b="1" i="0">
-                <a:solidFill>
-                  <a:srgbClr val="2E5D89"/>
-                </a:solidFill>
-                <a:latin typeface="Segoe UI"/>
-              </a:rPr>
-              <a:t>4  </a:t>
-            </a:r>
-            <a:r>
-              <a:rPr sz="1900" b="0" i="0">
-                <a:solidFill>
-                  <a:srgbClr val="1E1B16"/>
-                </a:solidFill>
-                <a:latin typeface="Segoe UI"/>
-              </a:rPr>
-              <a:t>Attestations between institutions</a:t>
-            </a:r>
-          </a:p>
-          <a:p>
-            <a:pPr>
-              <a:spcAft>
-                <a:spcPts val="1200"/>
-              </a:spcAft>
-            </a:pPr>
-            <a:r>
-              <a:rPr sz="1900" b="1" i="0">
-                <a:solidFill>
-                  <a:srgbClr val="2E5D89"/>
-                </a:solidFill>
-                <a:latin typeface="Segoe UI"/>
-              </a:rPr>
-              <a:t>5  </a:t>
-            </a:r>
-            <a:r>
-              <a:rPr sz="1900" b="0" i="0">
-                <a:solidFill>
-                  <a:srgbClr val="1E1B16"/>
-                </a:solidFill>
-                <a:latin typeface="Segoe UI"/>
-              </a:rPr>
-              <a:t>Audit records</a:t>
+              <a:t>relying on an attestation means relying on that institution's judgment — exactly as relying on a letter does today.</a:t>
             </a:r>
           </a:p>
         </p:txBody>
@@ -6932,7 +7546,7 @@
                 </a:solidFill>
                 <a:latin typeface="Georgia"/>
               </a:rPr>
-              <a:t>The filing service contains no verification code. It reads two headers.</a:t>
+              <a:t>The attesting institution must itself have been verified first.</a:t>
             </a:r>
           </a:p>
         </p:txBody>
@@ -6967,7 +7581,7 @@
                 </a:solidFill>
                 <a:latin typeface="Segoe UI"/>
               </a:rPr>
-              <a:t>15 / 19</a:t>
+              <a:t>15 / 20</a:t>
             </a:r>
           </a:p>
         </p:txBody>
@@ -7063,7 +7677,7 @@
                 </a:solidFill>
                 <a:latin typeface="Georgia"/>
               </a:rPr>
-              <a:t>What an institution gets</a:t>
+              <a:t>Six stages, one of which touches IT</a:t>
             </a:r>
           </a:p>
         </p:txBody>
@@ -7112,451 +7726,16 @@
           </a:p>
         </p:txBody>
       </p:sp>
-      <p:graphicFrame>
-        <p:nvGraphicFramePr>
-          <p:cNvPr id="5" name="Table 4"/>
-          <p:cNvGraphicFramePr>
-            <a:graphicFrameLocks noGrp="1"/>
-          </p:cNvGraphicFramePr>
-          <p:nvPr/>
-        </p:nvGraphicFramePr>
-        <p:xfrm>
-          <a:off x="868680" y="2624328"/>
-          <a:ext cx="10454334" cy="2523744"/>
-        </p:xfrm>
-        <a:graphic>
-          <a:graphicData uri="http://schemas.openxmlformats.org/drawingml/2006/table">
-            <a:tbl>
-              <a:tblPr firstRow="1" bandRow="1">
-                <a:tableStyleId>{5C22544A-7EE6-4342-B048-85BDC9FD1C3A}</a:tableStyleId>
-              </a:tblPr>
-              <a:tblGrid>
-                <a:gridCol w="3136300"/>
-                <a:gridCol w="3659017"/>
-                <a:gridCol w="3659017"/>
-              </a:tblGrid>
-              <a:tr h="420624">
-                <a:tc>
-                  <a:txBody>
-                    <a:bodyPr/>
-                    <a:lstStyle/>
-                    <a:p>
-                      <a:r>
-                        <a:rPr sz="1100" b="1" i="0" spc="120">
-                          <a:solidFill>
-                            <a:srgbClr val="2E5D89"/>
-                          </a:solidFill>
-                          <a:latin typeface="Segoe UI"/>
-                        </a:rPr>
-                        <a:t/>
-                      </a:r>
-                    </a:p>
-                  </a:txBody>
-                  <a:tcPr>
-                    <a:solidFill>
-                      <a:srgbClr val="F7F5EF"/>
-                    </a:solidFill>
-                  </a:tcPr>
-                </a:tc>
-                <a:tc>
-                  <a:txBody>
-                    <a:bodyPr/>
-                    <a:lstStyle/>
-                    <a:p>
-                      <a:r>
-                        <a:rPr sz="1100" b="1" i="0" spc="120">
-                          <a:solidFill>
-                            <a:srgbClr val="2E5D89"/>
-                          </a:solidFill>
-                          <a:latin typeface="Segoe UI"/>
-                        </a:rPr>
-                        <a:t>TODAY</a:t>
-                      </a:r>
-                    </a:p>
-                  </a:txBody>
-                  <a:tcPr>
-                    <a:solidFill>
-                      <a:srgbClr val="F7F5EF"/>
-                    </a:solidFill>
-                  </a:tcPr>
-                </a:tc>
-                <a:tc>
-                  <a:txBody>
-                    <a:bodyPr/>
-                    <a:lstStyle/>
-                    <a:p>
-                      <a:r>
-                        <a:rPr sz="1100" b="1" i="0" spc="120">
-                          <a:solidFill>
-                            <a:srgbClr val="2E5D89"/>
-                          </a:solidFill>
-                          <a:latin typeface="Segoe UI"/>
-                        </a:rPr>
-                        <a:t>AFTER STAGE 3</a:t>
-                      </a:r>
-                    </a:p>
-                  </a:txBody>
-                  <a:tcPr>
-                    <a:solidFill>
-                      <a:srgbClr val="F7F5EF"/>
-                    </a:solidFill>
-                  </a:tcPr>
-                </a:tc>
-              </a:tr>
-              <a:tr h="420624">
-                <a:tc>
-                  <a:txBody>
-                    <a:bodyPr wrap="square"/>
-                    <a:lstStyle/>
-                    <a:p>
-                      <a:r>
-                        <a:rPr sz="1400" b="0" i="0">
-                          <a:solidFill>
-                            <a:srgbClr val="1E1B16"/>
-                          </a:solidFill>
-                          <a:latin typeface="Segoe UI"/>
-                        </a:rPr>
-                        <a:t>Who filed</a:t>
-                      </a:r>
-                    </a:p>
-                  </a:txBody>
-                  <a:tcPr anchor="ctr">
-                    <a:solidFill>
-                      <a:srgbClr val="F7F5EF"/>
-                    </a:solidFill>
-                  </a:tcPr>
-                </a:tc>
-                <a:tc>
-                  <a:txBody>
-                    <a:bodyPr wrap="square"/>
-                    <a:lstStyle/>
-                    <a:p>
-                      <a:r>
-                        <a:rPr sz="1400" b="0" i="0">
-                          <a:solidFill>
-                            <a:srgbClr val="1E1B16"/>
-                          </a:solidFill>
-                          <a:latin typeface="Segoe UI"/>
-                        </a:rPr>
-                        <a:t>A session, a token</a:t>
-                      </a:r>
-                    </a:p>
-                  </a:txBody>
-                  <a:tcPr anchor="ctr">
-                    <a:solidFill>
-                      <a:srgbClr val="F7F5EF"/>
-                    </a:solidFill>
-                  </a:tcPr>
-                </a:tc>
-                <a:tc>
-                  <a:txBody>
-                    <a:bodyPr wrap="square"/>
-                    <a:lstStyle/>
-                    <a:p>
-                      <a:r>
-                        <a:rPr sz="1400" b="0" i="0">
-                          <a:solidFill>
-                            <a:srgbClr val="1E1B16"/>
-                          </a:solidFill>
-                          <a:latin typeface="Segoe UI"/>
-                        </a:rPr>
-                        <a:t>A named entity and role</a:t>
-                      </a:r>
-                    </a:p>
-                  </a:txBody>
-                  <a:tcPr anchor="ctr">
-                    <a:solidFill>
-                      <a:srgbClr val="F7F5EF"/>
-                    </a:solidFill>
-                  </a:tcPr>
-                </a:tc>
-              </a:tr>
-              <a:tr h="420624">
-                <a:tc>
-                  <a:txBody>
-                    <a:bodyPr wrap="square"/>
-                    <a:lstStyle/>
-                    <a:p>
-                      <a:r>
-                        <a:rPr sz="1400" b="0" i="0">
-                          <a:solidFill>
-                            <a:srgbClr val="1E1B16"/>
-                          </a:solidFill>
-                          <a:latin typeface="Segoe UI"/>
-                        </a:rPr>
-                        <a:t>Authority changed</a:t>
-                      </a:r>
-                    </a:p>
-                  </a:txBody>
-                  <a:tcPr anchor="ctr">
-                    <a:solidFill>
-                      <a:srgbClr val="F7F5EF"/>
-                    </a:solidFill>
-                  </a:tcPr>
-                </a:tc>
-                <a:tc>
-                  <a:txBody>
-                    <a:bodyPr wrap="square"/>
-                    <a:lstStyle/>
-                    <a:p>
-                      <a:r>
-                        <a:rPr sz="1400" b="0" i="0">
-                          <a:solidFill>
-                            <a:srgbClr val="1E1B16"/>
-                          </a:solidFill>
-                          <a:latin typeface="Segoe UI"/>
-                        </a:rPr>
-                        <a:t>A ticket</a:t>
-                      </a:r>
-                    </a:p>
-                  </a:txBody>
-                  <a:tcPr anchor="ctr">
-                    <a:solidFill>
-                      <a:srgbClr val="F7F5EF"/>
-                    </a:solidFill>
-                  </a:tcPr>
-                </a:tc>
-                <a:tc>
-                  <a:txBody>
-                    <a:bodyPr wrap="square"/>
-                    <a:lstStyle/>
-                    <a:p>
-                      <a:r>
-                        <a:rPr sz="1400" b="0" i="0">
-                          <a:solidFill>
-                            <a:srgbClr val="1E1B16"/>
-                          </a:solidFill>
-                          <a:latin typeface="Segoe UI"/>
-                        </a:rPr>
-                        <a:t>Revoke the credential</a:t>
-                      </a:r>
-                    </a:p>
-                  </a:txBody>
-                  <a:tcPr anchor="ctr">
-                    <a:solidFill>
-                      <a:srgbClr val="F7F5EF"/>
-                    </a:solidFill>
-                  </a:tcPr>
-                </a:tc>
-              </a:tr>
-              <a:tr h="420624">
-                <a:tc>
-                  <a:txBody>
-                    <a:bodyPr wrap="square"/>
-                    <a:lstStyle/>
-                    <a:p>
-                      <a:r>
-                        <a:rPr sz="1400" b="0" i="0">
-                          <a:solidFill>
-                            <a:srgbClr val="1E1B16"/>
-                          </a:solidFill>
-                          <a:latin typeface="Segoe UI"/>
-                        </a:rPr>
-                        <a:t>New system built</a:t>
-                      </a:r>
-                    </a:p>
-                  </a:txBody>
-                  <a:tcPr anchor="ctr">
-                    <a:solidFill>
-                      <a:srgbClr val="F7F5EF"/>
-                    </a:solidFill>
-                  </a:tcPr>
-                </a:tc>
-                <a:tc>
-                  <a:txBody>
-                    <a:bodyPr wrap="square"/>
-                    <a:lstStyle/>
-                    <a:p>
-                      <a:r>
-                        <a:rPr sz="1400" b="0" i="0">
-                          <a:solidFill>
-                            <a:srgbClr val="1E1B16"/>
-                          </a:solidFill>
-                          <a:latin typeface="Segoe UI"/>
-                        </a:rPr>
-                        <a:t>—</a:t>
-                      </a:r>
-                    </a:p>
-                  </a:txBody>
-                  <a:tcPr anchor="ctr">
-                    <a:solidFill>
-                      <a:srgbClr val="F7F5EF"/>
-                    </a:solidFill>
-                  </a:tcPr>
-                </a:tc>
-                <a:tc>
-                  <a:txBody>
-                    <a:bodyPr wrap="square"/>
-                    <a:lstStyle/>
-                    <a:p>
-                      <a:r>
-                        <a:rPr sz="1400" b="0" i="0">
-                          <a:solidFill>
-                            <a:srgbClr val="1E1B16"/>
-                          </a:solidFill>
-                          <a:latin typeface="Segoe UI"/>
-                        </a:rPr>
-                        <a:t>None</a:t>
-                      </a:r>
-                    </a:p>
-                  </a:txBody>
-                  <a:tcPr anchor="ctr">
-                    <a:solidFill>
-                      <a:srgbClr val="F7F5EF"/>
-                    </a:solidFill>
-                  </a:tcPr>
-                </a:tc>
-              </a:tr>
-              <a:tr h="420624">
-                <a:tc>
-                  <a:txBody>
-                    <a:bodyPr wrap="square"/>
-                    <a:lstStyle/>
-                    <a:p>
-                      <a:r>
-                        <a:rPr sz="1400" b="0" i="0">
-                          <a:solidFill>
-                            <a:srgbClr val="1E1B16"/>
-                          </a:solidFill>
-                          <a:latin typeface="Segoe UI"/>
-                        </a:rPr>
-                        <a:t>Existing sign-on</a:t>
-                      </a:r>
-                    </a:p>
-                  </a:txBody>
-                  <a:tcPr anchor="ctr">
-                    <a:solidFill>
-                      <a:srgbClr val="F7F5EF"/>
-                    </a:solidFill>
-                  </a:tcPr>
-                </a:tc>
-                <a:tc>
-                  <a:txBody>
-                    <a:bodyPr wrap="square"/>
-                    <a:lstStyle/>
-                    <a:p>
-                      <a:r>
-                        <a:rPr sz="1400" b="0" i="0">
-                          <a:solidFill>
-                            <a:srgbClr val="1E1B16"/>
-                          </a:solidFill>
-                          <a:latin typeface="Segoe UI"/>
-                        </a:rPr>
-                        <a:t>Answers which user</a:t>
-                      </a:r>
-                    </a:p>
-                  </a:txBody>
-                  <a:tcPr anchor="ctr">
-                    <a:solidFill>
-                      <a:srgbClr val="F7F5EF"/>
-                    </a:solidFill>
-                  </a:tcPr>
-                </a:tc>
-                <a:tc>
-                  <a:txBody>
-                    <a:bodyPr wrap="square"/>
-                    <a:lstStyle/>
-                    <a:p>
-                      <a:r>
-                        <a:rPr sz="1400" b="0" i="0">
-                          <a:solidFill>
-                            <a:srgbClr val="1E1B16"/>
-                          </a:solidFill>
-                          <a:latin typeface="Segoe UI"/>
-                        </a:rPr>
-                        <a:t>Unchanged — still required</a:t>
-                      </a:r>
-                    </a:p>
-                  </a:txBody>
-                  <a:tcPr anchor="ctr">
-                    <a:solidFill>
-                      <a:srgbClr val="F7F5EF"/>
-                    </a:solidFill>
-                  </a:tcPr>
-                </a:tc>
-              </a:tr>
-              <a:tr h="420624">
-                <a:tc>
-                  <a:txBody>
-                    <a:bodyPr wrap="square"/>
-                    <a:lstStyle/>
-                    <a:p>
-                      <a:r>
-                        <a:rPr sz="1400" b="0" i="0">
-                          <a:solidFill>
-                            <a:srgbClr val="1E1B16"/>
-                          </a:solidFill>
-                          <a:latin typeface="Segoe UI"/>
-                        </a:rPr>
-                        <a:t>Audit record</a:t>
-                      </a:r>
-                    </a:p>
-                  </a:txBody>
-                  <a:tcPr anchor="ctr">
-                    <a:solidFill>
-                      <a:srgbClr val="F7F5EF"/>
-                    </a:solidFill>
-                  </a:tcPr>
-                </a:tc>
-                <a:tc>
-                  <a:txBody>
-                    <a:bodyPr wrap="square"/>
-                    <a:lstStyle/>
-                    <a:p>
-                      <a:r>
-                        <a:rPr sz="1400" b="0" i="0">
-                          <a:solidFill>
-                            <a:srgbClr val="1E1B16"/>
-                          </a:solidFill>
-                          <a:latin typeface="Segoe UI"/>
-                        </a:rPr>
-                        <a:t>An IP and a timestamp</a:t>
-                      </a:r>
-                    </a:p>
-                  </a:txBody>
-                  <a:tcPr anchor="ctr">
-                    <a:solidFill>
-                      <a:srgbClr val="F7F5EF"/>
-                    </a:solidFill>
-                  </a:tcPr>
-                </a:tc>
-                <a:tc>
-                  <a:txBody>
-                    <a:bodyPr wrap="square"/>
-                    <a:lstStyle/>
-                    <a:p>
-                      <a:r>
-                        <a:rPr sz="1400" b="0" i="0">
-                          <a:solidFill>
-                            <a:srgbClr val="1E1B16"/>
-                          </a:solidFill>
-                          <a:latin typeface="Segoe UI"/>
-                        </a:rPr>
-                        <a:t>LEI, role, signature</a:t>
-                      </a:r>
-                    </a:p>
-                  </a:txBody>
-                  <a:tcPr anchor="ctr">
-                    <a:solidFill>
-                      <a:srgbClr val="F7F5EF"/>
-                    </a:solidFill>
-                  </a:tcPr>
-                </a:tc>
-              </a:tr>
-            </a:tbl>
-          </a:graphicData>
-        </a:graphic>
-      </p:graphicFrame>
-      <p:sp>
-        <p:nvSpPr>
-          <p:cNvPr id="6" name="TextBox 5"/>
+      <p:sp>
+        <p:nvSpPr>
+          <p:cNvPr id="5" name="TextBox 4"/>
           <p:cNvSpPr txBox="1"/>
           <p:nvPr/>
         </p:nvSpPr>
         <p:spPr>
           <a:xfrm>
-            <a:off x="868680" y="5943600"/>
-            <a:ext cx="9082735" cy="457200"/>
+            <a:off x="868680" y="1975104"/>
+            <a:ext cx="10454335" cy="3822192"/>
           </a:xfrm>
           <a:prstGeom prst="rect">
             <a:avLst/>
@@ -7564,34 +7743,172 @@
           <a:noFill/>
         </p:spPr>
         <p:txBody>
-          <a:bodyPr wrap="square" anchor="t" lIns="0" rIns="0" tIns="0" bIns="0">
+          <a:bodyPr wrap="square" anchor="ctr" lIns="0" rIns="0" tIns="0" bIns="0">
             <a:spAutoFit/>
           </a:bodyPr>
           <a:lstStyle/>
           <a:p>
-            <a:pPr algn="l"/>
-            <a:r>
-              <a:rPr sz="1300" b="0" i="1">
-                <a:solidFill>
-                  <a:srgbClr val="6E6658"/>
-                </a:solidFill>
-                <a:latin typeface="Georgia"/>
-              </a:rPr>
-              <a:t>vLEI answers which organization. Your existing sign-on still answers which user. A high-value action should require both.</a:t>
-            </a:r>
-          </a:p>
-        </p:txBody>
-      </p:sp>
-      <p:sp>
-        <p:nvSpPr>
-          <p:cNvPr id="7" name="TextBox 6"/>
+            <a:pPr algn="l">
+              <a:spcAft>
+                <a:spcPts val="1200"/>
+              </a:spcAft>
+            </a:pPr>
+            <a:r>
+              <a:rPr sz="1900" b="1" i="0">
+                <a:solidFill>
+                  <a:srgbClr val="2E5D89"/>
+                </a:solidFill>
+                <a:latin typeface="Segoe UI"/>
+              </a:rPr>
+              <a:t>0  </a:t>
+            </a:r>
+            <a:r>
+              <a:rPr sz="1900" b="0" i="0">
+                <a:solidFill>
+                  <a:srgbClr val="1E1B16"/>
+                </a:solidFill>
+                <a:latin typeface="Segoe UI"/>
+              </a:rPr>
+              <a:t>Credential and role vocabulary — the business unit, not IT</a:t>
+            </a:r>
+          </a:p>
+          <a:p>
+            <a:pPr>
+              <a:spcAft>
+                <a:spcPts val="1200"/>
+              </a:spcAft>
+            </a:pPr>
+            <a:r>
+              <a:rPr sz="1900" b="1" i="0">
+                <a:solidFill>
+                  <a:srgbClr val="2E5D89"/>
+                </a:solidFill>
+                <a:latin typeface="Segoe UI"/>
+              </a:rPr>
+              <a:t>1  </a:t>
+            </a:r>
+            <a:r>
+              <a:rPr sz="1900" b="0" i="0">
+                <a:solidFill>
+                  <a:srgbClr val="1E1B16"/>
+                </a:solidFill>
+                <a:latin typeface="Segoe UI"/>
+              </a:rPr>
+              <a:t>Publish at a well-known location</a:t>
+            </a:r>
+          </a:p>
+          <a:p>
+            <a:pPr>
+              <a:spcAft>
+                <a:spcPts val="1200"/>
+              </a:spcAft>
+            </a:pPr>
+            <a:r>
+              <a:rPr sz="1900" b="1" i="0">
+                <a:solidFill>
+                  <a:srgbClr val="2E5D89"/>
+                </a:solidFill>
+                <a:latin typeface="Segoe UI"/>
+              </a:rPr>
+              <a:t>2  </a:t>
+            </a:r>
+            <a:r>
+              <a:rPr sz="1900" b="0" i="0">
+                <a:solidFill>
+                  <a:srgbClr val="1E1B16"/>
+                </a:solidFill>
+                <a:latin typeface="Segoe UI"/>
+              </a:rPr>
+              <a:t>Declare the requirement per tool</a:t>
+            </a:r>
+          </a:p>
+          <a:p>
+            <a:pPr>
+              <a:spcAft>
+                <a:spcPts val="1200"/>
+              </a:spcAft>
+            </a:pPr>
+            <a:r>
+              <a:rPr sz="1900" b="1" i="0">
+                <a:solidFill>
+                  <a:srgbClr val="2E5D89"/>
+                </a:solidFill>
+                <a:latin typeface="Segoe UI"/>
+              </a:rPr>
+              <a:t>3  </a:t>
+            </a:r>
+            <a:r>
+              <a:rPr sz="1900" b="0" i="0">
+                <a:solidFill>
+                  <a:srgbClr val="1E1B16"/>
+                </a:solidFill>
+                <a:latin typeface="Segoe UI"/>
+              </a:rPr>
+              <a:t>Verify at the gateway ← the only IT change</a:t>
+            </a:r>
+          </a:p>
+          <a:p>
+            <a:pPr>
+              <a:spcAft>
+                <a:spcPts val="1200"/>
+              </a:spcAft>
+            </a:pPr>
+            <a:r>
+              <a:rPr sz="1900" b="1" i="0">
+                <a:solidFill>
+                  <a:srgbClr val="2E5D89"/>
+                </a:solidFill>
+                <a:latin typeface="Segoe UI"/>
+              </a:rPr>
+              <a:t>4  </a:t>
+            </a:r>
+            <a:r>
+              <a:rPr sz="1900" b="0" i="0">
+                <a:solidFill>
+                  <a:srgbClr val="1E1B16"/>
+                </a:solidFill>
+                <a:latin typeface="Segoe UI"/>
+              </a:rPr>
+              <a:t>Attestations between institutions</a:t>
+            </a:r>
+          </a:p>
+          <a:p>
+            <a:pPr>
+              <a:spcAft>
+                <a:spcPts val="1200"/>
+              </a:spcAft>
+            </a:pPr>
+            <a:r>
+              <a:rPr sz="1900" b="1" i="0">
+                <a:solidFill>
+                  <a:srgbClr val="2E5D89"/>
+                </a:solidFill>
+                <a:latin typeface="Segoe UI"/>
+              </a:rPr>
+              <a:t>5  </a:t>
+            </a:r>
+            <a:r>
+              <a:rPr sz="1900" b="0" i="0">
+                <a:solidFill>
+                  <a:srgbClr val="1E1B16"/>
+                </a:solidFill>
+                <a:latin typeface="Segoe UI"/>
+              </a:rPr>
+              <a:t>Audit records</a:t>
+            </a:r>
+          </a:p>
+        </p:txBody>
+      </p:sp>
+      <p:sp>
+        <p:nvSpPr>
+          <p:cNvPr id="6" name="TextBox 5"/>
           <p:cNvSpPr txBox="1"/>
           <p:nvPr/>
         </p:nvSpPr>
         <p:spPr>
           <a:xfrm>
-            <a:off x="10225735" y="5980176"/>
-            <a:ext cx="1097280" cy="274320"/>
+            <a:off x="868680" y="5943600"/>
+            <a:ext cx="9082735" cy="457200"/>
           </a:xfrm>
           <a:prstGeom prst="rect">
             <a:avLst/>
@@ -7604,6 +7921,41 @@
           </a:bodyPr>
           <a:lstStyle/>
           <a:p>
+            <a:pPr algn="l"/>
+            <a:r>
+              <a:rPr sz="1300" b="0" i="1">
+                <a:solidFill>
+                  <a:srgbClr val="6E6658"/>
+                </a:solidFill>
+                <a:latin typeface="Georgia"/>
+              </a:rPr>
+              <a:t>The filing service contains no verification code. It reads five headers the gateway sets.</a:t>
+            </a:r>
+          </a:p>
+        </p:txBody>
+      </p:sp>
+      <p:sp>
+        <p:nvSpPr>
+          <p:cNvPr id="7" name="TextBox 6"/>
+          <p:cNvSpPr txBox="1"/>
+          <p:nvPr/>
+        </p:nvSpPr>
+        <p:spPr>
+          <a:xfrm>
+            <a:off x="10225735" y="5980176"/>
+            <a:ext cx="1097280" cy="274320"/>
+          </a:xfrm>
+          <a:prstGeom prst="rect">
+            <a:avLst/>
+          </a:prstGeom>
+          <a:noFill/>
+        </p:spPr>
+        <p:txBody>
+          <a:bodyPr wrap="square" anchor="t" lIns="0" rIns="0" tIns="0" bIns="0">
+            <a:spAutoFit/>
+          </a:bodyPr>
+          <a:lstStyle/>
+          <a:p>
             <a:pPr algn="r"/>
             <a:r>
               <a:rPr sz="1000" b="0" i="0" spc="80">
@@ -7612,7 +7964,7 @@
                 </a:solidFill>
                 <a:latin typeface="Segoe UI"/>
               </a:rPr>
-              <a:t>16 / 19</a:t>
+              <a:t>16 / 20</a:t>
             </a:r>
           </a:p>
         </p:txBody>
@@ -7673,7 +8025,7 @@
                 </a:solidFill>
                 <a:latin typeface="Segoe UI"/>
               </a:rPr>
-              <a:t>STATED, NOT WAITED FOR</a:t>
+              <a:t>ADOPTION</a:t>
             </a:r>
           </a:p>
         </p:txBody>
@@ -7708,7 +8060,7 @@
                 </a:solidFill>
                 <a:latin typeface="Georgia"/>
               </a:rPr>
-              <a:t>Limits</a:t>
+              <a:t>What an institution gets</a:t>
             </a:r>
           </a:p>
         </p:txBody>
@@ -7757,16 +8109,703 @@
           </a:p>
         </p:txBody>
       </p:sp>
-      <p:sp>
-        <p:nvSpPr>
-          <p:cNvPr id="5" name="TextBox 4"/>
+      <p:graphicFrame>
+        <p:nvGraphicFramePr>
+          <p:cNvPr id="5" name="Table 4"/>
+          <p:cNvGraphicFramePr>
+            <a:graphicFrameLocks noGrp="1"/>
+          </p:cNvGraphicFramePr>
+          <p:nvPr/>
+        </p:nvGraphicFramePr>
+        <p:xfrm>
+          <a:off x="868680" y="2624328"/>
+          <a:ext cx="10454334" cy="2523744"/>
+        </p:xfrm>
+        <a:graphic>
+          <a:graphicData uri="http://schemas.openxmlformats.org/drawingml/2006/table">
+            <a:tbl>
+              <a:tblPr firstRow="1" bandRow="1">
+                <a:tableStyleId>{2D5ABB26-0587-4C30-8999-92F81FD0307C}</a:tableStyleId>
+              </a:tblPr>
+              <a:tblGrid>
+                <a:gridCol w="3136300"/>
+                <a:gridCol w="3659017"/>
+                <a:gridCol w="3659017"/>
+              </a:tblGrid>
+              <a:tr h="420624">
+                <a:tc>
+                  <a:txBody>
+                    <a:bodyPr wrap="square"/>
+                    <a:lstStyle/>
+                    <a:p>
+                      <a:r>
+                        <a:rPr sz="1100" b="1" i="0" spc="120">
+                          <a:solidFill>
+                            <a:srgbClr val="2E5D89"/>
+                          </a:solidFill>
+                          <a:latin typeface="Segoe UI"/>
+                        </a:rPr>
+                        <a:t/>
+                      </a:r>
+                    </a:p>
+                  </a:txBody>
+                  <a:tcPr>
+                    <a:lnL w="0">
+                      <a:noFill/>
+                    </a:lnL>
+                    <a:lnR w="0">
+                      <a:noFill/>
+                    </a:lnR>
+                    <a:lnT w="0">
+                      <a:noFill/>
+                    </a:lnT>
+                    <a:lnB w="9525">
+                      <a:solidFill>
+                        <a:srgbClr val="DCD6C8"/>
+                      </a:solidFill>
+                    </a:lnB>
+                    <a:solidFill>
+                      <a:srgbClr val="F7F5EF"/>
+                    </a:solidFill>
+                  </a:tcPr>
+                </a:tc>
+                <a:tc>
+                  <a:txBody>
+                    <a:bodyPr wrap="square"/>
+                    <a:lstStyle/>
+                    <a:p>
+                      <a:r>
+                        <a:rPr sz="1100" b="1" i="0" spc="120">
+                          <a:solidFill>
+                            <a:srgbClr val="2E5D89"/>
+                          </a:solidFill>
+                          <a:latin typeface="Segoe UI"/>
+                        </a:rPr>
+                        <a:t>TODAY</a:t>
+                      </a:r>
+                    </a:p>
+                  </a:txBody>
+                  <a:tcPr>
+                    <a:lnL w="0">
+                      <a:noFill/>
+                    </a:lnL>
+                    <a:lnR w="0">
+                      <a:noFill/>
+                    </a:lnR>
+                    <a:lnT w="0">
+                      <a:noFill/>
+                    </a:lnT>
+                    <a:lnB w="9525">
+                      <a:solidFill>
+                        <a:srgbClr val="DCD6C8"/>
+                      </a:solidFill>
+                    </a:lnB>
+                    <a:solidFill>
+                      <a:srgbClr val="F7F5EF"/>
+                    </a:solidFill>
+                  </a:tcPr>
+                </a:tc>
+                <a:tc>
+                  <a:txBody>
+                    <a:bodyPr wrap="square"/>
+                    <a:lstStyle/>
+                    <a:p>
+                      <a:r>
+                        <a:rPr sz="1100" b="1" i="0" spc="120">
+                          <a:solidFill>
+                            <a:srgbClr val="2E5D89"/>
+                          </a:solidFill>
+                          <a:latin typeface="Segoe UI"/>
+                        </a:rPr>
+                        <a:t>AFTER STAGE 3</a:t>
+                      </a:r>
+                    </a:p>
+                  </a:txBody>
+                  <a:tcPr>
+                    <a:lnL w="0">
+                      <a:noFill/>
+                    </a:lnL>
+                    <a:lnR w="0">
+                      <a:noFill/>
+                    </a:lnR>
+                    <a:lnT w="0">
+                      <a:noFill/>
+                    </a:lnT>
+                    <a:lnB w="9525">
+                      <a:solidFill>
+                        <a:srgbClr val="DCD6C8"/>
+                      </a:solidFill>
+                    </a:lnB>
+                    <a:solidFill>
+                      <a:srgbClr val="F7F5EF"/>
+                    </a:solidFill>
+                  </a:tcPr>
+                </a:tc>
+              </a:tr>
+              <a:tr h="420624">
+                <a:tc>
+                  <a:txBody>
+                    <a:bodyPr wrap="square"/>
+                    <a:lstStyle/>
+                    <a:p>
+                      <a:r>
+                        <a:rPr sz="1400" b="0" i="0">
+                          <a:solidFill>
+                            <a:srgbClr val="1E1B16"/>
+                          </a:solidFill>
+                          <a:latin typeface="Segoe UI"/>
+                        </a:rPr>
+                        <a:t>Who filed</a:t>
+                      </a:r>
+                    </a:p>
+                  </a:txBody>
+                  <a:tcPr anchor="ctr">
+                    <a:lnL w="0">
+                      <a:noFill/>
+                    </a:lnL>
+                    <a:lnR w="0">
+                      <a:noFill/>
+                    </a:lnR>
+                    <a:lnT w="0">
+                      <a:noFill/>
+                    </a:lnT>
+                    <a:lnB w="9525">
+                      <a:solidFill>
+                        <a:srgbClr val="DCD6C8"/>
+                      </a:solidFill>
+                    </a:lnB>
+                    <a:solidFill>
+                      <a:srgbClr val="F7F5EF"/>
+                    </a:solidFill>
+                  </a:tcPr>
+                </a:tc>
+                <a:tc>
+                  <a:txBody>
+                    <a:bodyPr wrap="square"/>
+                    <a:lstStyle/>
+                    <a:p>
+                      <a:r>
+                        <a:rPr sz="1400" b="0" i="0">
+                          <a:solidFill>
+                            <a:srgbClr val="1E1B16"/>
+                          </a:solidFill>
+                          <a:latin typeface="Segoe UI"/>
+                        </a:rPr>
+                        <a:t>A session, a token</a:t>
+                      </a:r>
+                    </a:p>
+                  </a:txBody>
+                  <a:tcPr anchor="ctr">
+                    <a:lnL w="0">
+                      <a:noFill/>
+                    </a:lnL>
+                    <a:lnR w="0">
+                      <a:noFill/>
+                    </a:lnR>
+                    <a:lnT w="0">
+                      <a:noFill/>
+                    </a:lnT>
+                    <a:lnB w="9525">
+                      <a:solidFill>
+                        <a:srgbClr val="DCD6C8"/>
+                      </a:solidFill>
+                    </a:lnB>
+                    <a:solidFill>
+                      <a:srgbClr val="F7F5EF"/>
+                    </a:solidFill>
+                  </a:tcPr>
+                </a:tc>
+                <a:tc>
+                  <a:txBody>
+                    <a:bodyPr wrap="square"/>
+                    <a:lstStyle/>
+                    <a:p>
+                      <a:r>
+                        <a:rPr sz="1400" b="0" i="0">
+                          <a:solidFill>
+                            <a:srgbClr val="1E1B16"/>
+                          </a:solidFill>
+                          <a:latin typeface="Segoe UI"/>
+                        </a:rPr>
+                        <a:t>A named entity and role</a:t>
+                      </a:r>
+                    </a:p>
+                  </a:txBody>
+                  <a:tcPr anchor="ctr">
+                    <a:lnL w="0">
+                      <a:noFill/>
+                    </a:lnL>
+                    <a:lnR w="0">
+                      <a:noFill/>
+                    </a:lnR>
+                    <a:lnT w="0">
+                      <a:noFill/>
+                    </a:lnT>
+                    <a:lnB w="9525">
+                      <a:solidFill>
+                        <a:srgbClr val="DCD6C8"/>
+                      </a:solidFill>
+                    </a:lnB>
+                    <a:solidFill>
+                      <a:srgbClr val="F7F5EF"/>
+                    </a:solidFill>
+                  </a:tcPr>
+                </a:tc>
+              </a:tr>
+              <a:tr h="420624">
+                <a:tc>
+                  <a:txBody>
+                    <a:bodyPr wrap="square"/>
+                    <a:lstStyle/>
+                    <a:p>
+                      <a:r>
+                        <a:rPr sz="1400" b="0" i="0">
+                          <a:solidFill>
+                            <a:srgbClr val="1E1B16"/>
+                          </a:solidFill>
+                          <a:latin typeface="Segoe UI"/>
+                        </a:rPr>
+                        <a:t>Authority changed</a:t>
+                      </a:r>
+                    </a:p>
+                  </a:txBody>
+                  <a:tcPr anchor="ctr">
+                    <a:lnL w="0">
+                      <a:noFill/>
+                    </a:lnL>
+                    <a:lnR w="0">
+                      <a:noFill/>
+                    </a:lnR>
+                    <a:lnT w="0">
+                      <a:noFill/>
+                    </a:lnT>
+                    <a:lnB w="9525">
+                      <a:solidFill>
+                        <a:srgbClr val="DCD6C8"/>
+                      </a:solidFill>
+                    </a:lnB>
+                    <a:solidFill>
+                      <a:srgbClr val="F7F5EF"/>
+                    </a:solidFill>
+                  </a:tcPr>
+                </a:tc>
+                <a:tc>
+                  <a:txBody>
+                    <a:bodyPr wrap="square"/>
+                    <a:lstStyle/>
+                    <a:p>
+                      <a:r>
+                        <a:rPr sz="1400" b="0" i="0">
+                          <a:solidFill>
+                            <a:srgbClr val="1E1B16"/>
+                          </a:solidFill>
+                          <a:latin typeface="Segoe UI"/>
+                        </a:rPr>
+                        <a:t>A ticket</a:t>
+                      </a:r>
+                    </a:p>
+                  </a:txBody>
+                  <a:tcPr anchor="ctr">
+                    <a:lnL w="0">
+                      <a:noFill/>
+                    </a:lnL>
+                    <a:lnR w="0">
+                      <a:noFill/>
+                    </a:lnR>
+                    <a:lnT w="0">
+                      <a:noFill/>
+                    </a:lnT>
+                    <a:lnB w="9525">
+                      <a:solidFill>
+                        <a:srgbClr val="DCD6C8"/>
+                      </a:solidFill>
+                    </a:lnB>
+                    <a:solidFill>
+                      <a:srgbClr val="F7F5EF"/>
+                    </a:solidFill>
+                  </a:tcPr>
+                </a:tc>
+                <a:tc>
+                  <a:txBody>
+                    <a:bodyPr wrap="square"/>
+                    <a:lstStyle/>
+                    <a:p>
+                      <a:r>
+                        <a:rPr sz="1400" b="0" i="0">
+                          <a:solidFill>
+                            <a:srgbClr val="1E1B16"/>
+                          </a:solidFill>
+                          <a:latin typeface="Segoe UI"/>
+                        </a:rPr>
+                        <a:t>Revoke the credential</a:t>
+                      </a:r>
+                    </a:p>
+                  </a:txBody>
+                  <a:tcPr anchor="ctr">
+                    <a:lnL w="0">
+                      <a:noFill/>
+                    </a:lnL>
+                    <a:lnR w="0">
+                      <a:noFill/>
+                    </a:lnR>
+                    <a:lnT w="0">
+                      <a:noFill/>
+                    </a:lnT>
+                    <a:lnB w="9525">
+                      <a:solidFill>
+                        <a:srgbClr val="DCD6C8"/>
+                      </a:solidFill>
+                    </a:lnB>
+                    <a:solidFill>
+                      <a:srgbClr val="F7F5EF"/>
+                    </a:solidFill>
+                  </a:tcPr>
+                </a:tc>
+              </a:tr>
+              <a:tr h="420624">
+                <a:tc>
+                  <a:txBody>
+                    <a:bodyPr wrap="square"/>
+                    <a:lstStyle/>
+                    <a:p>
+                      <a:r>
+                        <a:rPr sz="1400" b="0" i="0">
+                          <a:solidFill>
+                            <a:srgbClr val="1E1B16"/>
+                          </a:solidFill>
+                          <a:latin typeface="Segoe UI"/>
+                        </a:rPr>
+                        <a:t>New system built</a:t>
+                      </a:r>
+                    </a:p>
+                  </a:txBody>
+                  <a:tcPr anchor="ctr">
+                    <a:lnL w="0">
+                      <a:noFill/>
+                    </a:lnL>
+                    <a:lnR w="0">
+                      <a:noFill/>
+                    </a:lnR>
+                    <a:lnT w="0">
+                      <a:noFill/>
+                    </a:lnT>
+                    <a:lnB w="9525">
+                      <a:solidFill>
+                        <a:srgbClr val="DCD6C8"/>
+                      </a:solidFill>
+                    </a:lnB>
+                    <a:solidFill>
+                      <a:srgbClr val="F7F5EF"/>
+                    </a:solidFill>
+                  </a:tcPr>
+                </a:tc>
+                <a:tc>
+                  <a:txBody>
+                    <a:bodyPr wrap="square"/>
+                    <a:lstStyle/>
+                    <a:p>
+                      <a:r>
+                        <a:rPr sz="1400" b="0" i="0">
+                          <a:solidFill>
+                            <a:srgbClr val="1E1B16"/>
+                          </a:solidFill>
+                          <a:latin typeface="Segoe UI"/>
+                        </a:rPr>
+                        <a:t>—</a:t>
+                      </a:r>
+                    </a:p>
+                  </a:txBody>
+                  <a:tcPr anchor="ctr">
+                    <a:lnL w="0">
+                      <a:noFill/>
+                    </a:lnL>
+                    <a:lnR w="0">
+                      <a:noFill/>
+                    </a:lnR>
+                    <a:lnT w="0">
+                      <a:noFill/>
+                    </a:lnT>
+                    <a:lnB w="9525">
+                      <a:solidFill>
+                        <a:srgbClr val="DCD6C8"/>
+                      </a:solidFill>
+                    </a:lnB>
+                    <a:solidFill>
+                      <a:srgbClr val="F7F5EF"/>
+                    </a:solidFill>
+                  </a:tcPr>
+                </a:tc>
+                <a:tc>
+                  <a:txBody>
+                    <a:bodyPr wrap="square"/>
+                    <a:lstStyle/>
+                    <a:p>
+                      <a:r>
+                        <a:rPr sz="1400" b="0" i="0">
+                          <a:solidFill>
+                            <a:srgbClr val="1E1B16"/>
+                          </a:solidFill>
+                          <a:latin typeface="Segoe UI"/>
+                        </a:rPr>
+                        <a:t>None</a:t>
+                      </a:r>
+                    </a:p>
+                  </a:txBody>
+                  <a:tcPr anchor="ctr">
+                    <a:lnL w="0">
+                      <a:noFill/>
+                    </a:lnL>
+                    <a:lnR w="0">
+                      <a:noFill/>
+                    </a:lnR>
+                    <a:lnT w="0">
+                      <a:noFill/>
+                    </a:lnT>
+                    <a:lnB w="9525">
+                      <a:solidFill>
+                        <a:srgbClr val="DCD6C8"/>
+                      </a:solidFill>
+                    </a:lnB>
+                    <a:solidFill>
+                      <a:srgbClr val="F7F5EF"/>
+                    </a:solidFill>
+                  </a:tcPr>
+                </a:tc>
+              </a:tr>
+              <a:tr h="420624">
+                <a:tc>
+                  <a:txBody>
+                    <a:bodyPr wrap="square"/>
+                    <a:lstStyle/>
+                    <a:p>
+                      <a:r>
+                        <a:rPr sz="1400" b="0" i="0">
+                          <a:solidFill>
+                            <a:srgbClr val="1E1B16"/>
+                          </a:solidFill>
+                          <a:latin typeface="Segoe UI"/>
+                        </a:rPr>
+                        <a:t>Existing sign-on</a:t>
+                      </a:r>
+                    </a:p>
+                  </a:txBody>
+                  <a:tcPr anchor="ctr">
+                    <a:lnL w="0">
+                      <a:noFill/>
+                    </a:lnL>
+                    <a:lnR w="0">
+                      <a:noFill/>
+                    </a:lnR>
+                    <a:lnT w="0">
+                      <a:noFill/>
+                    </a:lnT>
+                    <a:lnB w="9525">
+                      <a:solidFill>
+                        <a:srgbClr val="DCD6C8"/>
+                      </a:solidFill>
+                    </a:lnB>
+                    <a:solidFill>
+                      <a:srgbClr val="F7F5EF"/>
+                    </a:solidFill>
+                  </a:tcPr>
+                </a:tc>
+                <a:tc>
+                  <a:txBody>
+                    <a:bodyPr wrap="square"/>
+                    <a:lstStyle/>
+                    <a:p>
+                      <a:r>
+                        <a:rPr sz="1400" b="0" i="0">
+                          <a:solidFill>
+                            <a:srgbClr val="1E1B16"/>
+                          </a:solidFill>
+                          <a:latin typeface="Segoe UI"/>
+                        </a:rPr>
+                        <a:t>Answers which user</a:t>
+                      </a:r>
+                    </a:p>
+                  </a:txBody>
+                  <a:tcPr anchor="ctr">
+                    <a:lnL w="0">
+                      <a:noFill/>
+                    </a:lnL>
+                    <a:lnR w="0">
+                      <a:noFill/>
+                    </a:lnR>
+                    <a:lnT w="0">
+                      <a:noFill/>
+                    </a:lnT>
+                    <a:lnB w="9525">
+                      <a:solidFill>
+                        <a:srgbClr val="DCD6C8"/>
+                      </a:solidFill>
+                    </a:lnB>
+                    <a:solidFill>
+                      <a:srgbClr val="F7F5EF"/>
+                    </a:solidFill>
+                  </a:tcPr>
+                </a:tc>
+                <a:tc>
+                  <a:txBody>
+                    <a:bodyPr wrap="square"/>
+                    <a:lstStyle/>
+                    <a:p>
+                      <a:r>
+                        <a:rPr sz="1400" b="0" i="0">
+                          <a:solidFill>
+                            <a:srgbClr val="1E1B16"/>
+                          </a:solidFill>
+                          <a:latin typeface="Segoe UI"/>
+                        </a:rPr>
+                        <a:t>Unchanged — still required</a:t>
+                      </a:r>
+                    </a:p>
+                  </a:txBody>
+                  <a:tcPr anchor="ctr">
+                    <a:lnL w="0">
+                      <a:noFill/>
+                    </a:lnL>
+                    <a:lnR w="0">
+                      <a:noFill/>
+                    </a:lnR>
+                    <a:lnT w="0">
+                      <a:noFill/>
+                    </a:lnT>
+                    <a:lnB w="9525">
+                      <a:solidFill>
+                        <a:srgbClr val="DCD6C8"/>
+                      </a:solidFill>
+                    </a:lnB>
+                    <a:solidFill>
+                      <a:srgbClr val="F7F5EF"/>
+                    </a:solidFill>
+                  </a:tcPr>
+                </a:tc>
+              </a:tr>
+              <a:tr h="420624">
+                <a:tc>
+                  <a:txBody>
+                    <a:bodyPr wrap="square"/>
+                    <a:lstStyle/>
+                    <a:p>
+                      <a:r>
+                        <a:rPr sz="1400" b="0" i="0">
+                          <a:solidFill>
+                            <a:srgbClr val="1E1B16"/>
+                          </a:solidFill>
+                          <a:latin typeface="Segoe UI"/>
+                        </a:rPr>
+                        <a:t>Audit record</a:t>
+                      </a:r>
+                    </a:p>
+                  </a:txBody>
+                  <a:tcPr anchor="ctr">
+                    <a:lnL w="0">
+                      <a:noFill/>
+                    </a:lnL>
+                    <a:lnR w="0">
+                      <a:noFill/>
+                    </a:lnR>
+                    <a:lnT w="0">
+                      <a:noFill/>
+                    </a:lnT>
+                    <a:lnB w="9525">
+                      <a:solidFill>
+                        <a:srgbClr val="DCD6C8"/>
+                      </a:solidFill>
+                    </a:lnB>
+                    <a:solidFill>
+                      <a:srgbClr val="F7F5EF"/>
+                    </a:solidFill>
+                  </a:tcPr>
+                </a:tc>
+                <a:tc>
+                  <a:txBody>
+                    <a:bodyPr wrap="square"/>
+                    <a:lstStyle/>
+                    <a:p>
+                      <a:r>
+                        <a:rPr sz="1400" b="0" i="0">
+                          <a:solidFill>
+                            <a:srgbClr val="1E1B16"/>
+                          </a:solidFill>
+                          <a:latin typeface="Segoe UI"/>
+                        </a:rPr>
+                        <a:t>An IP and a timestamp</a:t>
+                      </a:r>
+                    </a:p>
+                  </a:txBody>
+                  <a:tcPr anchor="ctr">
+                    <a:lnL w="0">
+                      <a:noFill/>
+                    </a:lnL>
+                    <a:lnR w="0">
+                      <a:noFill/>
+                    </a:lnR>
+                    <a:lnT w="0">
+                      <a:noFill/>
+                    </a:lnT>
+                    <a:lnB w="9525">
+                      <a:solidFill>
+                        <a:srgbClr val="DCD6C8"/>
+                      </a:solidFill>
+                    </a:lnB>
+                    <a:solidFill>
+                      <a:srgbClr val="F7F5EF"/>
+                    </a:solidFill>
+                  </a:tcPr>
+                </a:tc>
+                <a:tc>
+                  <a:txBody>
+                    <a:bodyPr wrap="square"/>
+                    <a:lstStyle/>
+                    <a:p>
+                      <a:r>
+                        <a:rPr sz="1400" b="0" i="0">
+                          <a:solidFill>
+                            <a:srgbClr val="1E1B16"/>
+                          </a:solidFill>
+                          <a:latin typeface="Segoe UI"/>
+                        </a:rPr>
+                        <a:t>LEI, role, signature</a:t>
+                      </a:r>
+                    </a:p>
+                  </a:txBody>
+                  <a:tcPr anchor="ctr">
+                    <a:lnL w="0">
+                      <a:noFill/>
+                    </a:lnL>
+                    <a:lnR w="0">
+                      <a:noFill/>
+                    </a:lnR>
+                    <a:lnT w="0">
+                      <a:noFill/>
+                    </a:lnT>
+                    <a:lnB w="9525">
+                      <a:solidFill>
+                        <a:srgbClr val="DCD6C8"/>
+                      </a:solidFill>
+                    </a:lnB>
+                    <a:solidFill>
+                      <a:srgbClr val="F7F5EF"/>
+                    </a:solidFill>
+                  </a:tcPr>
+                </a:tc>
+              </a:tr>
+            </a:tbl>
+          </a:graphicData>
+        </a:graphic>
+      </p:graphicFrame>
+      <p:sp>
+        <p:nvSpPr>
+          <p:cNvPr id="6" name="TextBox 5"/>
           <p:cNvSpPr txBox="1"/>
           <p:nvPr/>
         </p:nvSpPr>
         <p:spPr>
           <a:xfrm>
-            <a:off x="868680" y="1975104"/>
-            <a:ext cx="10454335" cy="3822192"/>
+            <a:off x="868680" y="5943600"/>
+            <a:ext cx="9082735" cy="457200"/>
           </a:xfrm>
           <a:prstGeom prst="rect">
             <a:avLst/>
@@ -7774,102 +8813,34 @@
           <a:noFill/>
         </p:spPr>
         <p:txBody>
-          <a:bodyPr wrap="square" anchor="ctr" lIns="0" rIns="0" tIns="0" bIns="0">
+          <a:bodyPr wrap="square" anchor="t" lIns="0" rIns="0" tIns="0" bIns="0">
             <a:spAutoFit/>
           </a:bodyPr>
           <a:lstStyle/>
           <a:p>
-            <a:pPr algn="l">
-              <a:spcAft>
-                <a:spcPts val="1400"/>
-              </a:spcAft>
-            </a:pPr>
-            <a:r>
-              <a:rPr sz="2000" b="0" i="0">
-                <a:solidFill>
-                  <a:srgbClr val="1E1B16"/>
-                </a:solidFill>
-                <a:latin typeface="Segoe UI"/>
-              </a:rPr>
-              <a:t>Verifiable is not the same as trustworthy</a:t>
-            </a:r>
-          </a:p>
-          <a:p>
-            <a:pPr>
-              <a:spcAft>
-                <a:spcPts val="1400"/>
-              </a:spcAft>
-            </a:pPr>
-            <a:r>
-              <a:rPr sz="2000" b="0" i="0">
-                <a:solidFill>
-                  <a:srgbClr val="1E1B16"/>
-                </a:solidFill>
-                <a:latin typeface="Segoe UI"/>
-              </a:rPr>
-              <a:t>LEIs are not issued to private individuals</a:t>
-            </a:r>
-          </a:p>
-          <a:p>
-            <a:pPr>
-              <a:spcAft>
-                <a:spcPts val="1400"/>
-              </a:spcAft>
-            </a:pPr>
-            <a:r>
-              <a:rPr sz="2000" b="0" i="0">
-                <a:solidFill>
-                  <a:srgbClr val="1E1B16"/>
-                </a:solidFill>
-                <a:latin typeface="Segoe UI"/>
-              </a:rPr>
-              <a:t>There is a cost, and QVI coverage is still expanding</a:t>
-            </a:r>
-          </a:p>
-          <a:p>
-            <a:pPr>
-              <a:spcAft>
-                <a:spcPts val="1400"/>
-              </a:spcAft>
-            </a:pPr>
-            <a:r>
-              <a:rPr sz="2000" b="0" i="0">
-                <a:solidFill>
-                  <a:srgbClr val="1E1B16"/>
-                </a:solidFill>
-                <a:latin typeface="Segoe UI"/>
-              </a:rPr>
-              <a:t>Our demo root is self-configured</a:t>
-            </a:r>
-          </a:p>
-          <a:p>
-            <a:pPr>
-              <a:spcAft>
-                <a:spcPts val="1400"/>
-              </a:spcAft>
-            </a:pPr>
-            <a:r>
-              <a:rPr sz="2000" b="0" i="0">
-                <a:solidFill>
-                  <a:srgbClr val="1E1B16"/>
-                </a:solidFill>
-                <a:latin typeface="Segoe UI"/>
-              </a:rPr>
-              <a:t>Agent delegation conventions are not yet settled</a:t>
-            </a:r>
-          </a:p>
-        </p:txBody>
-      </p:sp>
-      <p:sp>
-        <p:nvSpPr>
-          <p:cNvPr id="6" name="TextBox 5"/>
+            <a:pPr algn="l"/>
+            <a:r>
+              <a:rPr sz="1300" b="0" i="1">
+                <a:solidFill>
+                  <a:srgbClr val="6E6658"/>
+                </a:solidFill>
+                <a:latin typeface="Georgia"/>
+              </a:rPr>
+              <a:t>vLEI answers which organization. Your existing sign-on still answers which user. A high-value action should require both.</a:t>
+            </a:r>
+          </a:p>
+        </p:txBody>
+      </p:sp>
+      <p:sp>
+        <p:nvSpPr>
+          <p:cNvPr id="7" name="TextBox 6"/>
           <p:cNvSpPr txBox="1"/>
           <p:nvPr/>
         </p:nvSpPr>
         <p:spPr>
           <a:xfrm>
-            <a:off x="868680" y="5943600"/>
-            <a:ext cx="9082735" cy="457200"/>
+            <a:off x="10225735" y="5980176"/>
+            <a:ext cx="1097280" cy="274320"/>
           </a:xfrm>
           <a:prstGeom prst="rect">
             <a:avLst/>
@@ -7882,50 +8853,15 @@
           </a:bodyPr>
           <a:lstStyle/>
           <a:p>
-            <a:pPr algn="l"/>
-            <a:r>
-              <a:rPr sz="1300" b="0" i="1">
+            <a:pPr algn="r"/>
+            <a:r>
+              <a:rPr sz="1000" b="0" i="0" spc="80">
                 <a:solidFill>
                   <a:srgbClr val="6E6658"/>
                 </a:solidFill>
-                <a:latin typeface="Georgia"/>
-              </a:rPr>
-              <a:t>A valid credential proves an organization asserted a role. It does not prove the request is legitimate.</a:t>
-            </a:r>
-          </a:p>
-        </p:txBody>
-      </p:sp>
-      <p:sp>
-        <p:nvSpPr>
-          <p:cNvPr id="7" name="TextBox 6"/>
-          <p:cNvSpPr txBox="1"/>
-          <p:nvPr/>
-        </p:nvSpPr>
-        <p:spPr>
-          <a:xfrm>
-            <a:off x="10225735" y="5980176"/>
-            <a:ext cx="1097280" cy="274320"/>
-          </a:xfrm>
-          <a:prstGeom prst="rect">
-            <a:avLst/>
-          </a:prstGeom>
-          <a:noFill/>
-        </p:spPr>
-        <p:txBody>
-          <a:bodyPr wrap="square" anchor="t" lIns="0" rIns="0" tIns="0" bIns="0">
-            <a:spAutoFit/>
-          </a:bodyPr>
-          <a:lstStyle/>
-          <a:p>
-            <a:pPr algn="r"/>
-            <a:r>
-              <a:rPr sz="1000" b="0" i="0" spc="80">
-                <a:solidFill>
-                  <a:srgbClr val="6E6658"/>
-                </a:solidFill>
                 <a:latin typeface="Segoe UI"/>
               </a:rPr>
-              <a:t>17 / 19</a:t>
+              <a:t>17 / 20</a:t>
             </a:r>
           </a:p>
         </p:txBody>
@@ -7986,7 +8922,7 @@
                 </a:solidFill>
                 <a:latin typeface="Segoe UI"/>
               </a:rPr>
-              <a:t>THE ASK</a:t>
+              <a:t>STATED, NOT WAITED FOR</a:t>
             </a:r>
           </a:p>
         </p:txBody>
@@ -8021,7 +8957,7 @@
                 </a:solidFill>
                 <a:latin typeface="Georgia"/>
               </a:rPr>
-              <a:t>Three requests</a:t>
+              <a:t>Limits</a:t>
             </a:r>
           </a:p>
         </p:txBody>
@@ -8094,76 +9030,113 @@
           <a:p>
             <a:pPr algn="l">
               <a:spcAft>
-                <a:spcPts val="2600"/>
+                <a:spcPts val="900"/>
               </a:spcAft>
             </a:pPr>
             <a:r>
-              <a:rPr sz="2000" b="1" i="0">
-                <a:solidFill>
-                  <a:srgbClr val="2E5D89"/>
+              <a:rPr sz="1800" b="0" i="0">
+                <a:solidFill>
+                  <a:srgbClr val="1E1B16"/>
                 </a:solidFill>
                 <a:latin typeface="Segoe UI"/>
               </a:rPr>
-              <a:t>Government  </a:t>
-            </a:r>
-            <a:r>
-              <a:rPr sz="2000" b="0" i="0">
-                <a:solidFill>
-                  <a:srgbClr val="1E1B16"/>
-                </a:solidFill>
-                <a:latin typeface="Segoe UI"/>
-              </a:rPr>
-              <a:t>one small pilot: one filing or lookup procedure, stages 0 to 3, no change to the department's systems</a:t>
+              <a:t>Verifiable is not the same as trustworthy</a:t>
             </a:r>
           </a:p>
           <a:p>
             <a:pPr>
               <a:spcAft>
-                <a:spcPts val="2600"/>
+                <a:spcPts val="900"/>
               </a:spcAft>
             </a:pPr>
             <a:r>
-              <a:rPr sz="2000" b="1" i="0">
-                <a:solidFill>
-                  <a:srgbClr val="2E5D89"/>
+              <a:rPr sz="1800" b="0" i="0">
+                <a:solidFill>
+                  <a:srgbClr val="1E1B16"/>
                 </a:solidFill>
                 <a:latin typeface="Segoe UI"/>
               </a:rPr>
-              <a:t>GLEIF  </a:t>
-            </a:r>
-            <a:r>
-              <a:rPr sz="2000" b="0" i="0">
-                <a:solidFill>
-                  <a:srgbClr val="1E1B16"/>
-                </a:solidFill>
-                <a:latin typeface="Segoe UI"/>
-              </a:rPr>
-              <a:t>an ECR role vocabulary for agent contexts · confirmation of the delegation model against the EGF · test credentials</a:t>
+              <a:t>LEIs are not issued to private individuals</a:t>
             </a:r>
           </a:p>
           <a:p>
             <a:pPr>
               <a:spcAft>
-                <a:spcPts val="2600"/>
+                <a:spcPts val="900"/>
               </a:spcAft>
             </a:pPr>
             <a:r>
-              <a:rPr sz="2000" b="1" i="0">
-                <a:solidFill>
-                  <a:srgbClr val="2E5D89"/>
+              <a:rPr sz="1800" b="0" i="0">
+                <a:solidFill>
+                  <a:srgbClr val="1E1B16"/>
                 </a:solidFill>
                 <a:latin typeface="Segoe UI"/>
               </a:rPr>
-              <a:t>AAIF  </a:t>
-            </a:r>
-            <a:r>
-              <a:rPr sz="2000" b="0" i="0">
+              <a:t>There is a cost, and QVI coverage is still expanding</a:t>
+            </a:r>
+          </a:p>
+          <a:p>
+            <a:pPr>
+              <a:spcAft>
+                <a:spcPts val="900"/>
+              </a:spcAft>
+            </a:pPr>
+            <a:r>
+              <a:rPr sz="1800" b="0" i="0">
                 <a:solidFill>
                   <a:srgbClr val="1E1B16"/>
                 </a:solidFill>
                 <a:latin typeface="Segoe UI"/>
               </a:rPr>
-              <a:t>take this to the Security Interest Group and the ext-auth discussion</a:t>
+              <a:t>Our demo root is self-configured</a:t>
+            </a:r>
+          </a:p>
+          <a:p>
+            <a:pPr>
+              <a:spcAft>
+                <a:spcPts val="900"/>
+              </a:spcAft>
+            </a:pPr>
+            <a:r>
+              <a:rPr sz="1800" b="0" i="0">
+                <a:solidFill>
+                  <a:srgbClr val="1E1B16"/>
+                </a:solidFill>
+                <a:latin typeface="Segoe UI"/>
+              </a:rPr>
+              <a:t>One witness is asked — conflicting key logs are not yet detected</a:t>
+            </a:r>
+          </a:p>
+          <a:p>
+            <a:pPr>
+              <a:spcAft>
+                <a:spcPts val="900"/>
+              </a:spcAft>
+            </a:pPr>
+            <a:r>
+              <a:rPr sz="1800" b="0" i="0">
+                <a:solidFill>
+                  <a:srgbClr val="1E1B16"/>
+                </a:solidFill>
+                <a:latin typeface="Segoe UI"/>
+              </a:rPr>
+              <a:t>Revoking one agent's delegation is not implemented; revoking the credential is</a:t>
+            </a:r>
+          </a:p>
+          <a:p>
+            <a:pPr>
+              <a:spcAft>
+                <a:spcPts val="900"/>
+              </a:spcAft>
+            </a:pPr>
+            <a:r>
+              <a:rPr sz="1800" b="0" i="0">
+                <a:solidFill>
+                  <a:srgbClr val="1E1B16"/>
+                </a:solidFill>
+                <a:latin typeface="Segoe UI"/>
+              </a:rPr>
+              <a:t>Agent delegation conventions are not yet settled</a:t>
             </a:r>
           </a:p>
         </p:txBody>
@@ -8198,7 +9171,7 @@
                 </a:solidFill>
                 <a:latin typeface="Georgia"/>
               </a:rPr>
-              <a:t>We chose a reading of the existing mechanisms, and would rather be corrected now than at deployment.</a:t>
+              <a:t>A valid credential proves an organization asserted a role. It does not prove the request is legitimate.</a:t>
             </a:r>
           </a:p>
         </p:txBody>
@@ -8233,7 +9206,7 @@
                 </a:solidFill>
                 <a:latin typeface="Segoe UI"/>
               </a:rPr>
-              <a:t>18 / 19</a:t>
+              <a:t>18 / 20</a:t>
             </a:r>
           </a:p>
         </p:txBody>
@@ -8294,7 +9267,7 @@
                 </a:solidFill>
                 <a:latin typeface="Segoe UI"/>
               </a:rPr>
-              <a:t>ONE REPOSITORY, APACHE 2.0</a:t>
+              <a:t>THE ASK</a:t>
             </a:r>
           </a:p>
         </p:txBody>
@@ -8329,7 +9302,7 @@
                 </a:solidFill>
                 <a:latin typeface="Georgia"/>
               </a:rPr>
-              <a:t>Artifacts</a:t>
+              <a:t>Three requests</a:t>
             </a:r>
           </a:p>
         </p:txBody>
@@ -8380,58 +9353,14 @@
       </p:sp>
       <p:sp>
         <p:nvSpPr>
-          <p:cNvPr id="5" name="Rectangle 4"/>
-          <p:cNvSpPr/>
-          <p:nvPr/>
-        </p:nvSpPr>
-        <p:spPr>
-          <a:xfrm>
-            <a:off x="868680" y="2516632"/>
-            <a:ext cx="10454335" cy="2739136"/>
-          </a:xfrm>
-          <a:prstGeom prst="rect">
-            <a:avLst/>
-          </a:prstGeom>
-          <a:solidFill>
-            <a:srgbClr val="EFEBE1"/>
-          </a:solidFill>
-          <a:ln>
-            <a:noFill/>
-          </a:ln>
-          <a:effectLst/>
-        </p:spPr>
-        <p:style>
-          <a:lnRef idx="1">
-            <a:schemeClr val="accent1"/>
-          </a:lnRef>
-          <a:fillRef idx="3">
-            <a:schemeClr val="accent1"/>
-          </a:fillRef>
-          <a:effectRef idx="2">
-            <a:schemeClr val="accent1"/>
-          </a:effectRef>
-          <a:fontRef idx="minor">
-            <a:schemeClr val="lt1"/>
-          </a:fontRef>
-        </p:style>
-        <p:txBody>
-          <a:bodyPr rtlCol="0" anchor="ctr"/>
-          <a:lstStyle/>
-          <a:p>
-            <a:pPr algn="ctr"/>
-          </a:p>
-        </p:txBody>
-      </p:sp>
-      <p:sp>
-        <p:nvSpPr>
-          <p:cNvPr id="6" name="TextBox 5"/>
+          <p:cNvPr id="5" name="TextBox 4"/>
           <p:cNvSpPr txBox="1"/>
           <p:nvPr/>
         </p:nvSpPr>
         <p:spPr>
           <a:xfrm>
-            <a:off x="1161288" y="2809240"/>
-            <a:ext cx="9869119" cy="2153920"/>
+            <a:off x="868680" y="1975104"/>
+            <a:ext cx="10454335" cy="3822192"/>
           </a:xfrm>
           <a:prstGeom prst="rect">
             <a:avLst/>
@@ -8439,143 +9368,90 @@
           <a:noFill/>
         </p:spPr>
         <p:txBody>
-          <a:bodyPr wrap="square" anchor="t" lIns="0" rIns="0" tIns="0" bIns="0">
+          <a:bodyPr wrap="square" anchor="ctr" lIns="0" rIns="0" tIns="0" bIns="0">
             <a:spAutoFit/>
           </a:bodyPr>
           <a:lstStyle/>
           <a:p>
             <a:pPr algn="l">
               <a:spcAft>
-                <a:spcPts val="300"/>
+                <a:spcPts val="2600"/>
               </a:spcAft>
             </a:pPr>
             <a:r>
-              <a:rPr sz="1400" b="0" i="0">
+              <a:rPr sz="2000" b="1" i="0">
+                <a:solidFill>
+                  <a:srgbClr val="2E5D89"/>
+                </a:solidFill>
+                <a:latin typeface="Segoe UI"/>
+              </a:rPr>
+              <a:t>Government  </a:t>
+            </a:r>
+            <a:r>
+              <a:rPr sz="2000" b="0" i="0">
                 <a:solidFill>
                   <a:srgbClr val="1E1B16"/>
                 </a:solidFill>
-                <a:latin typeface="Consolas"/>
-              </a:rPr>
-              <a:t>spec/       specification v0.2, type definitions, wire examples, error shapes</a:t>
+                <a:latin typeface="Segoe UI"/>
+              </a:rPr>
+              <a:t>one small pilot: one filing or lookup procedure, stages 0 to 3, no change to the department's systems</a:t>
             </a:r>
           </a:p>
           <a:p>
             <a:pPr>
               <a:spcAft>
-                <a:spcPts val="300"/>
+                <a:spcPts val="2600"/>
               </a:spcAft>
             </a:pPr>
             <a:r>
-              <a:rPr sz="1400" b="0" i="0">
+              <a:rPr sz="2000" b="1" i="0">
+                <a:solidFill>
+                  <a:srgbClr val="2E5D89"/>
+                </a:solidFill>
+                <a:latin typeface="Segoe UI"/>
+              </a:rPr>
+              <a:t>GLEIF  </a:t>
+            </a:r>
+            <a:r>
+              <a:rPr sz="2000" b="0" i="0">
                 <a:solidFill>
                   <a:srgbClr val="1E1B16"/>
                 </a:solidFill>
-                <a:latin typeface="Consolas"/>
-              </a:rPr>
-              <a:t>packages/   mcp-vlei — extension, client, chain verification, 77 tests</a:t>
+                <a:latin typeface="Segoe UI"/>
+              </a:rPr>
+              <a:t>an ECR role vocabulary for agent contexts · confirmation of the delegation model against the EGF · test credentials</a:t>
             </a:r>
           </a:p>
           <a:p>
             <a:pPr>
               <a:spcAft>
-                <a:spcPts val="300"/>
+                <a:spcPts val="2600"/>
               </a:spcAft>
             </a:pPr>
             <a:r>
-              <a:rPr sz="1400" b="0" i="0">
+              <a:rPr sz="2000" b="1" i="0">
+                <a:solidFill>
+                  <a:srgbClr val="2E5D89"/>
+                </a:solidFill>
+                <a:latin typeface="Segoe UI"/>
+              </a:rPr>
+              <a:t>AAIF  </a:t>
+            </a:r>
+            <a:r>
+              <a:rPr sz="2000" b="0" i="0">
                 <a:solidFill>
                   <a:srgbClr val="1E1B16"/>
                 </a:solidFill>
-                <a:latin typeface="Consolas"/>
-              </a:rPr>
-              <a:t>skills/     implementing-vlei (build time) · vlei-identity (runtime)</a:t>
-            </a:r>
-          </a:p>
-          <a:p>
-            <a:pPr>
-              <a:spcAft>
-                <a:spcPts val="300"/>
-              </a:spcAft>
-            </a:pPr>
-            <a:r>
-              <a:rPr sz="1400" b="0" i="0">
-                <a:solidFill>
-                  <a:srgbClr val="1E1B16"/>
-                </a:solidFill>
-                <a:latin typeface="Consolas"/>
-              </a:rPr>
-              <a:t>examples/   impersonation · console · association server · agent · regulator</a:t>
-            </a:r>
-          </a:p>
-          <a:p>
-            <a:pPr>
-              <a:spcAft>
-                <a:spcPts val="300"/>
-              </a:spcAft>
-            </a:pPr>
-            <a:r>
-              <a:rPr sz="1400" b="0" i="0">
-                <a:solidFill>
-                  <a:srgbClr val="1E1B16"/>
-                </a:solidFill>
-                <a:latin typeface="Consolas"/>
-              </a:rPr>
-              <a:t>deploy/     gateway configuration — zero-code-change adoption</a:t>
-            </a:r>
-          </a:p>
-          <a:p>
-            <a:pPr>
-              <a:spcAft>
-                <a:spcPts val="300"/>
-              </a:spcAft>
-            </a:pPr>
-            <a:r>
-              <a:rPr sz="1400" b="0" i="0">
-                <a:solidFill>
-                  <a:srgbClr val="1E1B16"/>
-                </a:solidFill>
-                <a:latin typeface="Consolas"/>
-              </a:rPr>
-              <a:t>docs/       problem · government adoption · conformance · the upstream defect</a:t>
-            </a:r>
-          </a:p>
-          <a:p>
-            <a:pPr>
-              <a:spcAft>
-                <a:spcPts val="300"/>
-              </a:spcAft>
-            </a:pPr>
-            <a:r>
-              <a:rPr sz="1400" b="0" i="0">
-                <a:solidFill>
-                  <a:srgbClr val="1E1B16"/>
-                </a:solidFill>
-                <a:latin typeface="Consolas"/>
-              </a:rPr>
-              <a:t/>
-            </a:r>
-          </a:p>
-          <a:p>
-            <a:pPr>
-              <a:spcAft>
-                <a:spcPts val="300"/>
-              </a:spcAft>
-            </a:pPr>
-            <a:r>
-              <a:rPr sz="1400" b="0" i="0">
-                <a:solidFill>
-                  <a:srgbClr val="1E1B16"/>
-                </a:solidFill>
-                <a:latin typeface="Consolas"/>
-              </a:rPr>
-              <a:t>github.com/zuemen/mcp-vlei</a:t>
-            </a:r>
-          </a:p>
-        </p:txBody>
-      </p:sp>
-      <p:sp>
-        <p:nvSpPr>
-          <p:cNvPr id="7" name="TextBox 6"/>
+                <a:latin typeface="Segoe UI"/>
+              </a:rPr>
+              <a:t>take this to the Security Interest Group and the ext-auth discussion</a:t>
+            </a:r>
+          </a:p>
+        </p:txBody>
+      </p:sp>
+      <p:sp>
+        <p:nvSpPr>
+          <p:cNvPr id="6" name="TextBox 5"/>
           <p:cNvSpPr txBox="1"/>
           <p:nvPr/>
         </p:nvSpPr>
@@ -8599,18 +9475,18 @@
             <a:r>
               <a:rPr sz="1300" b="0" i="1">
                 <a:solidFill>
-                  <a:srgbClr val="1E1B16"/>
+                  <a:srgbClr val="6E6658"/>
                 </a:solidFill>
                 <a:latin typeface="Georgia"/>
               </a:rPr>
-              <a:t>Real KERI, real ACDC, real revocation. The root of trust is self-configured; in production it would be GLEIF's.</a:t>
-            </a:r>
-          </a:p>
-        </p:txBody>
-      </p:sp>
-      <p:sp>
-        <p:nvSpPr>
-          <p:cNvPr id="8" name="TextBox 7"/>
+              <a:t>We chose a reading of the existing mechanisms, and would rather be corrected now than at deployment.</a:t>
+            </a:r>
+          </a:p>
+        </p:txBody>
+      </p:sp>
+      <p:sp>
+        <p:nvSpPr>
+          <p:cNvPr id="7" name="TextBox 6"/>
           <p:cNvSpPr txBox="1"/>
           <p:nvPr/>
         </p:nvSpPr>
@@ -8638,7 +9514,7 @@
                 </a:solidFill>
                 <a:latin typeface="Segoe UI"/>
               </a:rPr>
-              <a:t>19 / 19</a:t>
+              <a:t>19 / 20</a:t>
             </a:r>
           </a:p>
         </p:txBody>
@@ -8799,7 +9675,7 @@
           <a:graphicData uri="http://schemas.openxmlformats.org/drawingml/2006/table">
             <a:tbl>
               <a:tblPr firstRow="1" bandRow="1">
-                <a:tableStyleId>{5C22544A-7EE6-4342-B048-85BDC9FD1C3A}</a:tableStyleId>
+                <a:tableStyleId>{2D5ABB26-0587-4C30-8999-92F81FD0307C}</a:tableStyleId>
               </a:tblPr>
               <a:tblGrid>
                 <a:gridCol w="2299953"/>
@@ -8809,7 +9685,7 @@
               <a:tr h="420624">
                 <a:tc>
                   <a:txBody>
-                    <a:bodyPr/>
+                    <a:bodyPr wrap="square"/>
                     <a:lstStyle/>
                     <a:p>
                       <a:r>
@@ -8824,6 +9700,20 @@
                     </a:p>
                   </a:txBody>
                   <a:tcPr>
+                    <a:lnL w="0">
+                      <a:noFill/>
+                    </a:lnL>
+                    <a:lnR w="0">
+                      <a:noFill/>
+                    </a:lnR>
+                    <a:lnT w="0">
+                      <a:noFill/>
+                    </a:lnT>
+                    <a:lnB w="9525">
+                      <a:solidFill>
+                        <a:srgbClr val="DCD6C8"/>
+                      </a:solidFill>
+                    </a:lnB>
                     <a:solidFill>
                       <a:srgbClr val="F7F5EF"/>
                     </a:solidFill>
@@ -8831,7 +9721,7 @@
                 </a:tc>
                 <a:tc>
                   <a:txBody>
-                    <a:bodyPr/>
+                    <a:bodyPr wrap="square"/>
                     <a:lstStyle/>
                     <a:p>
                       <a:r>
@@ -8846,6 +9736,20 @@
                     </a:p>
                   </a:txBody>
                   <a:tcPr>
+                    <a:lnL w="0">
+                      <a:noFill/>
+                    </a:lnL>
+                    <a:lnR w="0">
+                      <a:noFill/>
+                    </a:lnR>
+                    <a:lnT w="0">
+                      <a:noFill/>
+                    </a:lnT>
+                    <a:lnB w="9525">
+                      <a:solidFill>
+                        <a:srgbClr val="DCD6C8"/>
+                      </a:solidFill>
+                    </a:lnB>
                     <a:solidFill>
                       <a:srgbClr val="F7F5EF"/>
                     </a:solidFill>
@@ -8853,7 +9757,7 @@
                 </a:tc>
                 <a:tc>
                   <a:txBody>
-                    <a:bodyPr/>
+                    <a:bodyPr wrap="square"/>
                     <a:lstStyle/>
                     <a:p>
                       <a:r>
@@ -8868,6 +9772,20 @@
                     </a:p>
                   </a:txBody>
                   <a:tcPr>
+                    <a:lnL w="0">
+                      <a:noFill/>
+                    </a:lnL>
+                    <a:lnR w="0">
+                      <a:noFill/>
+                    </a:lnR>
+                    <a:lnT w="0">
+                      <a:noFill/>
+                    </a:lnT>
+                    <a:lnB w="9525">
+                      <a:solidFill>
+                        <a:srgbClr val="DCD6C8"/>
+                      </a:solidFill>
+                    </a:lnB>
                     <a:solidFill>
                       <a:srgbClr val="F7F5EF"/>
                     </a:solidFill>
@@ -8892,6 +9810,20 @@
                     </a:p>
                   </a:txBody>
                   <a:tcPr anchor="ctr">
+                    <a:lnL w="0">
+                      <a:noFill/>
+                    </a:lnL>
+                    <a:lnR w="0">
+                      <a:noFill/>
+                    </a:lnR>
+                    <a:lnT w="0">
+                      <a:noFill/>
+                    </a:lnT>
+                    <a:lnB w="9525">
+                      <a:solidFill>
+                        <a:srgbClr val="DCD6C8"/>
+                      </a:solidFill>
+                    </a:lnB>
                     <a:solidFill>
                       <a:srgbClr val="F7F5EF"/>
                     </a:solidFill>
@@ -8914,6 +9846,20 @@
                     </a:p>
                   </a:txBody>
                   <a:tcPr anchor="ctr">
+                    <a:lnL w="0">
+                      <a:noFill/>
+                    </a:lnL>
+                    <a:lnR w="0">
+                      <a:noFill/>
+                    </a:lnR>
+                    <a:lnT w="0">
+                      <a:noFill/>
+                    </a:lnT>
+                    <a:lnB w="9525">
+                      <a:solidFill>
+                        <a:srgbClr val="DCD6C8"/>
+                      </a:solidFill>
+                    </a:lnB>
                     <a:solidFill>
                       <a:srgbClr val="F7F5EF"/>
                     </a:solidFill>
@@ -8936,6 +9882,20 @@
                     </a:p>
                   </a:txBody>
                   <a:tcPr anchor="ctr">
+                    <a:lnL w="0">
+                      <a:noFill/>
+                    </a:lnL>
+                    <a:lnR w="0">
+                      <a:noFill/>
+                    </a:lnR>
+                    <a:lnT w="0">
+                      <a:noFill/>
+                    </a:lnT>
+                    <a:lnB w="9525">
+                      <a:solidFill>
+                        <a:srgbClr val="DCD6C8"/>
+                      </a:solidFill>
+                    </a:lnB>
                     <a:solidFill>
                       <a:srgbClr val="F7F5EF"/>
                     </a:solidFill>
@@ -8960,6 +9920,20 @@
                     </a:p>
                   </a:txBody>
                   <a:tcPr anchor="ctr">
+                    <a:lnL w="0">
+                      <a:noFill/>
+                    </a:lnL>
+                    <a:lnR w="0">
+                      <a:noFill/>
+                    </a:lnR>
+                    <a:lnT w="0">
+                      <a:noFill/>
+                    </a:lnT>
+                    <a:lnB w="9525">
+                      <a:solidFill>
+                        <a:srgbClr val="DCD6C8"/>
+                      </a:solidFill>
+                    </a:lnB>
                     <a:solidFill>
                       <a:srgbClr val="F7F5EF"/>
                     </a:solidFill>
@@ -8982,6 +9956,20 @@
                     </a:p>
                   </a:txBody>
                   <a:tcPr anchor="ctr">
+                    <a:lnL w="0">
+                      <a:noFill/>
+                    </a:lnL>
+                    <a:lnR w="0">
+                      <a:noFill/>
+                    </a:lnR>
+                    <a:lnT w="0">
+                      <a:noFill/>
+                    </a:lnT>
+                    <a:lnB w="9525">
+                      <a:solidFill>
+                        <a:srgbClr val="DCD6C8"/>
+                      </a:solidFill>
+                    </a:lnB>
                     <a:solidFill>
                       <a:srgbClr val="F7F5EF"/>
                     </a:solidFill>
@@ -9004,6 +9992,20 @@
                     </a:p>
                   </a:txBody>
                   <a:tcPr anchor="ctr">
+                    <a:lnL w="0">
+                      <a:noFill/>
+                    </a:lnL>
+                    <a:lnR w="0">
+                      <a:noFill/>
+                    </a:lnR>
+                    <a:lnT w="0">
+                      <a:noFill/>
+                    </a:lnT>
+                    <a:lnB w="9525">
+                      <a:solidFill>
+                        <a:srgbClr val="DCD6C8"/>
+                      </a:solidFill>
+                    </a:lnB>
                     <a:solidFill>
                       <a:srgbClr val="F7F5EF"/>
                     </a:solidFill>
@@ -9028,6 +10030,20 @@
                     </a:p>
                   </a:txBody>
                   <a:tcPr anchor="ctr">
+                    <a:lnL w="0">
+                      <a:noFill/>
+                    </a:lnL>
+                    <a:lnR w="0">
+                      <a:noFill/>
+                    </a:lnR>
+                    <a:lnT w="0">
+                      <a:noFill/>
+                    </a:lnT>
+                    <a:lnB w="9525">
+                      <a:solidFill>
+                        <a:srgbClr val="DCD6C8"/>
+                      </a:solidFill>
+                    </a:lnB>
                     <a:solidFill>
                       <a:srgbClr val="F7F5EF"/>
                     </a:solidFill>
@@ -9050,6 +10066,20 @@
                     </a:p>
                   </a:txBody>
                   <a:tcPr anchor="ctr">
+                    <a:lnL w="0">
+                      <a:noFill/>
+                    </a:lnL>
+                    <a:lnR w="0">
+                      <a:noFill/>
+                    </a:lnR>
+                    <a:lnT w="0">
+                      <a:noFill/>
+                    </a:lnT>
+                    <a:lnB w="9525">
+                      <a:solidFill>
+                        <a:srgbClr val="DCD6C8"/>
+                      </a:solidFill>
+                    </a:lnB>
                     <a:solidFill>
                       <a:srgbClr val="F7F5EF"/>
                     </a:solidFill>
@@ -9072,6 +10102,20 @@
                     </a:p>
                   </a:txBody>
                   <a:tcPr anchor="ctr">
+                    <a:lnL w="0">
+                      <a:noFill/>
+                    </a:lnL>
+                    <a:lnR w="0">
+                      <a:noFill/>
+                    </a:lnR>
+                    <a:lnT w="0">
+                      <a:noFill/>
+                    </a:lnT>
+                    <a:lnB w="9525">
+                      <a:solidFill>
+                        <a:srgbClr val="DCD6C8"/>
+                      </a:solidFill>
+                    </a:lnB>
                     <a:solidFill>
                       <a:srgbClr val="F7F5EF"/>
                     </a:solidFill>
@@ -9096,6 +10140,20 @@
                     </a:p>
                   </a:txBody>
                   <a:tcPr anchor="ctr">
+                    <a:lnL w="0">
+                      <a:noFill/>
+                    </a:lnL>
+                    <a:lnR w="0">
+                      <a:noFill/>
+                    </a:lnR>
+                    <a:lnT w="0">
+                      <a:noFill/>
+                    </a:lnT>
+                    <a:lnB w="9525">
+                      <a:solidFill>
+                        <a:srgbClr val="DCD6C8"/>
+                      </a:solidFill>
+                    </a:lnB>
                     <a:solidFill>
                       <a:srgbClr val="F7F5EF"/>
                     </a:solidFill>
@@ -9118,6 +10176,20 @@
                     </a:p>
                   </a:txBody>
                   <a:tcPr anchor="ctr">
+                    <a:lnL w="0">
+                      <a:noFill/>
+                    </a:lnL>
+                    <a:lnR w="0">
+                      <a:noFill/>
+                    </a:lnR>
+                    <a:lnT w="0">
+                      <a:noFill/>
+                    </a:lnT>
+                    <a:lnB w="9525">
+                      <a:solidFill>
+                        <a:srgbClr val="DCD6C8"/>
+                      </a:solidFill>
+                    </a:lnB>
                     <a:solidFill>
                       <a:srgbClr val="F7F5EF"/>
                     </a:solidFill>
@@ -9140,6 +10212,20 @@
                     </a:p>
                   </a:txBody>
                   <a:tcPr anchor="ctr">
+                    <a:lnL w="0">
+                      <a:noFill/>
+                    </a:lnL>
+                    <a:lnR w="0">
+                      <a:noFill/>
+                    </a:lnR>
+                    <a:lnT w="0">
+                      <a:noFill/>
+                    </a:lnT>
+                    <a:lnB w="9525">
+                      <a:solidFill>
+                        <a:srgbClr val="DCD6C8"/>
+                      </a:solidFill>
+                    </a:lnB>
                     <a:solidFill>
                       <a:srgbClr val="F7F5EF"/>
                     </a:solidFill>
@@ -9164,6 +10250,20 @@
                     </a:p>
                   </a:txBody>
                   <a:tcPr anchor="ctr">
+                    <a:lnL w="0">
+                      <a:noFill/>
+                    </a:lnL>
+                    <a:lnR w="0">
+                      <a:noFill/>
+                    </a:lnR>
+                    <a:lnT w="0">
+                      <a:noFill/>
+                    </a:lnT>
+                    <a:lnB w="9525">
+                      <a:solidFill>
+                        <a:srgbClr val="DCD6C8"/>
+                      </a:solidFill>
+                    </a:lnB>
                     <a:solidFill>
                       <a:srgbClr val="F7F5EF"/>
                     </a:solidFill>
@@ -9186,6 +10286,20 @@
                     </a:p>
                   </a:txBody>
                   <a:tcPr anchor="ctr">
+                    <a:lnL w="0">
+                      <a:noFill/>
+                    </a:lnL>
+                    <a:lnR w="0">
+                      <a:noFill/>
+                    </a:lnR>
+                    <a:lnT w="0">
+                      <a:noFill/>
+                    </a:lnT>
+                    <a:lnB w="9525">
+                      <a:solidFill>
+                        <a:srgbClr val="DCD6C8"/>
+                      </a:solidFill>
+                    </a:lnB>
                     <a:solidFill>
                       <a:srgbClr val="F7F5EF"/>
                     </a:solidFill>
@@ -9208,6 +10322,20 @@
                     </a:p>
                   </a:txBody>
                   <a:tcPr anchor="ctr">
+                    <a:lnL w="0">
+                      <a:noFill/>
+                    </a:lnL>
+                    <a:lnR w="0">
+                      <a:noFill/>
+                    </a:lnR>
+                    <a:lnT w="0">
+                      <a:noFill/>
+                    </a:lnT>
+                    <a:lnB w="9525">
+                      <a:solidFill>
+                        <a:srgbClr val="DCD6C8"/>
+                      </a:solidFill>
+                    </a:lnB>
                     <a:solidFill>
                       <a:srgbClr val="F7F5EF"/>
                     </a:solidFill>
@@ -9283,7 +10411,439 @@
                 </a:solidFill>
                 <a:latin typeface="Segoe UI"/>
               </a:rPr>
-              <a:t>2 / 19</a:t>
+              <a:t>2 / 20</a:t>
+            </a:r>
+          </a:p>
+        </p:txBody>
+      </p:sp>
+    </p:spTree>
+  </p:cSld>
+  <p:clrMapOvr>
+    <a:masterClrMapping/>
+  </p:clrMapOvr>
+</p:sld>
+</file>
+
+<file path=ppt/slides/slide20.xml><?xml version="1.0" encoding="utf-8"?>
+<p:sld xmlns:a="http://schemas.openxmlformats.org/drawingml/2006/main" xmlns:p="http://schemas.openxmlformats.org/presentationml/2006/main" xmlns:r="http://schemas.openxmlformats.org/officeDocument/2006/relationships">
+  <p:cSld>
+    <p:bg>
+      <p:bgPr>
+        <a:solidFill>
+          <a:srgbClr val="F7F5EF"/>
+        </a:solidFill>
+        <a:effectLst/>
+      </p:bgPr>
+    </p:bg>
+    <p:spTree>
+      <p:nvGrpSpPr>
+        <p:cNvPr id="1" name=""/>
+        <p:cNvGrpSpPr/>
+        <p:nvPr/>
+      </p:nvGrpSpPr>
+      <p:grpSpPr/>
+      <p:sp>
+        <p:nvSpPr>
+          <p:cNvPr id="2" name="TextBox 1"/>
+          <p:cNvSpPr txBox="1"/>
+          <p:nvPr/>
+        </p:nvSpPr>
+        <p:spPr>
+          <a:xfrm>
+            <a:off x="868680" y="566928"/>
+            <a:ext cx="10454335" cy="274320"/>
+          </a:xfrm>
+          <a:prstGeom prst="rect">
+            <a:avLst/>
+          </a:prstGeom>
+          <a:noFill/>
+        </p:spPr>
+        <p:txBody>
+          <a:bodyPr wrap="square" anchor="t" lIns="0" rIns="0" tIns="0" bIns="0">
+            <a:spAutoFit/>
+          </a:bodyPr>
+          <a:lstStyle/>
+          <a:p>
+            <a:pPr algn="l"/>
+            <a:r>
+              <a:rPr sz="1100" b="1" i="0" spc="160">
+                <a:solidFill>
+                  <a:srgbClr val="2E5D89"/>
+                </a:solidFill>
+                <a:latin typeface="Segoe UI"/>
+              </a:rPr>
+              <a:t>ONE REPOSITORY, APACHE 2.0</a:t>
+            </a:r>
+          </a:p>
+        </p:txBody>
+      </p:sp>
+      <p:sp>
+        <p:nvSpPr>
+          <p:cNvPr id="3" name="TextBox 2"/>
+          <p:cNvSpPr txBox="1"/>
+          <p:nvPr/>
+        </p:nvSpPr>
+        <p:spPr>
+          <a:xfrm>
+            <a:off x="868680" y="914400"/>
+            <a:ext cx="10454335" cy="822960"/>
+          </a:xfrm>
+          <a:prstGeom prst="rect">
+            <a:avLst/>
+          </a:prstGeom>
+          <a:noFill/>
+        </p:spPr>
+        <p:txBody>
+          <a:bodyPr wrap="square" anchor="t" lIns="0" rIns="0" tIns="0" bIns="0">
+            <a:spAutoFit/>
+          </a:bodyPr>
+          <a:lstStyle/>
+          <a:p>
+            <a:pPr algn="l"/>
+            <a:r>
+              <a:rPr sz="3200" b="0" i="0">
+                <a:solidFill>
+                  <a:srgbClr val="1E1B16"/>
+                </a:solidFill>
+                <a:latin typeface="Georgia"/>
+              </a:rPr>
+              <a:t>Artifacts</a:t>
+            </a:r>
+          </a:p>
+        </p:txBody>
+      </p:sp>
+      <p:sp>
+        <p:nvSpPr>
+          <p:cNvPr id="4" name="Rectangle 3"/>
+          <p:cNvSpPr/>
+          <p:nvPr/>
+        </p:nvSpPr>
+        <p:spPr>
+          <a:xfrm>
+            <a:off x="868680" y="1700784"/>
+            <a:ext cx="10454335" cy="9525"/>
+          </a:xfrm>
+          <a:prstGeom prst="rect">
+            <a:avLst/>
+          </a:prstGeom>
+          <a:solidFill>
+            <a:srgbClr val="DCD6C8"/>
+          </a:solidFill>
+          <a:ln>
+            <a:noFill/>
+          </a:ln>
+          <a:effectLst/>
+        </p:spPr>
+        <p:style>
+          <a:lnRef idx="1">
+            <a:schemeClr val="accent1"/>
+          </a:lnRef>
+          <a:fillRef idx="3">
+            <a:schemeClr val="accent1"/>
+          </a:fillRef>
+          <a:effectRef idx="2">
+            <a:schemeClr val="accent1"/>
+          </a:effectRef>
+          <a:fontRef idx="minor">
+            <a:schemeClr val="lt1"/>
+          </a:fontRef>
+        </p:style>
+        <p:txBody>
+          <a:bodyPr rtlCol="0" anchor="ctr"/>
+          <a:lstStyle/>
+          <a:p>
+            <a:pPr algn="ctr"/>
+          </a:p>
+        </p:txBody>
+      </p:sp>
+      <p:sp>
+        <p:nvSpPr>
+          <p:cNvPr id="5" name="Rectangle 4"/>
+          <p:cNvSpPr/>
+          <p:nvPr/>
+        </p:nvSpPr>
+        <p:spPr>
+          <a:xfrm>
+            <a:off x="868680" y="2785872"/>
+            <a:ext cx="8534095" cy="2200656"/>
+          </a:xfrm>
+          <a:prstGeom prst="rect">
+            <a:avLst/>
+          </a:prstGeom>
+          <a:solidFill>
+            <a:srgbClr val="EFEBE1"/>
+          </a:solidFill>
+          <a:ln>
+            <a:noFill/>
+          </a:ln>
+          <a:effectLst/>
+        </p:spPr>
+        <p:style>
+          <a:lnRef idx="1">
+            <a:schemeClr val="accent1"/>
+          </a:lnRef>
+          <a:fillRef idx="3">
+            <a:schemeClr val="accent1"/>
+          </a:fillRef>
+          <a:effectRef idx="2">
+            <a:schemeClr val="accent1"/>
+          </a:effectRef>
+          <a:fontRef idx="minor">
+            <a:schemeClr val="lt1"/>
+          </a:fontRef>
+        </p:style>
+        <p:txBody>
+          <a:bodyPr rtlCol="0" anchor="ctr"/>
+          <a:lstStyle/>
+          <a:p>
+            <a:pPr algn="ctr"/>
+          </a:p>
+        </p:txBody>
+      </p:sp>
+      <p:sp>
+        <p:nvSpPr>
+          <p:cNvPr id="6" name="TextBox 5"/>
+          <p:cNvSpPr txBox="1"/>
+          <p:nvPr/>
+        </p:nvSpPr>
+        <p:spPr>
+          <a:xfrm>
+            <a:off x="1161288" y="3078480"/>
+            <a:ext cx="7948879" cy="1615440"/>
+          </a:xfrm>
+          <a:prstGeom prst="rect">
+            <a:avLst/>
+          </a:prstGeom>
+          <a:noFill/>
+        </p:spPr>
+        <p:txBody>
+          <a:bodyPr wrap="square" anchor="t" lIns="0" rIns="0" tIns="0" bIns="0">
+            <a:spAutoFit/>
+          </a:bodyPr>
+          <a:lstStyle/>
+          <a:p>
+            <a:pPr algn="l">
+              <a:spcAft>
+                <a:spcPts val="300"/>
+              </a:spcAft>
+            </a:pPr>
+            <a:r>
+              <a:rPr sz="1400" b="0" i="0">
+                <a:solidFill>
+                  <a:srgbClr val="1E1B16"/>
+                </a:solidFill>
+                <a:latin typeface="Consolas"/>
+              </a:rPr>
+              <a:t>spec/      specification v0.2 · types · wire examples · errors</a:t>
+            </a:r>
+          </a:p>
+          <a:p>
+            <a:pPr>
+              <a:spcAft>
+                <a:spcPts val="300"/>
+              </a:spcAft>
+            </a:pPr>
+            <a:r>
+              <a:rPr sz="1400" b="0" i="0">
+                <a:solidFill>
+                  <a:srgbClr val="1E1B16"/>
+                </a:solidFill>
+                <a:latin typeface="Consolas"/>
+              </a:rPr>
+              <a:t>packages/  mcp-vlei — KEL + chain verification, 143 tests</a:t>
+            </a:r>
+          </a:p>
+          <a:p>
+            <a:pPr>
+              <a:spcAft>
+                <a:spcPts val="300"/>
+              </a:spcAft>
+            </a:pPr>
+            <a:r>
+              <a:rPr sz="1400" b="0" i="0">
+                <a:solidFill>
+                  <a:srgbClr val="1E1B16"/>
+                </a:solidFill>
+                <a:latin typeface="Consolas"/>
+              </a:rPr>
+              <a:t>skills/    implementing-vlei (build) · vlei-identity (runtime)</a:t>
+            </a:r>
+          </a:p>
+          <a:p>
+            <a:pPr>
+              <a:spcAft>
+                <a:spcPts val="300"/>
+              </a:spcAft>
+            </a:pPr>
+            <a:r>
+              <a:rPr sz="1400" b="0" i="0">
+                <a:solidFill>
+                  <a:srgbClr val="1E1B16"/>
+                </a:solidFill>
+                <a:latin typeface="Consolas"/>
+              </a:rPr>
+              <a:t>examples/  console · impersonation · regulator · skill-server</a:t>
+            </a:r>
+          </a:p>
+          <a:p>
+            <a:pPr>
+              <a:spcAft>
+                <a:spcPts val="300"/>
+              </a:spcAft>
+            </a:pPr>
+            <a:r>
+              <a:rPr sz="1400" b="0" i="0">
+                <a:solidFill>
+                  <a:srgbClr val="1E1B16"/>
+                </a:solidFill>
+                <a:latin typeface="Consolas"/>
+              </a:rPr>
+              <a:t>deploy/    gateway configuration — zero-code-change adoption</a:t>
+            </a:r>
+          </a:p>
+          <a:p>
+            <a:pPr>
+              <a:spcAft>
+                <a:spcPts val="300"/>
+              </a:spcAft>
+            </a:pPr>
+            <a:r>
+              <a:rPr sz="1400" b="0" i="0">
+                <a:solidFill>
+                  <a:srgbClr val="1E1B16"/>
+                </a:solidFill>
+                <a:latin typeface="Consolas"/>
+              </a:rPr>
+              <a:t>docs/      problem · adoption · conformance · upstream defect</a:t>
+            </a:r>
+          </a:p>
+        </p:txBody>
+      </p:sp>
+      <p:pic>
+        <p:nvPicPr>
+          <p:cNvPr id="7" name="Picture 6" descr="image.png"/>
+          <p:cNvPicPr>
+            <a:picLocks noChangeAspect="1"/>
+          </p:cNvPicPr>
+          <p:nvPr/>
+        </p:nvPicPr>
+        <p:blipFill>
+          <a:blip r:embed="rId3"/>
+          <a:stretch>
+            <a:fillRect/>
+          </a:stretch>
+        </p:blipFill>
+        <p:spPr>
+          <a:xfrm>
+            <a:off x="9859975" y="2907792"/>
+            <a:ext cx="1463040" cy="1463040"/>
+          </a:xfrm>
+          <a:prstGeom prst="rect">
+            <a:avLst/>
+          </a:prstGeom>
+        </p:spPr>
+      </p:pic>
+      <p:sp>
+        <p:nvSpPr>
+          <p:cNvPr id="8" name="TextBox 7"/>
+          <p:cNvSpPr txBox="1"/>
+          <p:nvPr/>
+        </p:nvSpPr>
+        <p:spPr>
+          <a:xfrm>
+            <a:off x="9494215" y="4626864"/>
+            <a:ext cx="2194560" cy="237744"/>
+          </a:xfrm>
+          <a:prstGeom prst="rect">
+            <a:avLst/>
+          </a:prstGeom>
+          <a:noFill/>
+        </p:spPr>
+        <p:txBody>
+          <a:bodyPr wrap="square" anchor="t" lIns="0" rIns="0" tIns="0" bIns="0">
+            <a:spAutoFit/>
+          </a:bodyPr>
+          <a:lstStyle/>
+          <a:p>
+            <a:pPr algn="ctr"/>
+            <a:r>
+              <a:rPr sz="950" b="0" i="0">
+                <a:solidFill>
+                  <a:srgbClr val="6E6658"/>
+                </a:solidFill>
+                <a:latin typeface="Consolas"/>
+              </a:rPr>
+              <a:t>github.com/zuemen/mcp-vlei</a:t>
+            </a:r>
+          </a:p>
+        </p:txBody>
+      </p:sp>
+      <p:sp>
+        <p:nvSpPr>
+          <p:cNvPr id="9" name="TextBox 8"/>
+          <p:cNvSpPr txBox="1"/>
+          <p:nvPr/>
+        </p:nvSpPr>
+        <p:spPr>
+          <a:xfrm>
+            <a:off x="868680" y="5943600"/>
+            <a:ext cx="9082735" cy="457200"/>
+          </a:xfrm>
+          <a:prstGeom prst="rect">
+            <a:avLst/>
+          </a:prstGeom>
+          <a:noFill/>
+        </p:spPr>
+        <p:txBody>
+          <a:bodyPr wrap="square" anchor="t" lIns="0" rIns="0" tIns="0" bIns="0">
+            <a:spAutoFit/>
+          </a:bodyPr>
+          <a:lstStyle/>
+          <a:p>
+            <a:pPr algn="l"/>
+            <a:r>
+              <a:rPr sz="1300" b="0" i="1">
+                <a:solidFill>
+                  <a:srgbClr val="1E1B16"/>
+                </a:solidFill>
+                <a:latin typeface="Georgia"/>
+              </a:rPr>
+              <a:t>Real KERI, real ACDC, real revocation. The root of trust is self-configured; in production it would be GLEIF's.</a:t>
+            </a:r>
+          </a:p>
+        </p:txBody>
+      </p:sp>
+      <p:sp>
+        <p:nvSpPr>
+          <p:cNvPr id="10" name="TextBox 9"/>
+          <p:cNvSpPr txBox="1"/>
+          <p:nvPr/>
+        </p:nvSpPr>
+        <p:spPr>
+          <a:xfrm>
+            <a:off x="10225735" y="5980176"/>
+            <a:ext cx="1097280" cy="274320"/>
+          </a:xfrm>
+          <a:prstGeom prst="rect">
+            <a:avLst/>
+          </a:prstGeom>
+          <a:noFill/>
+        </p:spPr>
+        <p:txBody>
+          <a:bodyPr wrap="square" anchor="t" lIns="0" rIns="0" tIns="0" bIns="0">
+            <a:spAutoFit/>
+          </a:bodyPr>
+          <a:lstStyle/>
+          <a:p>
+            <a:pPr algn="r"/>
+            <a:r>
+              <a:rPr sz="1000" b="0" i="0" spc="80">
+                <a:solidFill>
+                  <a:srgbClr val="6E6658"/>
+                </a:solidFill>
+                <a:latin typeface="Segoe UI"/>
+              </a:rPr>
+              <a:t>20 / 20</a:t>
             </a:r>
           </a:p>
         </p:txBody>
@@ -9438,23 +10998,23 @@
         </p:nvGraphicFramePr>
         <p:xfrm>
           <a:off x="868680" y="3044952"/>
-          <a:ext cx="10454333" cy="1682496"/>
+          <a:ext cx="6248093" cy="1682496"/>
         </p:xfrm>
         <a:graphic>
           <a:graphicData uri="http://schemas.openxmlformats.org/drawingml/2006/table">
             <a:tbl>
               <a:tblPr firstRow="1" bandRow="1">
-                <a:tableStyleId>{5C22544A-7EE6-4342-B048-85BDC9FD1C3A}</a:tableStyleId>
+                <a:tableStyleId>{2D5ABB26-0587-4C30-8999-92F81FD0307C}</a:tableStyleId>
               </a:tblPr>
               <a:tblGrid>
-                <a:gridCol w="3136300"/>
-                <a:gridCol w="4390820"/>
-                <a:gridCol w="2927213"/>
+                <a:gridCol w="1874428"/>
+                <a:gridCol w="2624199"/>
+                <a:gridCol w="1749466"/>
               </a:tblGrid>
               <a:tr h="420624">
                 <a:tc>
                   <a:txBody>
-                    <a:bodyPr/>
+                    <a:bodyPr wrap="square"/>
                     <a:lstStyle/>
                     <a:p>
                       <a:r>
@@ -9469,6 +11029,20 @@
                     </a:p>
                   </a:txBody>
                   <a:tcPr>
+                    <a:lnL w="0">
+                      <a:noFill/>
+                    </a:lnL>
+                    <a:lnR w="0">
+                      <a:noFill/>
+                    </a:lnR>
+                    <a:lnT w="0">
+                      <a:noFill/>
+                    </a:lnT>
+                    <a:lnB w="9525">
+                      <a:solidFill>
+                        <a:srgbClr val="DCD6C8"/>
+                      </a:solidFill>
+                    </a:lnB>
                     <a:solidFill>
                       <a:srgbClr val="F7F5EF"/>
                     </a:solidFill>
@@ -9476,7 +11050,7 @@
                 </a:tc>
                 <a:tc>
                   <a:txBody>
-                    <a:bodyPr/>
+                    <a:bodyPr wrap="square"/>
                     <a:lstStyle/>
                     <a:p>
                       <a:r>
@@ -9486,11 +11060,25 @@
                           </a:solidFill>
                           <a:latin typeface="Segoe UI"/>
                         </a:rPr>
-                        <a:t>CLIENTINFO.NAME</a:t>
+                        <a:t>NAME RECEIVED</a:t>
                       </a:r>
                     </a:p>
                   </a:txBody>
                   <a:tcPr>
+                    <a:lnL w="0">
+                      <a:noFill/>
+                    </a:lnL>
+                    <a:lnR w="0">
+                      <a:noFill/>
+                    </a:lnR>
+                    <a:lnT w="0">
+                      <a:noFill/>
+                    </a:lnT>
+                    <a:lnB w="9525">
+                      <a:solidFill>
+                        <a:srgbClr val="DCD6C8"/>
+                      </a:solidFill>
+                    </a:lnB>
                     <a:solidFill>
                       <a:srgbClr val="F7F5EF"/>
                     </a:solidFill>
@@ -9498,7 +11086,7 @@
                 </a:tc>
                 <a:tc>
                   <a:txBody>
-                    <a:bodyPr/>
+                    <a:bodyPr wrap="square"/>
                     <a:lstStyle/>
                     <a:p>
                       <a:r>
@@ -9513,6 +11101,20 @@
                     </a:p>
                   </a:txBody>
                   <a:tcPr>
+                    <a:lnL w="0">
+                      <a:noFill/>
+                    </a:lnL>
+                    <a:lnR w="0">
+                      <a:noFill/>
+                    </a:lnR>
+                    <a:lnT w="0">
+                      <a:noFill/>
+                    </a:lnT>
+                    <a:lnB w="9525">
+                      <a:solidFill>
+                        <a:srgbClr val="DCD6C8"/>
+                      </a:solidFill>
+                    </a:lnB>
                     <a:solidFill>
                       <a:srgbClr val="F7F5EF"/>
                     </a:solidFill>
@@ -9526,7 +11128,7 @@
                     <a:lstStyle/>
                     <a:p>
                       <a:r>
-                        <a:rPr sz="1700" b="0" i="0">
+                        <a:rPr sz="1500" b="0" i="0">
                           <a:solidFill>
                             <a:srgbClr val="1E1B16"/>
                           </a:solidFill>
@@ -9537,6 +11139,20 @@
                     </a:p>
                   </a:txBody>
                   <a:tcPr anchor="ctr">
+                    <a:lnL w="0">
+                      <a:noFill/>
+                    </a:lnL>
+                    <a:lnR w="0">
+                      <a:noFill/>
+                    </a:lnR>
+                    <a:lnT w="0">
+                      <a:noFill/>
+                    </a:lnT>
+                    <a:lnB w="9525">
+                      <a:solidFill>
+                        <a:srgbClr val="DCD6C8"/>
+                      </a:solidFill>
+                    </a:lnB>
                     <a:solidFill>
                       <a:srgbClr val="F7F5EF"/>
                     </a:solidFill>
@@ -9548,17 +11164,31 @@
                     <a:lstStyle/>
                     <a:p>
                       <a:r>
-                        <a:rPr sz="1700" b="0" i="0">
+                        <a:rPr sz="1500" b="0" i="0">
                           <a:solidFill>
                             <a:srgbClr val="1E1B16"/>
                           </a:solidFill>
                           <a:latin typeface="Consolas"/>
                         </a:rPr>
-                        <a:t>my-small-tool</a:t>
+                        <a:t>zuemen-script</a:t>
                       </a:r>
                     </a:p>
                   </a:txBody>
                   <a:tcPr anchor="ctr">
+                    <a:lnL w="0">
+                      <a:noFill/>
+                    </a:lnL>
+                    <a:lnR w="0">
+                      <a:noFill/>
+                    </a:lnR>
+                    <a:lnT w="0">
+                      <a:noFill/>
+                    </a:lnT>
+                    <a:lnB w="9525">
+                      <a:solidFill>
+                        <a:srgbClr val="DCD6C8"/>
+                      </a:solidFill>
+                    </a:lnB>
                     <a:solidFill>
                       <a:srgbClr val="F7F5EF"/>
                     </a:solidFill>
@@ -9570,7 +11200,7 @@
                     <a:lstStyle/>
                     <a:p>
                       <a:r>
-                        <a:rPr sz="1700" b="0" i="0">
+                        <a:rPr sz="1500" b="0" i="0">
                           <a:solidFill>
                             <a:srgbClr val="1E1B16"/>
                           </a:solidFill>
@@ -9581,6 +11211,20 @@
                     </a:p>
                   </a:txBody>
                   <a:tcPr anchor="ctr">
+                    <a:lnL w="0">
+                      <a:noFill/>
+                    </a:lnL>
+                    <a:lnR w="0">
+                      <a:noFill/>
+                    </a:lnR>
+                    <a:lnT w="0">
+                      <a:noFill/>
+                    </a:lnT>
+                    <a:lnB w="9525">
+                      <a:solidFill>
+                        <a:srgbClr val="DCD6C8"/>
+                      </a:solidFill>
+                    </a:lnB>
                     <a:solidFill>
                       <a:srgbClr val="F7F5EF"/>
                     </a:solidFill>
@@ -9594,7 +11238,7 @@
                     <a:lstStyle/>
                     <a:p>
                       <a:r>
-                        <a:rPr sz="1700" b="0" i="0">
+                        <a:rPr sz="1500" b="0" i="0">
                           <a:solidFill>
                             <a:srgbClr val="1E1B16"/>
                           </a:solidFill>
@@ -9605,6 +11249,20 @@
                     </a:p>
                   </a:txBody>
                   <a:tcPr anchor="ctr">
+                    <a:lnL w="0">
+                      <a:noFill/>
+                    </a:lnL>
+                    <a:lnR w="0">
+                      <a:noFill/>
+                    </a:lnR>
+                    <a:lnT w="0">
+                      <a:noFill/>
+                    </a:lnT>
+                    <a:lnB w="9525">
+                      <a:solidFill>
+                        <a:srgbClr val="DCD6C8"/>
+                      </a:solidFill>
+                    </a:lnB>
                     <a:solidFill>
                       <a:srgbClr val="F7F5EF"/>
                     </a:solidFill>
@@ -9616,7 +11274,7 @@
                     <a:lstStyle/>
                     <a:p>
                       <a:r>
-                        <a:rPr sz="1700" b="0" i="0">
+                        <a:rPr sz="1500" b="0" i="0">
                           <a:solidFill>
                             <a:srgbClr val="1E1B16"/>
                           </a:solidFill>
@@ -9627,6 +11285,20 @@
                     </a:p>
                   </a:txBody>
                   <a:tcPr anchor="ctr">
+                    <a:lnL w="0">
+                      <a:noFill/>
+                    </a:lnL>
+                    <a:lnR w="0">
+                      <a:noFill/>
+                    </a:lnR>
+                    <a:lnT w="0">
+                      <a:noFill/>
+                    </a:lnT>
+                    <a:lnB w="9525">
+                      <a:solidFill>
+                        <a:srgbClr val="DCD6C8"/>
+                      </a:solidFill>
+                    </a:lnB>
                     <a:solidFill>
                       <a:srgbClr val="F7F5EF"/>
                     </a:solidFill>
@@ -9638,7 +11310,7 @@
                     <a:lstStyle/>
                     <a:p>
                       <a:r>
-                        <a:rPr sz="1700" b="0" i="0">
+                        <a:rPr sz="1500" b="0" i="0">
                           <a:solidFill>
                             <a:srgbClr val="1E1B16"/>
                           </a:solidFill>
@@ -9649,6 +11321,20 @@
                     </a:p>
                   </a:txBody>
                   <a:tcPr anchor="ctr">
+                    <a:lnL w="0">
+                      <a:noFill/>
+                    </a:lnL>
+                    <a:lnR w="0">
+                      <a:noFill/>
+                    </a:lnR>
+                    <a:lnT w="0">
+                      <a:noFill/>
+                    </a:lnT>
+                    <a:lnB w="9525">
+                      <a:solidFill>
+                        <a:srgbClr val="DCD6C8"/>
+                      </a:solidFill>
+                    </a:lnB>
                     <a:solidFill>
                       <a:srgbClr val="F7F5EF"/>
                     </a:solidFill>
@@ -9662,7 +11348,7 @@
                     <a:lstStyle/>
                     <a:p>
                       <a:r>
-                        <a:rPr sz="1700" b="0" i="0">
+                        <a:rPr sz="1500" b="0" i="0">
                           <a:solidFill>
                             <a:srgbClr val="1E1B16"/>
                           </a:solidFill>
@@ -9673,6 +11359,20 @@
                     </a:p>
                   </a:txBody>
                   <a:tcPr anchor="ctr">
+                    <a:lnL w="0">
+                      <a:noFill/>
+                    </a:lnL>
+                    <a:lnR w="0">
+                      <a:noFill/>
+                    </a:lnR>
+                    <a:lnT w="0">
+                      <a:noFill/>
+                    </a:lnT>
+                    <a:lnB w="9525">
+                      <a:solidFill>
+                        <a:srgbClr val="DCD6C8"/>
+                      </a:solidFill>
+                    </a:lnB>
                     <a:solidFill>
                       <a:srgbClr val="F7F5EF"/>
                     </a:solidFill>
@@ -9684,17 +11384,31 @@
                     <a:lstStyle/>
                     <a:p>
                       <a:r>
-                        <a:rPr sz="1700" b="0" i="0">
+                        <a:rPr sz="1500" b="0" i="0">
                           <a:solidFill>
                             <a:srgbClr val="1E1B16"/>
                           </a:solidFill>
                           <a:latin typeface="Consolas"/>
                         </a:rPr>
-                        <a:t>(absent)</a:t>
+                        <a:t>mcp</a:t>
                       </a:r>
                     </a:p>
                   </a:txBody>
                   <a:tcPr anchor="ctr">
+                    <a:lnL w="0">
+                      <a:noFill/>
+                    </a:lnL>
+                    <a:lnR w="0">
+                      <a:noFill/>
+                    </a:lnR>
+                    <a:lnT w="0">
+                      <a:noFill/>
+                    </a:lnT>
+                    <a:lnB w="9525">
+                      <a:solidFill>
+                        <a:srgbClr val="DCD6C8"/>
+                      </a:solidFill>
+                    </a:lnB>
                     <a:solidFill>
                       <a:srgbClr val="F7F5EF"/>
                     </a:solidFill>
@@ -9706,7 +11420,7 @@
                     <a:lstStyle/>
                     <a:p>
                       <a:r>
-                        <a:rPr sz="1700" b="0" i="0">
+                        <a:rPr sz="1500" b="0" i="0">
                           <a:solidFill>
                             <a:srgbClr val="1E1B16"/>
                           </a:solidFill>
@@ -9717,6 +11431,20 @@
                     </a:p>
                   </a:txBody>
                   <a:tcPr anchor="ctr">
+                    <a:lnL w="0">
+                      <a:noFill/>
+                    </a:lnL>
+                    <a:lnR w="0">
+                      <a:noFill/>
+                    </a:lnR>
+                    <a:lnT w="0">
+                      <a:noFill/>
+                    </a:lnT>
+                    <a:lnB w="9525">
+                      <a:solidFill>
+                        <a:srgbClr val="DCD6C8"/>
+                      </a:solidFill>
+                    </a:lnB>
                     <a:solidFill>
                       <a:srgbClr val="F7F5EF"/>
                     </a:solidFill>
@@ -9727,16 +11455,45 @@
           </a:graphicData>
         </a:graphic>
       </p:graphicFrame>
-      <p:sp>
-        <p:nvSpPr>
-          <p:cNvPr id="6" name="TextBox 5"/>
+      <p:pic>
+        <p:nvPicPr>
+          <p:cNvPr id="6" name="Picture 5" descr="scene-0-verification.png"/>
+          <p:cNvPicPr>
+            <a:picLocks noChangeAspect="1"/>
+          </p:cNvPicPr>
+          <p:nvPr/>
+        </p:nvPicPr>
+        <p:blipFill>
+          <a:blip r:embed="rId3"/>
+          <a:stretch>
+            <a:fillRect/>
+          </a:stretch>
+        </p:blipFill>
+        <p:spPr>
+          <a:xfrm>
+            <a:off x="7646203" y="1975104"/>
+            <a:ext cx="3513144" cy="3474720"/>
+          </a:xfrm>
+          <a:prstGeom prst="rect">
+            <a:avLst/>
+          </a:prstGeom>
+          <a:ln w="9525">
+            <a:solidFill>
+              <a:srgbClr val="DCD6C8"/>
+            </a:solidFill>
+          </a:ln>
+        </p:spPr>
+      </p:pic>
+      <p:sp>
+        <p:nvSpPr>
+          <p:cNvPr id="7" name="TextBox 6"/>
           <p:cNvSpPr txBox="1"/>
           <p:nvPr/>
         </p:nvSpPr>
         <p:spPr>
           <a:xfrm>
-            <a:off x="868680" y="5943600"/>
-            <a:ext cx="9082735" cy="457200"/>
+            <a:off x="7646203" y="5541264"/>
+            <a:ext cx="3513144" cy="274320"/>
           </a:xfrm>
           <a:prstGeom prst="rect">
             <a:avLst/>
@@ -9751,27 +11508,27 @@
           <a:p>
             <a:pPr algn="l"/>
             <a:r>
-              <a:rPr sz="1300" b="0" i="1">
+              <a:rPr sz="1000" b="0" i="0">
                 <a:solidFill>
                   <a:srgbClr val="6E6658"/>
                 </a:solidFill>
-                <a:latin typeface="Georgia"/>
-              </a:rPr>
-              <a:t>One binary, one variable. The server's policy deliberately violates the specification — that is the experiment, not a recommendation.</a:t>
-            </a:r>
-          </a:p>
-        </p:txBody>
-      </p:sp>
-      <p:sp>
-        <p:nvSpPr>
-          <p:cNvPr id="7" name="TextBox 6"/>
+                <a:latin typeface="Segoe UI"/>
+              </a:rPr>
+              <a:t>Scene 0 · nothing to check, and 50 hours granted</a:t>
+            </a:r>
+          </a:p>
+        </p:txBody>
+      </p:sp>
+      <p:sp>
+        <p:nvSpPr>
+          <p:cNvPr id="8" name="TextBox 7"/>
           <p:cNvSpPr txBox="1"/>
           <p:nvPr/>
         </p:nvSpPr>
         <p:spPr>
           <a:xfrm>
-            <a:off x="10225735" y="5980176"/>
-            <a:ext cx="1097280" cy="274320"/>
+            <a:off x="868680" y="5943600"/>
+            <a:ext cx="9082735" cy="457200"/>
           </a:xfrm>
           <a:prstGeom prst="rect">
             <a:avLst/>
@@ -9784,6 +11541,41 @@
           </a:bodyPr>
           <a:lstStyle/>
           <a:p>
+            <a:pPr algn="l"/>
+            <a:r>
+              <a:rPr sz="1300" b="0" i="1">
+                <a:solidFill>
+                  <a:srgbClr val="6E6658"/>
+                </a:solidFill>
+                <a:latin typeface="Georgia"/>
+              </a:rPr>
+              <a:t>One binary, one variable. The server's policy deliberately violates the specification — that is the experiment.</a:t>
+            </a:r>
+          </a:p>
+        </p:txBody>
+      </p:sp>
+      <p:sp>
+        <p:nvSpPr>
+          <p:cNvPr id="9" name="TextBox 8"/>
+          <p:cNvSpPr txBox="1"/>
+          <p:nvPr/>
+        </p:nvSpPr>
+        <p:spPr>
+          <a:xfrm>
+            <a:off x="10225735" y="5980176"/>
+            <a:ext cx="1097280" cy="274320"/>
+          </a:xfrm>
+          <a:prstGeom prst="rect">
+            <a:avLst/>
+          </a:prstGeom>
+          <a:noFill/>
+        </p:spPr>
+        <p:txBody>
+          <a:bodyPr wrap="square" anchor="t" lIns="0" rIns="0" tIns="0" bIns="0">
+            <a:spAutoFit/>
+          </a:bodyPr>
+          <a:lstStyle/>
+          <a:p>
             <a:pPr algn="r"/>
             <a:r>
               <a:rPr sz="1000" b="0" i="0" spc="80">
@@ -9792,7 +11584,7 @@
                 </a:solidFill>
                 <a:latin typeface="Segoe UI"/>
               </a:rPr>
-              <a:t>3 / 19</a:t>
+              <a:t>3 / 20</a:t>
             </a:r>
           </a:p>
         </p:txBody>
@@ -10047,7 +11839,7 @@
                 </a:solidFill>
                 <a:latin typeface="Consolas"/>
               </a:rPr>
-              <a:t>  agent        0 occurrences</a:t>
+              <a:t>   agent        0 occurrences</a:t>
             </a:r>
           </a:p>
           <a:p>
@@ -10063,7 +11855,7 @@
                 </a:solidFill>
                 <a:latin typeface="Consolas"/>
               </a:rPr>
-              <a:t>  principal    0 occurrences</a:t>
+              <a:t>   principal    0 occurrences</a:t>
             </a:r>
           </a:p>
           <a:p>
@@ -10079,7 +11871,7 @@
                 </a:solidFill>
                 <a:latin typeface="Consolas"/>
               </a:rPr>
-              <a:t>  delegation   0 occurrences</a:t>
+              <a:t>   delegation   0 occurrences</a:t>
             </a:r>
           </a:p>
           <a:p>
@@ -10095,7 +11887,7 @@
                 </a:solidFill>
                 <a:latin typeface="Consolas"/>
               </a:rPr>
-              <a:t>  mandate      0 occurrences</a:t>
+              <a:t>   mandate      0 occurrences</a:t>
             </a:r>
           </a:p>
           <a:p>
@@ -10229,7 +12021,7 @@
                 </a:solidFill>
                 <a:latin typeface="Segoe UI"/>
               </a:rPr>
-              <a:t>4 / 19</a:t>
+              <a:t>4 / 20</a:t>
             </a:r>
           </a:p>
         </p:txBody>
@@ -10417,7 +12209,7 @@
                 </a:solidFill>
                 <a:latin typeface="Segoe UI"/>
               </a:rPr>
-              <a:t>  — the Tools chapter's warning box</a:t>
+              <a:t> — the Tools chapter's warning box</a:t>
             </a:r>
           </a:p>
           <a:p>
@@ -10467,7 +12259,7 @@
                 </a:solidFill>
                 <a:latin typeface="Segoe UI"/>
               </a:rPr>
-              <a:t> root in domain, DNS, or registry</a:t>
+              <a:t> — root in domain, DNS, or registry</a:t>
             </a:r>
           </a:p>
           <a:p>
@@ -10527,7 +12319,7 @@
                 </a:solidFill>
                 <a:latin typeface="Segoe UI"/>
               </a:rPr>
-              <a:t>5 / 19</a:t>
+              <a:t>5 / 20</a:t>
             </a:r>
           </a:p>
         </p:txBody>
@@ -10808,7 +12600,7 @@
                 </a:solidFill>
                 <a:latin typeface="Segoe UI"/>
               </a:rPr>
-              <a:t>6 / 19</a:t>
+              <a:t>6 / 20</a:t>
             </a:r>
           </a:p>
         </p:txBody>
@@ -11106,7 +12898,7 @@
                 </a:solidFill>
                 <a:latin typeface="Segoe UI"/>
               </a:rPr>
-              <a:t>7 / 19</a:t>
+              <a:t>7 / 20</a:t>
             </a:r>
           </a:p>
         </p:txBody>
@@ -11267,7 +13059,7 @@
           <a:graphicData uri="http://schemas.openxmlformats.org/drawingml/2006/table">
             <a:tbl>
               <a:tblPr firstRow="1" bandRow="1">
-                <a:tableStyleId>{5C22544A-7EE6-4342-B048-85BDC9FD1C3A}</a:tableStyleId>
+                <a:tableStyleId>{2D5ABB26-0587-4C30-8999-92F81FD0307C}</a:tableStyleId>
               </a:tblPr>
               <a:tblGrid>
                 <a:gridCol w="2509040"/>
@@ -11277,7 +13069,7 @@
               <a:tr h="420624">
                 <a:tc>
                   <a:txBody>
-                    <a:bodyPr/>
+                    <a:bodyPr wrap="square"/>
                     <a:lstStyle/>
                     <a:p>
                       <a:r>
@@ -11292,6 +13084,20 @@
                     </a:p>
                   </a:txBody>
                   <a:tcPr>
+                    <a:lnL w="0">
+                      <a:noFill/>
+                    </a:lnL>
+                    <a:lnR w="0">
+                      <a:noFill/>
+                    </a:lnR>
+                    <a:lnT w="0">
+                      <a:noFill/>
+                    </a:lnT>
+                    <a:lnB w="9525">
+                      <a:solidFill>
+                        <a:srgbClr val="DCD6C8"/>
+                      </a:solidFill>
+                    </a:lnB>
                     <a:solidFill>
                       <a:srgbClr val="F7F5EF"/>
                     </a:solidFill>
@@ -11299,7 +13105,7 @@
                 </a:tc>
                 <a:tc>
                   <a:txBody>
-                    <a:bodyPr/>
+                    <a:bodyPr wrap="square"/>
                     <a:lstStyle/>
                     <a:p>
                       <a:r>
@@ -11314,6 +13120,20 @@
                     </a:p>
                   </a:txBody>
                   <a:tcPr>
+                    <a:lnL w="0">
+                      <a:noFill/>
+                    </a:lnL>
+                    <a:lnR w="0">
+                      <a:noFill/>
+                    </a:lnR>
+                    <a:lnT w="0">
+                      <a:noFill/>
+                    </a:lnT>
+                    <a:lnB w="9525">
+                      <a:solidFill>
+                        <a:srgbClr val="DCD6C8"/>
+                      </a:solidFill>
+                    </a:lnB>
                     <a:solidFill>
                       <a:srgbClr val="F7F5EF"/>
                     </a:solidFill>
@@ -11321,7 +13141,7 @@
                 </a:tc>
                 <a:tc>
                   <a:txBody>
-                    <a:bodyPr/>
+                    <a:bodyPr wrap="square"/>
                     <a:lstStyle/>
                     <a:p>
                       <a:r>
@@ -11336,6 +13156,20 @@
                     </a:p>
                   </a:txBody>
                   <a:tcPr>
+                    <a:lnL w="0">
+                      <a:noFill/>
+                    </a:lnL>
+                    <a:lnR w="0">
+                      <a:noFill/>
+                    </a:lnR>
+                    <a:lnT w="0">
+                      <a:noFill/>
+                    </a:lnT>
+                    <a:lnB w="9525">
+                      <a:solidFill>
+                        <a:srgbClr val="DCD6C8"/>
+                      </a:solidFill>
+                    </a:lnB>
                     <a:solidFill>
                       <a:srgbClr val="F7F5EF"/>
                     </a:solidFill>
@@ -11360,6 +13194,20 @@
                     </a:p>
                   </a:txBody>
                   <a:tcPr anchor="ctr">
+                    <a:lnL w="0">
+                      <a:noFill/>
+                    </a:lnL>
+                    <a:lnR w="0">
+                      <a:noFill/>
+                    </a:lnR>
+                    <a:lnT w="0">
+                      <a:noFill/>
+                    </a:lnT>
+                    <a:lnB w="9525">
+                      <a:solidFill>
+                        <a:srgbClr val="DCD6C8"/>
+                      </a:solidFill>
+                    </a:lnB>
                     <a:solidFill>
                       <a:srgbClr val="F7F5EF"/>
                     </a:solidFill>
@@ -11382,6 +13230,20 @@
                     </a:p>
                   </a:txBody>
                   <a:tcPr anchor="ctr">
+                    <a:lnL w="0">
+                      <a:noFill/>
+                    </a:lnL>
+                    <a:lnR w="0">
+                      <a:noFill/>
+                    </a:lnR>
+                    <a:lnT w="0">
+                      <a:noFill/>
+                    </a:lnT>
+                    <a:lnB w="9525">
+                      <a:solidFill>
+                        <a:srgbClr val="DCD6C8"/>
+                      </a:solidFill>
+                    </a:lnB>
                     <a:solidFill>
                       <a:srgbClr val="F7F5EF"/>
                     </a:solidFill>
@@ -11404,6 +13266,20 @@
                     </a:p>
                   </a:txBody>
                   <a:tcPr anchor="ctr">
+                    <a:lnL w="0">
+                      <a:noFill/>
+                    </a:lnL>
+                    <a:lnR w="0">
+                      <a:noFill/>
+                    </a:lnR>
+                    <a:lnT w="0">
+                      <a:noFill/>
+                    </a:lnT>
+                    <a:lnB w="9525">
+                      <a:solidFill>
+                        <a:srgbClr val="DCD6C8"/>
+                      </a:solidFill>
+                    </a:lnB>
                     <a:solidFill>
                       <a:srgbClr val="F7F5EF"/>
                     </a:solidFill>
@@ -11428,6 +13304,20 @@
                     </a:p>
                   </a:txBody>
                   <a:tcPr anchor="ctr">
+                    <a:lnL w="0">
+                      <a:noFill/>
+                    </a:lnL>
+                    <a:lnR w="0">
+                      <a:noFill/>
+                    </a:lnR>
+                    <a:lnT w="0">
+                      <a:noFill/>
+                    </a:lnT>
+                    <a:lnB w="9525">
+                      <a:solidFill>
+                        <a:srgbClr val="DCD6C8"/>
+                      </a:solidFill>
+                    </a:lnB>
                     <a:solidFill>
                       <a:srgbClr val="F7F5EF"/>
                     </a:solidFill>
@@ -11450,6 +13340,20 @@
                     </a:p>
                   </a:txBody>
                   <a:tcPr anchor="ctr">
+                    <a:lnL w="0">
+                      <a:noFill/>
+                    </a:lnL>
+                    <a:lnR w="0">
+                      <a:noFill/>
+                    </a:lnR>
+                    <a:lnT w="0">
+                      <a:noFill/>
+                    </a:lnT>
+                    <a:lnB w="9525">
+                      <a:solidFill>
+                        <a:srgbClr val="DCD6C8"/>
+                      </a:solidFill>
+                    </a:lnB>
                     <a:solidFill>
                       <a:srgbClr val="F7F5EF"/>
                     </a:solidFill>
@@ -11472,6 +13376,20 @@
                     </a:p>
                   </a:txBody>
                   <a:tcPr anchor="ctr">
+                    <a:lnL w="0">
+                      <a:noFill/>
+                    </a:lnL>
+                    <a:lnR w="0">
+                      <a:noFill/>
+                    </a:lnR>
+                    <a:lnT w="0">
+                      <a:noFill/>
+                    </a:lnT>
+                    <a:lnB w="9525">
+                      <a:solidFill>
+                        <a:srgbClr val="DCD6C8"/>
+                      </a:solidFill>
+                    </a:lnB>
                     <a:solidFill>
                       <a:srgbClr val="F7F5EF"/>
                     </a:solidFill>
@@ -11496,6 +13414,20 @@
                     </a:p>
                   </a:txBody>
                   <a:tcPr anchor="ctr">
+                    <a:lnL w="0">
+                      <a:noFill/>
+                    </a:lnL>
+                    <a:lnR w="0">
+                      <a:noFill/>
+                    </a:lnR>
+                    <a:lnT w="0">
+                      <a:noFill/>
+                    </a:lnT>
+                    <a:lnB w="9525">
+                      <a:solidFill>
+                        <a:srgbClr val="DCD6C8"/>
+                      </a:solidFill>
+                    </a:lnB>
                     <a:solidFill>
                       <a:srgbClr val="F7F5EF"/>
                     </a:solidFill>
@@ -11518,6 +13450,20 @@
                     </a:p>
                   </a:txBody>
                   <a:tcPr anchor="ctr">
+                    <a:lnL w="0">
+                      <a:noFill/>
+                    </a:lnL>
+                    <a:lnR w="0">
+                      <a:noFill/>
+                    </a:lnR>
+                    <a:lnT w="0">
+                      <a:noFill/>
+                    </a:lnT>
+                    <a:lnB w="9525">
+                      <a:solidFill>
+                        <a:srgbClr val="DCD6C8"/>
+                      </a:solidFill>
+                    </a:lnB>
                     <a:solidFill>
                       <a:srgbClr val="F7F5EF"/>
                     </a:solidFill>
@@ -11540,6 +13486,20 @@
                     </a:p>
                   </a:txBody>
                   <a:tcPr anchor="ctr">
+                    <a:lnL w="0">
+                      <a:noFill/>
+                    </a:lnL>
+                    <a:lnR w="0">
+                      <a:noFill/>
+                    </a:lnR>
+                    <a:lnT w="0">
+                      <a:noFill/>
+                    </a:lnT>
+                    <a:lnB w="9525">
+                      <a:solidFill>
+                        <a:srgbClr val="DCD6C8"/>
+                      </a:solidFill>
+                    </a:lnB>
                     <a:solidFill>
                       <a:srgbClr val="F7F5EF"/>
                     </a:solidFill>
@@ -11615,7 +13575,7 @@
                 </a:solidFill>
                 <a:latin typeface="Segoe UI"/>
               </a:rPr>
-              <a:t>8 / 19</a:t>
+              <a:t>8 / 20</a:t>
             </a:r>
           </a:p>
         </p:txBody>
@@ -11838,7 +13798,7 @@
                 </a:solidFill>
                 <a:latin typeface="Consolas"/>
               </a:rPr>
-              <a:t>Implementation.extensions["org.gleif.vlei/identity"]</a:t>
+              <a:t>capabilities.extensions["org.gleif.vlei/identity"]</a:t>
             </a:r>
           </a:p>
           <a:p>
@@ -12068,7 +14028,7 @@
                 </a:solidFill>
                 <a:latin typeface="Segoe UI"/>
               </a:rPr>
-              <a:t>9 / 19</a:t>
+              <a:t>9 / 20</a:t>
             </a:r>
           </a:p>
         </p:txBody>
